--- a/docs/content/weather/weather_lecture.pptx
+++ b/docs/content/weather/weather_lecture.pptx
@@ -3373,7 +3373,7 @@
             </a:pPr>
             <a:r>
               <a:rPr/>
-              <a:t>2026-09-04</a:t>
+              <a:t>2026-09-08</a:t>
             </a:r>
           </a:p>
         </p:txBody>

--- a/docs/content/weather/weather_lecture.pptx
+++ b/docs/content/weather/weather_lecture.pptx
@@ -3373,7 +3373,7 @@
             </a:pPr>
             <a:r>
               <a:rPr/>
-              <a:t>2026-09-08</a:t>
+              <a:t>2026-09-10</a:t>
             </a:r>
           </a:p>
         </p:txBody>

--- a/docs/content/weather/weather_lecture.pptx
+++ b/docs/content/weather/weather_lecture.pptx
@@ -3373,7 +3373,7 @@
             </a:pPr>
             <a:r>
               <a:rPr/>
-              <a:t>2026-09-10</a:t>
+              <a:t>2026-09-14</a:t>
             </a:r>
           </a:p>
         </p:txBody>

--- a/docs/content/weather/weather_lecture.pptx
+++ b/docs/content/weather/weather_lecture.pptx
@@ -3373,7 +3373,7 @@
             </a:pPr>
             <a:r>
               <a:rPr/>
-              <a:t>2026-09-14</a:t>
+              <a:t>2026-09-21</a:t>
             </a:r>
           </a:p>
         </p:txBody>

--- a/docs/content/weather/weather_lecture.pptx
+++ b/docs/content/weather/weather_lecture.pptx
@@ -3373,7 +3373,7 @@
             </a:pPr>
             <a:r>
               <a:rPr/>
-              <a:t>2026-09-21</a:t>
+              <a:t>2026-09-22</a:t>
             </a:r>
           </a:p>
         </p:txBody>

--- a/docs/content/weather/weather_lecture.pptx
+++ b/docs/content/weather/weather_lecture.pptx
@@ -3373,7 +3373,7 @@
             </a:pPr>
             <a:r>
               <a:rPr/>
-              <a:t>2026-09-22</a:t>
+              <a:t>2026-09-23</a:t>
             </a:r>
           </a:p>
         </p:txBody>

--- a/docs/content/weather/weather_lecture.pptx
+++ b/docs/content/weather/weather_lecture.pptx
@@ -8354,7 +8354,17 @@
                 </a:solidFill>
                 <a:latin typeface="Courier"/>
               </a:rPr>
-              <a:t>), </a:t>
+              <a:t>),</a:t>
+            </a:r>
+            <a:br/>
+            <a:r>
+              <a:rPr>
+                <a:solidFill>
+                  <a:srgbClr val="003B4F"/>
+                </a:solidFill>
+                <a:latin typeface="Courier"/>
+              </a:rPr>
+              <a:t>    </a:t>
             </a:r>
             <a:r>
               <a:rPr>
@@ -12501,7 +12511,17 @@
                 </a:solidFill>
                 <a:latin typeface="Courier"/>
               </a:rPr>
-              <a:t>), </a:t>
+              <a:t>),</a:t>
+            </a:r>
+            <a:br/>
+            <a:r>
+              <a:rPr>
+                <a:solidFill>
+                  <a:srgbClr val="003B4F"/>
+                </a:solidFill>
+                <a:latin typeface="Courier"/>
+              </a:rPr>
+              <a:t>    </a:t>
             </a:r>
             <a:r>
               <a:rPr>
@@ -12661,7 +12681,17 @@
                 </a:solidFill>
                 <a:latin typeface="Courier"/>
               </a:rPr>
-              <a:t>), </a:t>
+              <a:t>),</a:t>
+            </a:r>
+            <a:br/>
+            <a:r>
+              <a:rPr>
+                <a:solidFill>
+                  <a:srgbClr val="003B4F"/>
+                </a:solidFill>
+                <a:latin typeface="Courier"/>
+              </a:rPr>
+              <a:t>    </a:t>
             </a:r>
             <a:r>
               <a:rPr>
@@ -14015,7 +14045,17 @@
                 </a:solidFill>
                 <a:latin typeface="Courier"/>
               </a:rPr>
-              <a:t>, </a:t>
+              <a:t>,</a:t>
+            </a:r>
+            <a:br/>
+            <a:r>
+              <a:rPr>
+                <a:solidFill>
+                  <a:srgbClr val="003B4F"/>
+                </a:solidFill>
+                <a:latin typeface="Courier"/>
+              </a:rPr>
+              <a:t>                      </a:t>
             </a:r>
             <a:r>
               <a:rPr>
@@ -14097,53 +14137,53 @@
               </a:rPr>
               <a:t>Rows: 25,441
 Columns: 47
-$ STNID            &lt;chr&gt; "727450-14913", "727450-14913", "727450-14913", "7274…
-$ NAME             &lt;chr&gt; "DULUTH INTERNATIONAL AIRPORT", "DULUTH INTERNATIONAL…
-$ CTRY             &lt;chr&gt; "US", "US", "US", "US", "US", "US", "US", "US", "US",…
-$ COUNTRY_NAME     &lt;chr&gt; "UNITED STATES", "UNITED STATES", "UNITED STATES", "U…
-$ ISO2C            &lt;chr&gt; "US", "US", "US", "US", "US", "US", "US", "US", "US",…
-$ ISO3C            &lt;chr&gt; "USA", "USA", "USA", "USA", "USA", "USA", "USA", "USA…
-$ STATE            &lt;chr&gt; "MN", "MN", "MN", "MN", "MN", "MN", "MN", "MN", "MN",…
-$ LATITUDE         &lt;dbl&gt; 46.844, 46.844, 46.844, 46.844, 46.844, 46.844, 46.84…
-$ LONGITUDE        &lt;dbl&gt; -92.187, -92.187, -92.187, -92.187, -92.187, -92.187,…
-$ ELEVATION        &lt;dbl&gt; 436.8, 436.8, 436.8, 436.8, 436.8, 436.8, 436.8, 436.…
-$ BEGIN            &lt;int&gt; 19480101, 19480101, 19480101, 19480101, 19480101, 194…
-$ END              &lt;int&gt; 20250827, 20250827, 20250827, 20250827, 20250827, 202…
-$ YEARMODA         &lt;date&gt; 1948-01-01, 1948-01-02, 1948-01-03, 1948-01-04, 1948…
-$ YEAR             &lt;int&gt; 1948, 1948, 1948, 1948, 1948, 1948, 1948, 1948, 1948,…
-$ MONTH            &lt;int&gt; 1, 1, 1, 1, 1, 1, 1, 1, 1, 1, 1, 1, 1, 1, 1, 1, 1, 1,…
-$ DAY              &lt;int&gt; 1, 2, 3, 4, 5, 6, 7, 8, 9, 10, 11, 12, 13, 14, 15, 16…
-$ YDAY             &lt;int&gt; 1, 2, 3, 4, 5, 6, 7, 8, 9, 10, 11, 12, 13, 14, 15, 16…
-$ TEMP             &lt;dbl&gt; -8.2, -4.1, -8.4, -6.5, -2.9, -7.8, -8.8, -4.0, -5.8,…
-$ TEMP_ATTRIBUTES  &lt;int&gt; 18, 24, 24, 24, 24, 24, 24, 24, 24, 24, 24, 24, 24, 2…
-$ DEWP             &lt;dbl&gt; -9.9, -6.5, -10.8, -8.8, -5.9, -12.2, -13.2, -5.8, -6…
-$ DEWP_ATTRIBUTES  &lt;int&gt; 18, 24, 24, 24, 24, 24, 24, 24, 24, 24, 24, 24, 24, 2…
-$ SLP              &lt;dbl&gt; 1019.8, 1011.1, 1010.0, 1016.8, 1016.3, 1019.3, 1015.…
-$ SLP_ATTRIBUTES   &lt;int&gt; 18, 24, 24, 24, 24, 24, 24, 24, 24, 24, 24, 24, 24, 2…
-$ STP              &lt;dbl&gt; 965.3, 958.0, 956.6, 963.1, 962.9, 965.6, 961.8, 957.…
-$ STP_ATTRIBUTES   &lt;int&gt; 18, 24, 24, 24, 24, 24, 24, 24, 24, 23, 24, 24, 24, 2…
-$ VISIB            &lt;dbl&gt; 22.0, 22.7, 18.0, 22.4, 23.2, 24.0, 23.7, 15.0, 16.6,…
-$ VISIB_ATTRIBUTES &lt;int&gt; 18, 24, 24, 24, 24, 24, 24, 24, 24, 24, 24, 24, 24, 2…
-$ WDSP             &lt;dbl&gt; 4.4, 4.3, 3.0, 4.9, 6.4, 8.3, 3.8, 2.8, 5.9, 2.7, 5.5…
-$ WDSP_ATTRIBUTES  &lt;int&gt; 18, 24, 24, 24, 24, 24, 24, 24, 24, 24, 24, 24, 24, 2…
-$ MXSPD            &lt;dbl&gt; 8.2, 8.8, 7.2, 8.2, 11.8, 11.8, 7.2, 6.2, 11.8, 5.2, …
-$ GUST             &lt;dbl&gt; NA, NA, NA, NA, NA, NA, NA, NA, NA, NA, NA, NA, NA, N…
-$ MAX              &lt;dbl&gt; -3.1, -2.0, -5.4, -1.5, 1.3, -1.7, -2.6, -2.0, -2.2, …
-$ MAX_ATTRIBUTES   &lt;chr&gt; NA, NA, NA, NA, NA, "*", NA, NA, "*", NA, NA, "*", "*…
-$ MIN              &lt;dbl&gt; -15.6, -8.7, -12.8, -9.8, -7.0, -15.4, -15.0, -6.5, -…
-$ MIN_ATTRIBUTES   &lt;chr&gt; "*", NA, "*", NA, NA, NA, "*", NA, NA, "*", "*", NA, …
-$ PRCP             &lt;dbl&gt; 0.00, 0.00, 0.00, 0.00, 0.00, 0.00, 0.00, 7.87, 0.00,…
-$ PRCP_ATTRIBUTES  &lt;chr&gt; "G", "G", "G", "G", "G", "G", "G", "G", "G", "G", "G"…
-$ SNDP             &lt;dbl&gt; 279.4, 279.4, 279.4, 279.4, 248.9, 248.9, 248.9, 248.…
-$ I_FOG            &lt;dbl&gt; 0, 1, 1, 1, 0, 0, 0, 0, 0, 0, 1, 0, 0, 0, 0, 0, 0, 0,…
-$ I_RAIN_DRIZZLE   &lt;dbl&gt; 0, 0, 0, 0, 0, 0, 0, 1, 1, 0, 0, 0, 0, 0, 0, 0, 0, 0,…
-$ I_SNOW_ICE       &lt;dbl&gt; 1, 1, 1, 1, 1, 0, 0, 1, 1, 0, 1, 1, 1, 0, 1, 0, 0, 1,…
-$ I_HAIL           &lt;dbl&gt; 0, 0, 0, 0, 0, 0, 0, 0, 0, 0, 0, 0, 0, 0, 0, 0, 0, 0,…
-$ I_THUNDER        &lt;dbl&gt; 0, 0, 0, 0, 0, 0, 0, 0, 0, 0, 0, 0, 0, 0, 0, 0, 0, 0,…
-$ I_TORNADO_FUNNEL &lt;dbl&gt; 0, 0, 0, 0, 0, 0, 0, 0, 0, 0, 0, 0, 0, 0, 0, 0, 0, 0,…
-$ EA               &lt;dbl&gt; 0.3, 0.4, 0.3, 0.3, 0.4, 0.2, 0.2, 0.4, 0.4, 0.1, 0.3…
-$ ES               &lt;dbl&gt; 0.3, 0.5, 0.3, 0.4, 0.5, 0.3, 0.3, 0.5, 0.4, 0.1, 0.3…
-$ RH               &lt;dbl&gt; 87.5, 83.4, 82.8, 83.7, 79.8, 70.7, 70.5, 87.3, 91.9,…</a:t>
+$ STNID            &lt;chr&gt; "727450-14913", "727450-14913", "72745…
+$ NAME             &lt;chr&gt; "DULUTH INTERNATIONAL AIRPORT", "DULUT…
+$ CTRY             &lt;chr&gt; "US", "US", "US", "US", "US", "US", "U…
+$ COUNTRY_NAME     &lt;chr&gt; "UNITED STATES", "UNITED STATES", "UNI…
+$ ISO2C            &lt;chr&gt; "US", "US", "US", "US", "US", "US", "U…
+$ ISO3C            &lt;chr&gt; "USA", "USA", "USA", "USA", "USA", "US…
+$ STATE            &lt;chr&gt; "MN", "MN", "MN", "MN", "MN", "MN", "M…
+$ LATITUDE         &lt;dbl&gt; 46.844, 46.844, 46.844, 46.844, 46.844…
+$ LONGITUDE        &lt;dbl&gt; -92.187, -92.187, -92.187, -92.187, -9…
+$ ELEVATION        &lt;dbl&gt; 436.8, 436.8, 436.8, 436.8, 436.8, 436…
+$ BEGIN            &lt;int&gt; 19480101, 19480101, 19480101, 19480101…
+$ END              &lt;int&gt; 20250827, 20250827, 20250827, 20250827…
+$ YEARMODA         &lt;date&gt; 1948-01-01, 1948-01-02, 1948-01-03, 1…
+$ YEAR             &lt;int&gt; 1948, 1948, 1948, 1948, 1948, 1948, 19…
+$ MONTH            &lt;int&gt; 1, 1, 1, 1, 1, 1, 1, 1, 1, 1, 1, 1, 1,…
+$ DAY              &lt;int&gt; 1, 2, 3, 4, 5, 6, 7, 8, 9, 10, 11, 12,…
+$ YDAY             &lt;int&gt; 1, 2, 3, 4, 5, 6, 7, 8, 9, 10, 11, 12,…
+$ TEMP             &lt;dbl&gt; -8.2, -4.1, -8.4, -6.5, -2.9, -7.8, -8…
+$ TEMP_ATTRIBUTES  &lt;int&gt; 18, 24, 24, 24, 24, 24, 24, 24, 24, 24…
+$ DEWP             &lt;dbl&gt; -9.9, -6.5, -10.8, -8.8, -5.9, -12.2, …
+$ DEWP_ATTRIBUTES  &lt;int&gt; 18, 24, 24, 24, 24, 24, 24, 24, 24, 24…
+$ SLP              &lt;dbl&gt; 1019.8, 1011.1, 1010.0, 1016.8, 1016.3…
+$ SLP_ATTRIBUTES   &lt;int&gt; 18, 24, 24, 24, 24, 24, 24, 24, 24, 24…
+$ STP              &lt;dbl&gt; 965.3, 958.0, 956.6, 963.1, 962.9, 965…
+$ STP_ATTRIBUTES   &lt;int&gt; 18, 24, 24, 24, 24, 24, 24, 24, 24, 23…
+$ VISIB            &lt;dbl&gt; 22.0, 22.7, 18.0, 22.4, 23.2, 24.0, 23…
+$ VISIB_ATTRIBUTES &lt;int&gt; 18, 24, 24, 24, 24, 24, 24, 24, 24, 24…
+$ WDSP             &lt;dbl&gt; 4.4, 4.3, 3.0, 4.9, 6.4, 8.3, 3.8, 2.8…
+$ WDSP_ATTRIBUTES  &lt;int&gt; 18, 24, 24, 24, 24, 24, 24, 24, 24, 24…
+$ MXSPD            &lt;dbl&gt; 8.2, 8.8, 7.2, 8.2, 11.8, 11.8, 7.2, 6…
+$ GUST             &lt;dbl&gt; NA, NA, NA, NA, NA, NA, NA, NA, NA, NA…
+$ MAX              &lt;dbl&gt; -3.1, -2.0, -5.4, -1.5, 1.3, -1.7, -2.…
+$ MAX_ATTRIBUTES   &lt;chr&gt; NA, NA, NA, NA, NA, "*", NA, NA, "*", …
+$ MIN              &lt;dbl&gt; -15.6, -8.7, -12.8, -9.8, -7.0, -15.4,…
+$ MIN_ATTRIBUTES   &lt;chr&gt; "*", NA, "*", NA, NA, NA, "*", NA, NA,…
+$ PRCP             &lt;dbl&gt; 0.00, 0.00, 0.00, 0.00, 0.00, 0.00, 0.…
+$ PRCP_ATTRIBUTES  &lt;chr&gt; "G", "G", "G", "G", "G", "G", "G", "G"…
+$ SNDP             &lt;dbl&gt; 279.4, 279.4, 279.4, 279.4, 248.9, 248…
+$ I_FOG            &lt;dbl&gt; 0, 1, 1, 1, 0, 0, 0, 0, 0, 0, 1, 0, 0,…
+$ I_RAIN_DRIZZLE   &lt;dbl&gt; 0, 0, 0, 0, 0, 0, 0, 1, 1, 0, 0, 0, 0,…
+$ I_SNOW_ICE       &lt;dbl&gt; 1, 1, 1, 1, 1, 0, 0, 1, 1, 0, 1, 1, 1,…
+$ I_HAIL           &lt;dbl&gt; 0, 0, 0, 0, 0, 0, 0, 0, 0, 0, 0, 0, 0,…
+$ I_THUNDER        &lt;dbl&gt; 0, 0, 0, 0, 0, 0, 0, 0, 0, 0, 0, 0, 0,…
+$ I_TORNADO_FUNNEL &lt;dbl&gt; 0, 0, 0, 0, 0, 0, 0, 0, 0, 0, 0, 0, 0,…
+$ EA               &lt;dbl&gt; 0.3, 0.4, 0.3, 0.3, 0.4, 0.2, 0.2, 0.4…
+$ ES               &lt;dbl&gt; 0.3, 0.5, 0.3, 0.4, 0.5, 0.3, 0.3, 0.5…
+$ RH               &lt;dbl&gt; 87.5, 83.4, 82.8, 83.7, 79.8, 70.7, 70…</a:t>
             </a:r>
           </a:p>
         </p:txBody>
@@ -14500,22 +14540,22 @@
               <a:rPr>
                 <a:latin typeface="Courier"/>
               </a:rPr>
-              <a:t>          STNID                         NAME   YEARMODA  YEAR MONTH   DAY  TEMP
-         &lt;char&gt;                       &lt;char&gt;     &lt;Date&gt; &lt;int&gt; &lt;int&gt; &lt;int&gt; &lt;num&gt;
-1: 727450-14913 DULUTH INTERNATIONAL AIRPORT 1948-01-01  1948     1     1  -8.2
-2: 727450-14913 DULUTH INTERNATIONAL AIRPORT 1948-01-02  1948     1     2  -4.1
-3: 727450-14913 DULUTH INTERNATIONAL AIRPORT 1948-01-03  1948     1     3  -8.4
-4: 727450-14913 DULUTH INTERNATIONAL AIRPORT 1948-01-04  1948     1     4  -6.5
-5: 727450-14913 DULUTH INTERNATIONAL AIRPORT 1948-01-05  1948     1     5  -2.9
-6: 727450-14913 DULUTH INTERNATIONAL AIRPORT 1948-01-06  1948     1     6  -7.8
-   MXSPD  PRCP I_SNOW_ICE
-   &lt;num&gt; &lt;num&gt;      &lt;num&gt;
-1:   8.2     0          1
-2:   8.8     0          1
-3:   7.2     0          1
-4:   8.2     0          1
-5:  11.8     0          1
-6:  11.8     0          0</a:t>
+              <a:t>          STNID                         NAME   YEARMODA  YEAR
+         &lt;char&gt;                       &lt;char&gt;     &lt;Date&gt; &lt;int&gt;
+1: 727450-14913 DULUTH INTERNATIONAL AIRPORT 1948-01-01  1948
+2: 727450-14913 DULUTH INTERNATIONAL AIRPORT 1948-01-02  1948
+3: 727450-14913 DULUTH INTERNATIONAL AIRPORT 1948-01-03  1948
+4: 727450-14913 DULUTH INTERNATIONAL AIRPORT 1948-01-04  1948
+5: 727450-14913 DULUTH INTERNATIONAL AIRPORT 1948-01-05  1948
+6: 727450-14913 DULUTH INTERNATIONAL AIRPORT 1948-01-06  1948
+   MONTH   DAY  TEMP MXSPD  PRCP I_SNOW_ICE
+   &lt;int&gt; &lt;int&gt; &lt;num&gt; &lt;num&gt; &lt;num&gt;      &lt;num&gt;
+1:     1     1  -8.2   8.2     0          1
+2:     1     2  -4.1   8.8     0          1
+3:     1     3  -8.4   7.2     0          1
+4:     1     4  -6.5   8.2     0          1
+5:     1     5  -2.9  11.8     0          1
+6:     1     6  -7.8  11.8     0          0</a:t>
             </a:r>
           </a:p>
         </p:txBody>
@@ -14836,7 +14876,26 @@
                 </a:solidFill>
                 <a:latin typeface="Courier"/>
               </a:rPr>
-              <a:t># names(dlh_temp_df) shows the real names</a:t>
+              <a:t># names(dlh_temp_df)</a:t>
+            </a:r>
+            <a:br/>
+            <a:r>
+              <a:rPr>
+                <a:solidFill>
+                  <a:srgbClr val="003B4F"/>
+                </a:solidFill>
+                <a:latin typeface="Courier"/>
+              </a:rPr>
+              <a:t>                               </a:t>
+            </a:r>
+            <a:r>
+              <a:rPr>
+                <a:solidFill>
+                  <a:srgbClr val="5E5E5E"/>
+                </a:solidFill>
+                <a:latin typeface="Courier"/>
+              </a:rPr>
+              <a:t># shows the real names</a:t>
             </a:r>
           </a:p>
         </p:txBody>

--- a/docs/content/weather/weather_lecture.pptx
+++ b/docs/content/weather/weather_lecture.pptx
@@ -3373,7 +3373,7 @@
             </a:pPr>
             <a:r>
               <a:rPr/>
-              <a:t>2026-09-23</a:t>
+              <a:t>2026-09-24</a:t>
             </a:r>
           </a:p>
         </p:txBody>

--- a/docs/content/weather/weather_lecture.pptx
+++ b/docs/content/weather/weather_lecture.pptx
@@ -3373,7 +3373,7 @@
             </a:pPr>
             <a:r>
               <a:rPr/>
-              <a:t>2026-09-24</a:t>
+              <a:t>2026-09-29</a:t>
             </a:r>
           </a:p>
         </p:txBody>

--- a/docs/content/weather/weather_lecture.pptx
+++ b/docs/content/weather/weather_lecture.pptx
@@ -3373,7 +3373,7 @@
             </a:pPr>
             <a:r>
               <a:rPr/>
-              <a:t>2026-09-29</a:t>
+              <a:t>2026-10-01</a:t>
             </a:r>
           </a:p>
         </p:txBody>

--- a/docs/content/weather/weather_lecture.pptx
+++ b/docs/content/weather/weather_lecture.pptx
@@ -3368,7 +3368,7 @@
             </a:pPr>
             <a:r>
               <a:rPr/>
-              <a:t>2026-10-05</a:t>
+              <a:t>2026-10-08</a:t>
             </a:r>
           </a:p>
         </p:txBody>
@@ -3553,8 +3553,7 @@
               <a:rPr>
                 <a:latin typeface="Courier"/>
               </a:rPr>
-              <a:t>[1] "yearmoda" "year"     "month"    "day"      "yday"    
-[6] "temp"    </a:t>
+              <a:t>[1] "yearmoda" "year"     "month"    "day"      "yday"     "temp"    </a:t>
             </a:r>
           </a:p>
         </p:txBody>
@@ -13024,7 +13023,7 @@
                 </a:solidFill>
                 <a:latin typeface="Courier"/>
               </a:rPr>
-              <a:t>readRDS</a:t>
+              <a:t>get_GSOD</a:t>
             </a:r>
             <a:r>
               <a:rPr>
@@ -13038,11 +13037,93 @@
             <a:r>
               <a:rPr>
                 <a:solidFill>
+                  <a:srgbClr val="657422"/>
+                </a:solidFill>
+                <a:latin typeface="Courier"/>
+              </a:rPr>
+              <a:t>years =</a:t>
+            </a:r>
+            <a:r>
+              <a:rPr>
+                <a:solidFill>
+                  <a:srgbClr val="003B4F"/>
+                </a:solidFill>
+                <a:latin typeface="Courier"/>
+              </a:rPr>
+              <a:t> </a:t>
+            </a:r>
+            <a:r>
+              <a:rPr>
+                <a:solidFill>
+                  <a:srgbClr val="AD0000"/>
+                </a:solidFill>
+                <a:latin typeface="Courier"/>
+              </a:rPr>
+              <a:t>1948</a:t>
+            </a:r>
+            <a:r>
+              <a:rPr>
+                <a:solidFill>
+                  <a:srgbClr val="5E5E5E"/>
+                </a:solidFill>
+                <a:latin typeface="Courier"/>
+              </a:rPr>
+              <a:t>:</a:t>
+            </a:r>
+            <a:r>
+              <a:rPr>
+                <a:solidFill>
+                  <a:srgbClr val="AD0000"/>
+                </a:solidFill>
+                <a:latin typeface="Courier"/>
+              </a:rPr>
+              <a:t>2025</a:t>
+            </a:r>
+            <a:r>
+              <a:rPr>
+                <a:solidFill>
+                  <a:srgbClr val="003B4F"/>
+                </a:solidFill>
+                <a:latin typeface="Courier"/>
+              </a:rPr>
+              <a:t>,</a:t>
+            </a:r>
+            <a:br/>
+            <a:r>
+              <a:rPr>
+                <a:solidFill>
+                  <a:srgbClr val="003B4F"/>
+                </a:solidFill>
+                <a:latin typeface="Courier"/>
+              </a:rPr>
+              <a:t>                      </a:t>
+            </a:r>
+            <a:r>
+              <a:rPr>
+                <a:solidFill>
+                  <a:srgbClr val="657422"/>
+                </a:solidFill>
+                <a:latin typeface="Courier"/>
+              </a:rPr>
+              <a:t>station =</a:t>
+            </a:r>
+            <a:r>
+              <a:rPr>
+                <a:solidFill>
+                  <a:srgbClr val="003B4F"/>
+                </a:solidFill>
+                <a:latin typeface="Courier"/>
+              </a:rPr>
+              <a:t> </a:t>
+            </a:r>
+            <a:r>
+              <a:rPr>
+                <a:solidFill>
                   <a:srgbClr val="20794D"/>
                 </a:solidFill>
                 <a:latin typeface="Courier"/>
               </a:rPr>
-              <a:t>"duluth_cached.rds"</a:t>
+              <a:t>"727450-14913"</a:t>
             </a:r>
             <a:r>
               <a:rPr>
@@ -13061,24 +13142,6 @@
                 <a:latin typeface="Courier"/>
               </a:rPr>
               <a:t>%&gt;%</a:t>
-            </a:r>
-            <a:r>
-              <a:rPr>
-                <a:solidFill>
-                  <a:srgbClr val="003B4F"/>
-                </a:solidFill>
-                <a:latin typeface="Courier"/>
-              </a:rPr>
-              <a:t>  </a:t>
-            </a:r>
-            <a:r>
-              <a:rPr>
-                <a:solidFill>
-                  <a:srgbClr val="5E5E5E"/>
-                </a:solidFill>
-                <a:latin typeface="Courier"/>
-              </a:rPr>
-              <a:t># STUB</a:t>
             </a:r>
             <a:br/>
             <a:r>

--- a/docs/content/weather/weather_lecture.pptx
+++ b/docs/content/weather/weather_lecture.pptx
@@ -34,6 +34,7 @@
     <p:sldId id="282" r:id="rId28"/>
     <p:sldId id="283" r:id="rId29"/>
     <p:sldId id="284" r:id="rId30"/>
+    <p:sldId id="285" r:id="rId31"/>
   </p:sldIdLst>
   <p:sldSz cx="9144000" cy="5143500" type="screen16x9"/>
   <p:notesSz cx="6858000" cy="9144000"/>
@@ -3576,7 +3577,7 @@
             <a:pPr lvl="0"/>
             <a:r>
               <a:rPr b="1"/>
-              <a:t>~28,000 rows</a:t>
+              <a:t>~25,000 rows</a:t>
             </a:r>
             <a:r>
               <a:rPr/>
@@ -4296,14 +4297,14 @@
             </a:r>
             <a:r>
               <a:rPr/>
-              <a:t> — that is summer vs winter, repeated 78 times</a:t>
-            </a:r>
-          </a:p>
-          <a:p>
-            <a:pPr lvl="0"/>
-            <a:r>
-              <a:rPr/>
-              <a:t>~28,000 points on top of each other</a:t>
+              <a:t> — that is summer vs winter, repeated 69 times</a:t>
+            </a:r>
+          </a:p>
+          <a:p>
+            <a:pPr lvl="0"/>
+            <a:r>
+              <a:rPr/>
+              <a:t>~25,000 points on top of each other</a:t>
             </a:r>
           </a:p>
           <a:p>
@@ -4675,7 +4676,7 @@
             <a:pPr lvl="0"/>
             <a:r>
               <a:rPr b="1"/>
-              <a:t>28,000 rows become 78</a:t>
+              <a:t>25,000 rows become 69</a:t>
             </a:r>
           </a:p>
           <a:p>
@@ -5083,7 +5084,7 @@
             <a:pPr lvl="0"/>
             <a:r>
               <a:rPr/>
-              <a:t>78 points instead of 28,000 — and the story is </a:t>
+              <a:t>69 points instead of 25,000 — and the story is </a:t>
             </a:r>
             <a:r>
               <a:rPr i="1"/>
@@ -5625,7 +5626,7 @@
             <a:pPr lvl="1"/>
             <a:r>
               <a:rPr/>
-              <a:t>over ~78 years → roughly </a:t>
+              <a:t>over ~77 years → roughly </a:t>
             </a:r>
             <a:r>
               <a:rPr b="1"/>
@@ -5690,7 +5691,7 @@
             </a:r>
             <a:r>
               <a:rPr b="1"/>
-              <a:t> ≈ 0.34</a:t>
+              <a:t> ≈ 0.32</a:t>
             </a:r>
           </a:p>
           <a:p>
@@ -7798,7 +7799,7 @@
             <a:pPr lvl="1"/>
             <a:r>
               <a:rPr/>
-              <a:t>78 years × 2 seasons ≈ 156 rows</a:t>
+              <a:t>69 years × 2 seasons = 138 rows</a:t>
             </a:r>
           </a:p>
           <a:p>
@@ -8627,7 +8628,7 @@
             </a:pPr>
             <a:r>
               <a:rPr b="1"/>
-              <a:t>Summer slope ≈ 0.021 °C/year</a:t>
+              <a:t>Summer slope ≈ 0.022 °C/year</a:t>
             </a:r>
           </a:p>
           <a:p>
@@ -8638,7 +8639,7 @@
             </a:r>
             <a:r>
               <a:rPr b="1"/>
-              <a:t>0.21 °C per decade</a:t>
+              <a:t>0.22 °C per decade</a:t>
             </a:r>
           </a:p>
           <a:p>
@@ -8960,7 +8961,7 @@
             </a:pPr>
             <a:r>
               <a:rPr b="1"/>
-              <a:t>Winter slope ≈ 0.034 °C/year</a:t>
+              <a:t>Winter slope ≈ 0.037 °C/year</a:t>
             </a:r>
           </a:p>
           <a:p>
@@ -8971,7 +8972,7 @@
             </a:r>
             <a:r>
               <a:rPr b="1"/>
-              <a:t>0.34 °C per decade</a:t>
+              <a:t>0.37 °C per decade</a:t>
             </a:r>
           </a:p>
           <a:p>
@@ -8982,7 +8983,7 @@
             </a:r>
             <a:r>
               <a:rPr/>
-              <a:t> = 0.001 → real</a:t>
+              <a:t> = 0.0006 → real</a:t>
             </a:r>
           </a:p>
           <a:p>
@@ -8991,7 +8992,7 @@
             </a:pPr>
             <a:r>
               <a:rPr b="1"/>
-              <a:t>Winter is warming about 1.6× as fast as summer.</a:t>
+              <a:t>Winter is warming about 1.7× as fast as summer.</a:t>
             </a:r>
           </a:p>
           <a:p>
@@ -9262,7 +9263,7 @@
                       </a:pPr>
                       <a:r>
                         <a:rPr/>
-                        <a:t>&lt;0.001</a:t>
+                        <a:t>0.0000003</a:t>
                       </a:r>
                     </a:p>
                   </a:txBody>
@@ -9294,7 +9295,7 @@
                       </a:pPr>
                       <a:r>
                         <a:rPr/>
-                        <a:t>0.021</a:t>
+                        <a:t>0.022</a:t>
                       </a:r>
                     </a:p>
                   </a:txBody>
@@ -9309,7 +9310,7 @@
                       </a:pPr>
                       <a:r>
                         <a:rPr/>
-                        <a:t>0.21</a:t>
+                        <a:t>0.22</a:t>
                       </a:r>
                     </a:p>
                   </a:txBody>
@@ -9324,7 +9325,7 @@
                       </a:pPr>
                       <a:r>
                         <a:rPr/>
-                        <a:t>&lt;0.001</a:t>
+                        <a:t>0.0002</a:t>
                       </a:r>
                     </a:p>
                   </a:txBody>
@@ -9356,7 +9357,7 @@
                       </a:pPr>
                       <a:r>
                         <a:rPr/>
-                        <a:t>0.034</a:t>
+                        <a:t>0.037</a:t>
                       </a:r>
                     </a:p>
                   </a:txBody>
@@ -9371,7 +9372,7 @@
                       </a:pPr>
                       <a:r>
                         <a:rPr/>
-                        <a:t>0.34</a:t>
+                        <a:t>0.37</a:t>
                       </a:r>
                     </a:p>
                   </a:txBody>
@@ -9386,7 +9387,7 @@
                       </a:pPr>
                       <a:r>
                         <a:rPr/>
-                        <a:t>0.001</a:t>
+                        <a:t>0.0006</a:t>
                       </a:r>
                     </a:p>
                   </a:txBody>
@@ -9471,7 +9472,7 @@
             </a:pPr>
             <a:r>
               <a:rPr sz="2000" i="1"/>
-              <a:t>Mean annual temperature at Duluth rose significantly from 1948 to 2025 (linear regression: slope = 0.027 °C yr⁻¹, equivalent to 0.27 °C per decade; F(1, 68) = 34.3, p &lt; 0.001, R² = 0.34). Winter warmed roughly 1.6 times faster than summer (0.34 vs 0.21 °C per decade).</a:t>
+              <a:t>Mean annual temperature at Duluth rose significantly from 1948 to 2024 (linear regression: slope = 0.027 °C yr⁻¹, equivalent to 0.27 °C per decade; F(1, 67) = 32.1, p &lt; 0.001, R² = 0.32). Winter warmed roughly 1.7 times faster than summer (0.37 vs 0.22 °C per decade).</a:t>
             </a:r>
           </a:p>
           <a:p>
@@ -9597,27 +9598,245 @@
                 </a:solidFill>
                 <a:latin typeface="Courier"/>
               </a:rPr>
-              <a:t># Find stations near a place you care about ------------</a:t>
+              <a:t># NASA POWER - lon and lat, no station -----------------</a:t>
             </a:r>
             <a:br/>
             <a:r>
               <a:rPr>
                 <a:solidFill>
+                  <a:srgbClr val="003B4F"/>
+                </a:solidFill>
+                <a:latin typeface="Courier"/>
+              </a:rPr>
+              <a:t>city_df &lt;- </a:t>
+            </a:r>
+            <a:r>
+              <a:rPr>
+                <a:solidFill>
+                  <a:srgbClr val="4758AB"/>
+                </a:solidFill>
+                <a:latin typeface="Courier"/>
+              </a:rPr>
+              <a:t>get_power</a:t>
+            </a:r>
+            <a:r>
+              <a:rPr>
+                <a:solidFill>
+                  <a:srgbClr val="003B4F"/>
+                </a:solidFill>
+                <a:latin typeface="Courier"/>
+              </a:rPr>
+              <a:t>(</a:t>
+            </a:r>
+            <a:r>
+              <a:rPr>
+                <a:solidFill>
+                  <a:srgbClr val="657422"/>
+                </a:solidFill>
+                <a:latin typeface="Courier"/>
+              </a:rPr>
+              <a:t>community =</a:t>
+            </a:r>
+            <a:r>
+              <a:rPr>
+                <a:solidFill>
+                  <a:srgbClr val="003B4F"/>
+                </a:solidFill>
+                <a:latin typeface="Courier"/>
+              </a:rPr>
+              <a:t> </a:t>
+            </a:r>
+            <a:r>
+              <a:rPr>
+                <a:solidFill>
+                  <a:srgbClr val="20794D"/>
+                </a:solidFill>
+                <a:latin typeface="Courier"/>
+              </a:rPr>
+              <a:t>"ag"</a:t>
+            </a:r>
+            <a:r>
+              <a:rPr>
+                <a:solidFill>
+                  <a:srgbClr val="003B4F"/>
+                </a:solidFill>
+                <a:latin typeface="Courier"/>
+              </a:rPr>
+              <a:t>,</a:t>
+            </a:r>
+            <a:br/>
+            <a:r>
+              <a:rPr>
+                <a:solidFill>
+                  <a:srgbClr val="003B4F"/>
+                </a:solidFill>
+                <a:latin typeface="Courier"/>
+              </a:rPr>
+              <a:t>                     </a:t>
+            </a:r>
+            <a:r>
+              <a:rPr>
+                <a:solidFill>
+                  <a:srgbClr val="657422"/>
+                </a:solidFill>
+                <a:latin typeface="Courier"/>
+              </a:rPr>
+              <a:t>lonlat =</a:t>
+            </a:r>
+            <a:r>
+              <a:rPr>
+                <a:solidFill>
+                  <a:srgbClr val="003B4F"/>
+                </a:solidFill>
+                <a:latin typeface="Courier"/>
+              </a:rPr>
+              <a:t> </a:t>
+            </a:r>
+            <a:r>
+              <a:rPr>
+                <a:solidFill>
+                  <a:srgbClr val="4758AB"/>
+                </a:solidFill>
+                <a:latin typeface="Courier"/>
+              </a:rPr>
+              <a:t>c</a:t>
+            </a:r>
+            <a:r>
+              <a:rPr>
+                <a:solidFill>
+                  <a:srgbClr val="003B4F"/>
+                </a:solidFill>
+                <a:latin typeface="Courier"/>
+              </a:rPr>
+              <a:t>(</a:t>
+            </a:r>
+            <a:r>
+              <a:rPr>
+                <a:solidFill>
                   <a:srgbClr val="5E5E5E"/>
                 </a:solidFill>
                 <a:latin typeface="Courier"/>
               </a:rPr>
-              <a:t># Duluth is 46.84 N, -92.19 W</a:t>
+              <a:t>-</a:t>
+            </a:r>
+            <a:r>
+              <a:rPr>
+                <a:solidFill>
+                  <a:srgbClr val="AD0000"/>
+                </a:solidFill>
+                <a:latin typeface="Courier"/>
+              </a:rPr>
+              <a:t>0.13</a:t>
+            </a:r>
+            <a:r>
+              <a:rPr>
+                <a:solidFill>
+                  <a:srgbClr val="003B4F"/>
+                </a:solidFill>
+                <a:latin typeface="Courier"/>
+              </a:rPr>
+              <a:t>, </a:t>
+            </a:r>
+            <a:r>
+              <a:rPr>
+                <a:solidFill>
+                  <a:srgbClr val="AD0000"/>
+                </a:solidFill>
+                <a:latin typeface="Courier"/>
+              </a:rPr>
+              <a:t>51.51</a:t>
+            </a:r>
+            <a:r>
+              <a:rPr>
+                <a:solidFill>
+                  <a:srgbClr val="003B4F"/>
+                </a:solidFill>
+                <a:latin typeface="Courier"/>
+              </a:rPr>
+              <a:t>),</a:t>
             </a:r>
             <a:br/>
             <a:r>
               <a:rPr>
                 <a:solidFill>
+                  <a:srgbClr val="003B4F"/>
+                </a:solidFill>
+                <a:latin typeface="Courier"/>
+              </a:rPr>
+              <a:t>                     </a:t>
+            </a:r>
+            <a:r>
+              <a:rPr>
+                <a:solidFill>
+                  <a:srgbClr val="657422"/>
+                </a:solidFill>
+                <a:latin typeface="Courier"/>
+              </a:rPr>
+              <a:t>pars =</a:t>
+            </a:r>
+            <a:r>
+              <a:rPr>
+                <a:solidFill>
+                  <a:srgbClr val="003B4F"/>
+                </a:solidFill>
+                <a:latin typeface="Courier"/>
+              </a:rPr>
+              <a:t> </a:t>
+            </a:r>
+            <a:r>
+              <a:rPr>
+                <a:solidFill>
+                  <a:srgbClr val="20794D"/>
+                </a:solidFill>
+                <a:latin typeface="Courier"/>
+              </a:rPr>
+              <a:t>"T2M"</a:t>
+            </a:r>
+            <a:r>
+              <a:rPr>
+                <a:solidFill>
+                  <a:srgbClr val="003B4F"/>
+                </a:solidFill>
+                <a:latin typeface="Courier"/>
+              </a:rPr>
+              <a:t>,</a:t>
+            </a:r>
+            <a:br/>
+            <a:r>
+              <a:rPr>
+                <a:solidFill>
+                  <a:srgbClr val="003B4F"/>
+                </a:solidFill>
+                <a:latin typeface="Courier"/>
+              </a:rPr>
+              <a:t>                     </a:t>
+            </a:r>
+            <a:r>
+              <a:rPr>
+                <a:solidFill>
+                  <a:srgbClr val="657422"/>
+                </a:solidFill>
+                <a:latin typeface="Courier"/>
+              </a:rPr>
+              <a:t>dates =</a:t>
+            </a:r>
+            <a:r>
+              <a:rPr>
+                <a:solidFill>
+                  <a:srgbClr val="003B4F"/>
+                </a:solidFill>
+                <a:latin typeface="Courier"/>
+              </a:rPr>
+              <a:t> </a:t>
+            </a:r>
+            <a:r>
+              <a:rPr>
+                <a:solidFill>
                   <a:srgbClr val="4758AB"/>
                 </a:solidFill>
                 <a:latin typeface="Courier"/>
               </a:rPr>
-              <a:t>nearest_stations</a:t>
+              <a:t>c</a:t>
             </a:r>
             <a:r>
               <a:rPr>
@@ -9631,11 +9850,67 @@
             <a:r>
               <a:rPr>
                 <a:solidFill>
+                  <a:srgbClr val="20794D"/>
+                </a:solidFill>
+                <a:latin typeface="Courier"/>
+              </a:rPr>
+              <a:t>"1981-01-01"</a:t>
+            </a:r>
+            <a:r>
+              <a:rPr>
+                <a:solidFill>
+                  <a:srgbClr val="003B4F"/>
+                </a:solidFill>
+                <a:latin typeface="Courier"/>
+              </a:rPr>
+              <a:t>,</a:t>
+            </a:r>
+            <a:br/>
+            <a:r>
+              <a:rPr>
+                <a:solidFill>
+                  <a:srgbClr val="003B4F"/>
+                </a:solidFill>
+                <a:latin typeface="Courier"/>
+              </a:rPr>
+              <a:t>                               </a:t>
+            </a:r>
+            <a:r>
+              <a:rPr>
+                <a:solidFill>
+                  <a:srgbClr val="20794D"/>
+                </a:solidFill>
+                <a:latin typeface="Courier"/>
+              </a:rPr>
+              <a:t>"2024-12-31"</a:t>
+            </a:r>
+            <a:r>
+              <a:rPr>
+                <a:solidFill>
+                  <a:srgbClr val="003B4F"/>
+                </a:solidFill>
+                <a:latin typeface="Courier"/>
+              </a:rPr>
+              <a:t>),</a:t>
+            </a:r>
+            <a:br/>
+            <a:r>
+              <a:rPr>
+                <a:solidFill>
+                  <a:srgbClr val="003B4F"/>
+                </a:solidFill>
+                <a:latin typeface="Courier"/>
+              </a:rPr>
+              <a:t>                     </a:t>
+            </a:r>
+            <a:r>
+              <a:rPr>
+                <a:solidFill>
                   <a:srgbClr val="657422"/>
                 </a:solidFill>
                 <a:latin typeface="Courier"/>
               </a:rPr>
-              <a:t>LAT =</a:t>
+              <a:t>temporal_api =</a:t>
             </a:r>
             <a:r>
               <a:rPr>
@@ -9649,20 +9924,94 @@
             <a:r>
               <a:rPr>
                 <a:solidFill>
-                  <a:srgbClr val="AD0000"/>
-                </a:solidFill>
-                <a:latin typeface="Courier"/>
-              </a:rPr>
-              <a:t>46.84</a:t>
-            </a:r>
-            <a:r>
-              <a:rPr>
-                <a:solidFill>
-                  <a:srgbClr val="003B4F"/>
-                </a:solidFill>
-                <a:latin typeface="Courier"/>
-              </a:rPr>
-              <a:t>, </a:t>
+                  <a:srgbClr val="20794D"/>
+                </a:solidFill>
+                <a:latin typeface="Courier"/>
+              </a:rPr>
+              <a:t>"daily"</a:t>
+            </a:r>
+            <a:r>
+              <a:rPr>
+                <a:solidFill>
+                  <a:srgbClr val="003B4F"/>
+                </a:solidFill>
+                <a:latin typeface="Courier"/>
+              </a:rPr>
+              <a:t>) </a:t>
+            </a:r>
+            <a:r>
+              <a:rPr>
+                <a:solidFill>
+                  <a:srgbClr val="5E5E5E"/>
+                </a:solidFill>
+                <a:latin typeface="Courier"/>
+              </a:rPr>
+              <a:t>%&gt;%</a:t>
+            </a:r>
+            <a:br/>
+            <a:r>
+              <a:rPr>
+                <a:solidFill>
+                  <a:srgbClr val="003B4F"/>
+                </a:solidFill>
+                <a:latin typeface="Courier"/>
+              </a:rPr>
+              <a:t>  </a:t>
+            </a:r>
+            <a:r>
+              <a:rPr>
+                <a:solidFill>
+                  <a:srgbClr val="4758AB"/>
+                </a:solidFill>
+                <a:latin typeface="Courier"/>
+              </a:rPr>
+              <a:t>clean_names</a:t>
+            </a:r>
+            <a:r>
+              <a:rPr>
+                <a:solidFill>
+                  <a:srgbClr val="003B4F"/>
+                </a:solidFill>
+                <a:latin typeface="Courier"/>
+              </a:rPr>
+              <a:t>() </a:t>
+            </a:r>
+            <a:r>
+              <a:rPr>
+                <a:solidFill>
+                  <a:srgbClr val="5E5E5E"/>
+                </a:solidFill>
+                <a:latin typeface="Courier"/>
+              </a:rPr>
+              <a:t>%&gt;%</a:t>
+            </a:r>
+            <a:br/>
+            <a:r>
+              <a:rPr>
+                <a:solidFill>
+                  <a:srgbClr val="003B4F"/>
+                </a:solidFill>
+                <a:latin typeface="Courier"/>
+              </a:rPr>
+              <a:t>  </a:t>
+            </a:r>
+            <a:r>
+              <a:rPr>
+                <a:solidFill>
+                  <a:srgbClr val="4758AB"/>
+                </a:solidFill>
+                <a:latin typeface="Courier"/>
+              </a:rPr>
+              <a:t>rename</a:t>
+            </a:r>
+            <a:r>
+              <a:rPr>
+                <a:solidFill>
+                  <a:srgbClr val="003B4F"/>
+                </a:solidFill>
+                <a:latin typeface="Courier"/>
+              </a:rPr>
+              <a:t>(</a:t>
             </a:r>
             <a:r>
               <a:rPr>
@@ -9671,218 +10020,54 @@
                 </a:solidFill>
                 <a:latin typeface="Courier"/>
               </a:rPr>
-              <a:t>LON =</a:t>
-            </a:r>
-            <a:r>
-              <a:rPr>
-                <a:solidFill>
-                  <a:srgbClr val="003B4F"/>
-                </a:solidFill>
-                <a:latin typeface="Courier"/>
-              </a:rPr>
-              <a:t> </a:t>
-            </a:r>
-            <a:r>
-              <a:rPr>
-                <a:solidFill>
-                  <a:srgbClr val="5E5E5E"/>
-                </a:solidFill>
-                <a:latin typeface="Courier"/>
-              </a:rPr>
-              <a:t>-</a:t>
-            </a:r>
-            <a:r>
-              <a:rPr>
-                <a:solidFill>
-                  <a:srgbClr val="AD0000"/>
-                </a:solidFill>
-                <a:latin typeface="Courier"/>
-              </a:rPr>
-              <a:t>92.19</a:t>
-            </a:r>
-            <a:r>
-              <a:rPr>
-                <a:solidFill>
-                  <a:srgbClr val="003B4F"/>
-                </a:solidFill>
-                <a:latin typeface="Courier"/>
-              </a:rPr>
-              <a:t>,</a:t>
+              <a:t>month =</a:t>
+            </a:r>
+            <a:r>
+              <a:rPr>
+                <a:solidFill>
+                  <a:srgbClr val="003B4F"/>
+                </a:solidFill>
+                <a:latin typeface="Courier"/>
+              </a:rPr>
+              <a:t> mm, </a:t>
+            </a:r>
+            <a:r>
+              <a:rPr>
+                <a:solidFill>
+                  <a:srgbClr val="657422"/>
+                </a:solidFill>
+                <a:latin typeface="Courier"/>
+              </a:rPr>
+              <a:t>temp =</a:t>
+            </a:r>
+            <a:r>
+              <a:rPr>
+                <a:solidFill>
+                  <a:srgbClr val="003B4F"/>
+                </a:solidFill>
+                <a:latin typeface="Courier"/>
+              </a:rPr>
+              <a:t> t2m)</a:t>
             </a:r>
             <a:br/>
-            <a:r>
-              <a:rPr>
-                <a:solidFill>
-                  <a:srgbClr val="003B4F"/>
-                </a:solidFill>
-                <a:latin typeface="Courier"/>
-              </a:rPr>
-              <a:t>                 </a:t>
-            </a:r>
-            <a:r>
-              <a:rPr>
-                <a:solidFill>
-                  <a:srgbClr val="657422"/>
-                </a:solidFill>
-                <a:latin typeface="Courier"/>
-              </a:rPr>
-              <a:t>distance =</a:t>
-            </a:r>
-            <a:r>
-              <a:rPr>
-                <a:solidFill>
-                  <a:srgbClr val="003B4F"/>
-                </a:solidFill>
-                <a:latin typeface="Courier"/>
-              </a:rPr>
-              <a:t> </a:t>
-            </a:r>
-            <a:r>
-              <a:rPr>
-                <a:solidFill>
-                  <a:srgbClr val="AD0000"/>
-                </a:solidFill>
-                <a:latin typeface="Courier"/>
-              </a:rPr>
-              <a:t>50</a:t>
-            </a:r>
-            <a:r>
-              <a:rPr>
-                <a:solidFill>
-                  <a:srgbClr val="003B4F"/>
-                </a:solidFill>
-                <a:latin typeface="Courier"/>
-              </a:rPr>
-              <a:t>) </a:t>
-            </a:r>
-            <a:r>
-              <a:rPr>
-                <a:solidFill>
-                  <a:srgbClr val="5E5E5E"/>
-                </a:solidFill>
-                <a:latin typeface="Courier"/>
-              </a:rPr>
-              <a:t>%&gt;%</a:t>
-            </a:r>
             <a:br/>
             <a:r>
               <a:rPr>
                 <a:solidFill>
-                  <a:srgbClr val="003B4F"/>
-                </a:solidFill>
-                <a:latin typeface="Courier"/>
-              </a:rPr>
-              <a:t>  </a:t>
-            </a:r>
-            <a:r>
-              <a:rPr>
-                <a:solidFill>
                   <a:srgbClr val="4758AB"/>
                 </a:solidFill>
                 <a:latin typeface="Courier"/>
               </a:rPr>
-              <a:t>clean_names</a:t>
-            </a:r>
-            <a:r>
-              <a:rPr>
-                <a:solidFill>
-                  <a:srgbClr val="003B4F"/>
-                </a:solidFill>
-                <a:latin typeface="Courier"/>
-              </a:rPr>
-              <a:t>() </a:t>
-            </a:r>
-            <a:r>
-              <a:rPr>
-                <a:solidFill>
-                  <a:srgbClr val="5E5E5E"/>
-                </a:solidFill>
-                <a:latin typeface="Courier"/>
-              </a:rPr>
-              <a:t>%&gt;%</a:t>
-            </a:r>
-            <a:br/>
-            <a:r>
-              <a:rPr>
-                <a:solidFill>
-                  <a:srgbClr val="003B4F"/>
-                </a:solidFill>
-                <a:latin typeface="Courier"/>
-              </a:rPr>
-              <a:t>  </a:t>
-            </a:r>
-            <a:r>
-              <a:rPr>
-                <a:solidFill>
-                  <a:srgbClr val="4758AB"/>
-                </a:solidFill>
-                <a:latin typeface="Courier"/>
-              </a:rPr>
-              <a:t>select</a:t>
-            </a:r>
-            <a:r>
-              <a:rPr>
-                <a:solidFill>
-                  <a:srgbClr val="003B4F"/>
-                </a:solidFill>
-                <a:latin typeface="Courier"/>
-              </a:rPr>
-              <a:t>(stnid, name, begin, end) </a:t>
-            </a:r>
-            <a:r>
-              <a:rPr>
-                <a:solidFill>
-                  <a:srgbClr val="5E5E5E"/>
-                </a:solidFill>
-                <a:latin typeface="Courier"/>
-              </a:rPr>
-              <a:t>%&gt;%</a:t>
-            </a:r>
-            <a:br/>
-            <a:r>
-              <a:rPr>
-                <a:solidFill>
-                  <a:srgbClr val="003B4F"/>
-                </a:solidFill>
-                <a:latin typeface="Courier"/>
-              </a:rPr>
-              <a:t>  </a:t>
-            </a:r>
-            <a:r>
-              <a:rPr>
-                <a:solidFill>
-                  <a:srgbClr val="4758AB"/>
-                </a:solidFill>
-                <a:latin typeface="Courier"/>
-              </a:rPr>
-              <a:t>head</a:t>
-            </a:r>
-            <a:r>
-              <a:rPr>
-                <a:solidFill>
-                  <a:srgbClr val="003B4F"/>
-                </a:solidFill>
-                <a:latin typeface="Courier"/>
-              </a:rPr>
-              <a:t>(</a:t>
-            </a:r>
-            <a:r>
-              <a:rPr>
-                <a:solidFill>
-                  <a:srgbClr val="AD0000"/>
-                </a:solidFill>
-                <a:latin typeface="Courier"/>
-              </a:rPr>
-              <a:t>3</a:t>
-            </a:r>
-            <a:r>
-              <a:rPr>
-                <a:solidFill>
-                  <a:srgbClr val="003B4F"/>
-                </a:solidFill>
-                <a:latin typeface="Courier"/>
-              </a:rPr>
-              <a:t>)</a:t>
+              <a:t>dim</a:t>
+            </a:r>
+            <a:r>
+              <a:rPr>
+                <a:solidFill>
+                  <a:srgbClr val="003B4F"/>
+                </a:solidFill>
+                <a:latin typeface="Courier"/>
+              </a:rPr>
+              <a:t>(city_df)</a:t>
             </a:r>
           </a:p>
           <a:p>
@@ -9893,11 +10078,7 @@
               <a:rPr>
                 <a:latin typeface="Courier"/>
               </a:rPr>
-              <a:t>          stnid                         name    begin      end
-         &lt;char&gt;                       &lt;char&gt;    &lt;int&gt;    &lt;int&gt;
-1: 727450-14913 DULUTH INTERNATIONAL AIRPORT 19480101 20250827
-2: 999999-14913 DULUTH WILLIAMSN-JOHNSN MUNI 19650101 19721231
-3: 997269-99999                       DULUTH 20080101 20081231</a:t>
+              <a:t>[1] 16071     8</a:t>
             </a:r>
           </a:p>
         </p:txBody>
@@ -9919,140 +10100,95 @@
           <a:p>
             <a:pPr lvl="0"/>
             <a:r>
-              <a:rPr>
-                <a:latin typeface="Courier"/>
-              </a:rPr>
-              <a:t>nearest_stations()</a:t>
-            </a:r>
-            <a:r>
-              <a:rPr/>
-              <a:t> takes a </a:t>
-            </a:r>
-            <a:r>
               <a:rPr b="1"/>
-              <a:t>latitude</a:t>
-            </a:r>
-            <a:r>
-              <a:rPr/>
-              <a:t>, a </a:t>
+              <a:t>Why switch packages?</a:t>
+            </a:r>
+          </a:p>
+          <a:p>
+            <a:pPr lvl="1"/>
+            <a:r>
+              <a:rPr>
+                <a:latin typeface="Courier"/>
+              </a:rPr>
+              <a:t>GSODR</a:t>
+            </a:r>
+            <a:r>
+              <a:rPr/>
+              <a:t> needs a </a:t>
             </a:r>
             <a:r>
               <a:rPr b="1"/>
-              <a:t>longitude</a:t>
-            </a:r>
-            <a:r>
-              <a:rPr/>
-              <a:t>, and a radius in km</a:t>
-            </a:r>
-          </a:p>
-          <a:p>
-            <a:pPr lvl="0"/>
-            <a:r>
-              <a:rPr/>
-              <a:t>Look up your city’s lat/long in any search engine</a:t>
+              <a:t>station ID</a:t>
             </a:r>
           </a:p>
           <a:p>
             <a:pPr lvl="1"/>
             <a:r>
+              <a:rPr/>
+              <a:t>most stations outside the US have </a:t>
+            </a:r>
+            <a:r>
               <a:rPr b="1"/>
-              <a:t>south</a:t>
-            </a:r>
-            <a:r>
-              <a:rPr/>
-              <a:t> of the equator → negative latitude</a:t>
+              <a:t>missing years</a:t>
             </a:r>
           </a:p>
           <a:p>
             <a:pPr lvl="1"/>
             <a:r>
+              <a:rPr/>
+              <a:t>Melbourne’s nearest long station is missing </a:t>
+            </a:r>
+            <a:r>
               <a:rPr b="1"/>
-              <a:t>west</a:t>
-            </a:r>
-            <a:r>
-              <a:rPr/>
-              <a:t> of Greenwich → negative longitude</a:t>
-            </a:r>
-          </a:p>
-          <a:p>
-            <a:pPr lvl="0"/>
-            <a:r>
-              <a:rPr/>
-              <a:t>Then read the table:</a:t>
+              <a:t>48 of 59</a:t>
+            </a:r>
+          </a:p>
+          <a:p>
+            <a:pPr lvl="0"/>
+            <a:r>
+              <a:rPr b="1">
+                <a:latin typeface="Courier"/>
+              </a:rPr>
+              <a:t>nasapower</a:t>
+            </a:r>
+            <a:r>
+              <a:rPr b="1"/>
+              <a:t> needs only coordinates</a:t>
             </a:r>
           </a:p>
           <a:p>
             <a:pPr lvl="1"/>
             <a:r>
-              <a:rPr b="1">
-                <a:latin typeface="Courier"/>
-              </a:rPr>
-              <a:t>stnid</a:t>
-            </a:r>
-            <a:r>
-              <a:rPr/>
-              <a:t> is what you paste into </a:t>
-            </a:r>
-            <a:r>
-              <a:rPr>
-                <a:latin typeface="Courier"/>
-              </a:rPr>
-              <a:t>get_GSOD()</a:t>
+              <a:rPr/>
+              <a:t>anywhere on Earth, </a:t>
+            </a:r>
+            <a:r>
+              <a:rPr b="1"/>
+              <a:t>1981 to now, no gaps</a:t>
             </a:r>
           </a:p>
           <a:p>
             <a:pPr lvl="1"/>
             <a:r>
-              <a:rPr b="1">
-                <a:latin typeface="Courier"/>
-              </a:rPr>
-              <a:t>begin</a:t>
-            </a:r>
-            <a:r>
-              <a:rPr/>
-              <a:t> and </a:t>
-            </a:r>
-            <a:r>
-              <a:rPr b="1">
-                <a:latin typeface="Courier"/>
-              </a:rPr>
-              <a:t>end</a:t>
-            </a:r>
-            <a:r>
-              <a:rPr/>
-              <a:t> tell you the years available</a:t>
-            </a:r>
-          </a:p>
-          <a:p>
-            <a:pPr lvl="0" indent="0" marL="1270000">
-              <a:buNone/>
-            </a:pPr>
-            <a:r>
-              <a:rPr sz="2000" b="1"/>
-              <a:t>Important</a:t>
-            </a:r>
-          </a:p>
-          <a:p>
-            <a:pPr lvl="0" indent="0" marL="1270000">
-              <a:buNone/>
-            </a:pPr>
-            <a:r>
-              <a:rPr sz="2000" b="1"/>
-              <a:t>Pick a station with a long record.</a:t>
-            </a:r>
-            <a:r>
-              <a:rPr sz="2000"/>
-              <a:t> A trend needs decades — aim for a </a:t>
-            </a:r>
-            <a:r>
-              <a:rPr sz="2000">
-                <a:latin typeface="Courier"/>
-              </a:rPr>
-              <a:t>begin</a:t>
-            </a:r>
-            <a:r>
-              <a:rPr sz="2000"/>
-              <a:t> date of 1970 or earlier.</a:t>
+              <a:rPr/>
+              <a:t>watch the order: </a:t>
+            </a:r>
+            <a:r>
+              <a:rPr b="1"/>
+              <a:t>longitude first</a:t>
+            </a:r>
+          </a:p>
+          <a:p>
+            <a:pPr lvl="0"/>
+            <a:r>
+              <a:rPr>
+                <a:latin typeface="Courier"/>
+              </a:rPr>
+              <a:t>rename()</a:t>
+            </a:r>
+            <a:r>
+              <a:rPr/>
+              <a:t> makes the columns match Duluth’s</a:t>
             </a:r>
           </a:p>
         </p:txBody>
@@ -10107,7 +10243,7 @@
             </a:pPr>
             <a:r>
               <a:rPr/>
-              <a:t>Swap One Line, Get a New City</a:t>
+              <a:t>Swap Two Numbers, Get a New City</a:t>
             </a:r>
           </a:p>
         </p:txBody>
@@ -10137,7 +10273,7 @@
                 </a:solidFill>
                 <a:latin typeface="Courier"/>
               </a:rPr>
-              <a:t># The ONLY line that changes ---------------------------</a:t>
+              <a:t># The ONLY numbers that change ------------------</a:t>
             </a:r>
             <a:br/>
             <a:r>
@@ -10147,7 +10283,7 @@
                 </a:solidFill>
                 <a:latin typeface="Courier"/>
               </a:rPr>
-              <a:t>city_df &lt;- </a:t>
+              <a:t>lonlat = </a:t>
             </a:r>
             <a:r>
               <a:rPr>
@@ -10156,7 +10292,7 @@
                 </a:solidFill>
                 <a:latin typeface="Courier"/>
               </a:rPr>
-              <a:t>get_GSOD</a:t>
+              <a:t>c</a:t>
             </a:r>
             <a:r>
               <a:rPr>
@@ -10170,20 +10306,11 @@
             <a:r>
               <a:rPr>
                 <a:solidFill>
-                  <a:srgbClr val="657422"/>
-                </a:solidFill>
-                <a:latin typeface="Courier"/>
-              </a:rPr>
-              <a:t>years =</a:t>
-            </a:r>
-            <a:r>
-              <a:rPr>
-                <a:solidFill>
-                  <a:srgbClr val="003B4F"/>
-                </a:solidFill>
-                <a:latin typeface="Courier"/>
-              </a:rPr>
-              <a:t> </a:t>
+                  <a:srgbClr val="5E5E5E"/>
+                </a:solidFill>
+                <a:latin typeface="Courier"/>
+              </a:rPr>
+              <a:t>-</a:t>
             </a:r>
             <a:r>
               <a:rPr>
@@ -10192,16 +10319,16 @@
                 </a:solidFill>
                 <a:latin typeface="Courier"/>
               </a:rPr>
-              <a:t>1973</a:t>
-            </a:r>
-            <a:r>
-              <a:rPr>
-                <a:solidFill>
-                  <a:srgbClr val="5E5E5E"/>
-                </a:solidFill>
-                <a:latin typeface="Courier"/>
-              </a:rPr>
-              <a:t>:</a:t>
+              <a:t>0.13</a:t>
+            </a:r>
+            <a:r>
+              <a:rPr>
+                <a:solidFill>
+                  <a:srgbClr val="003B4F"/>
+                </a:solidFill>
+                <a:latin typeface="Courier"/>
+              </a:rPr>
+              <a:t>, </a:t>
             </a:r>
             <a:r>
               <a:rPr>
@@ -10210,99 +10337,16 @@
                 </a:solidFill>
                 <a:latin typeface="Courier"/>
               </a:rPr>
-              <a:t>2025</a:t>
-            </a:r>
-            <a:r>
-              <a:rPr>
-                <a:solidFill>
-                  <a:srgbClr val="003B4F"/>
-                </a:solidFill>
-                <a:latin typeface="Courier"/>
-              </a:rPr>
-              <a:t>,</a:t>
-            </a:r>
-            <a:br/>
-            <a:r>
-              <a:rPr>
-                <a:solidFill>
-                  <a:srgbClr val="003B4F"/>
-                </a:solidFill>
-                <a:latin typeface="Courier"/>
-              </a:rPr>
-              <a:t>                    </a:t>
-            </a:r>
-            <a:r>
-              <a:rPr>
-                <a:solidFill>
-                  <a:srgbClr val="657422"/>
-                </a:solidFill>
-                <a:latin typeface="Courier"/>
-              </a:rPr>
-              <a:t>station =</a:t>
-            </a:r>
-            <a:r>
-              <a:rPr>
-                <a:solidFill>
-                  <a:srgbClr val="003B4F"/>
-                </a:solidFill>
-                <a:latin typeface="Courier"/>
-              </a:rPr>
-              <a:t> </a:t>
-            </a:r>
-            <a:r>
-              <a:rPr>
-                <a:solidFill>
-                  <a:srgbClr val="20794D"/>
-                </a:solidFill>
-                <a:latin typeface="Courier"/>
-              </a:rPr>
-              <a:t>"948660-99999"</a:t>
-            </a:r>
-            <a:r>
-              <a:rPr>
-                <a:solidFill>
-                  <a:srgbClr val="003B4F"/>
-                </a:solidFill>
-                <a:latin typeface="Courier"/>
-              </a:rPr>
-              <a:t>) </a:t>
-            </a:r>
-            <a:r>
-              <a:rPr>
-                <a:solidFill>
-                  <a:srgbClr val="5E5E5E"/>
-                </a:solidFill>
-                <a:latin typeface="Courier"/>
-              </a:rPr>
-              <a:t>%&gt;%</a:t>
-            </a:r>
-            <a:br/>
-            <a:r>
-              <a:rPr>
-                <a:solidFill>
-                  <a:srgbClr val="003B4F"/>
-                </a:solidFill>
-                <a:latin typeface="Courier"/>
-              </a:rPr>
-              <a:t>  </a:t>
-            </a:r>
-            <a:r>
-              <a:rPr>
-                <a:solidFill>
-                  <a:srgbClr val="4758AB"/>
-                </a:solidFill>
-                <a:latin typeface="Courier"/>
-              </a:rPr>
-              <a:t>clean_names</a:t>
-            </a:r>
-            <a:r>
-              <a:rPr>
-                <a:solidFill>
-                  <a:srgbClr val="003B4F"/>
-                </a:solidFill>
-                <a:latin typeface="Courier"/>
-              </a:rPr>
-              <a:t>()</a:t>
+              <a:t>51.51</a:t>
+            </a:r>
+            <a:r>
+              <a:rPr>
+                <a:solidFill>
+                  <a:srgbClr val="003B4F"/>
+                </a:solidFill>
+                <a:latin typeface="Courier"/>
+              </a:rPr>
+              <a:t>)</a:t>
             </a:r>
             <a:br/>
             <a:br/>
@@ -10313,7 +10357,7 @@
                 </a:solidFill>
                 <a:latin typeface="Courier"/>
               </a:rPr>
-              <a:t># Everything below is identical ------------------------</a:t>
+              <a:t># Everything below is identical -----------------</a:t>
             </a:r>
             <a:br/>
             <a:r>
@@ -10583,11 +10627,11 @@
             <a:pPr lvl="1"/>
             <a:r>
               <a:rPr b="1"/>
-              <a:t>one line</a:t>
-            </a:r>
-            <a:r>
-              <a:rPr/>
-              <a:t> names the place</a:t>
+              <a:t>two numbers</a:t>
+            </a:r>
+            <a:r>
+              <a:rPr/>
+              <a:t> name the place</a:t>
             </a:r>
           </a:p>
           <a:p>
@@ -10601,23 +10645,29 @@
             <a:pPr lvl="0"/>
             <a:r>
               <a:rPr/>
-              <a:t>Use the </a:t>
-            </a:r>
-            <a:r>
-              <a:rPr>
-                <a:latin typeface="Courier"/>
-              </a:rPr>
-              <a:t>years =</a:t>
-            </a:r>
-            <a:r>
-              <a:rPr/>
-              <a:t> range your station actually has — don’t ask for years before </a:t>
-            </a:r>
-            <a:r>
-              <a:rPr>
-                <a:latin typeface="Courier"/>
-              </a:rPr>
-              <a:t>begin</a:t>
+              <a:t>Look up lat/long in any search engine</a:t>
+            </a:r>
+          </a:p>
+          <a:p>
+            <a:pPr lvl="1"/>
+            <a:r>
+              <a:rPr b="1"/>
+              <a:t>south</a:t>
+            </a:r>
+            <a:r>
+              <a:rPr/>
+              <a:t> of the equator → negative latitude</a:t>
+            </a:r>
+          </a:p>
+          <a:p>
+            <a:pPr lvl="1"/>
+            <a:r>
+              <a:rPr b="1"/>
+              <a:t>west</a:t>
+            </a:r>
+            <a:r>
+              <a:rPr/>
+              <a:t> of Greenwich → negative longitude</a:t>
             </a:r>
           </a:p>
           <a:p>
@@ -10635,11 +10685,11 @@
             </a:pPr>
             <a:r>
               <a:rPr sz="2000" b="1"/>
-              <a:t>If your city is in the southern hemisphere</a:t>
+              <a:t>Southern hemisphere?</a:t>
             </a:r>
             <a:r>
               <a:rPr sz="2000"/>
-              <a:t>, swap the season labels in </a:t>
+              <a:t> Swap the season labels in </a:t>
             </a:r>
             <a:r>
               <a:rPr sz="2000">
@@ -10723,8 +10773,11 @@
         <p:spPr>
           <a:xfrm>
             <a:off x="0" y="0"/>
-            <a:ext cx="9144000" cy="582780"/>
+            <a:ext cx="9144000" cy="602780"/>
           </a:xfrm>
+          <a:solidFill>
+            <a:srgbClr val="1A1A2E"/>
+          </a:solidFill>
         </p:spPr>
         <p:txBody>
           <a:bodyPr/>
@@ -10735,7 +10788,7 @@
             </a:pPr>
             <a:r>
               <a:rPr/>
-              <a:t>→ ACTIVITY 12 Parts 6–10 now</a:t>
+              <a:t>Are the Two Slopes Different?</a:t>
             </a:r>
           </a:p>
         </p:txBody>
@@ -10747,7 +10800,7 @@
             <a:spLocks noGrp="1"/>
           </p:cNvSpPr>
           <p:nvPr>
-            <p:ph idx="1"/>
+            <p:ph idx="1" sz="half"/>
           </p:nvPr>
         </p:nvSpPr>
         <p:spPr/>
@@ -10755,50 +10808,361 @@
           <a:bodyPr/>
           <a:lstStyle/>
           <a:p>
+            <a:pPr lvl="0" indent="0">
+              <a:buNone/>
+            </a:pPr>
+            <a:r>
+              <a:rPr>
+                <a:solidFill>
+                  <a:srgbClr val="5E5E5E"/>
+                </a:solidFill>
+                <a:latin typeface="Courier"/>
+              </a:rPr>
+              <a:t># Stack the two yearly summaries ----------------</a:t>
+            </a:r>
+            <a:br/>
+            <a:r>
+              <a:rPr>
+                <a:solidFill>
+                  <a:srgbClr val="003B4F"/>
+                </a:solidFill>
+                <a:latin typeface="Courier"/>
+              </a:rPr>
+              <a:t>both_df &lt;- </a:t>
+            </a:r>
+            <a:r>
+              <a:rPr>
+                <a:solidFill>
+                  <a:srgbClr val="4758AB"/>
+                </a:solidFill>
+                <a:latin typeface="Courier"/>
+              </a:rPr>
+              <a:t>bind_rows</a:t>
+            </a:r>
+            <a:r>
+              <a:rPr>
+                <a:solidFill>
+                  <a:srgbClr val="003B4F"/>
+                </a:solidFill>
+                <a:latin typeface="Courier"/>
+              </a:rPr>
+              <a:t>(duluth_year_df,</a:t>
+            </a:r>
+            <a:br/>
+            <a:r>
+              <a:rPr>
+                <a:solidFill>
+                  <a:srgbClr val="003B4F"/>
+                </a:solidFill>
+                <a:latin typeface="Courier"/>
+              </a:rPr>
+              <a:t>                     city_labeled_df)</a:t>
+            </a:r>
+            <a:br/>
+            <a:br/>
+            <a:r>
+              <a:rPr>
+                <a:solidFill>
+                  <a:srgbClr val="5E5E5E"/>
+                </a:solidFill>
+                <a:latin typeface="Courier"/>
+              </a:rPr>
+              <a:t># One slope per station -------------------------</a:t>
+            </a:r>
+            <a:br/>
+            <a:r>
+              <a:rPr>
+                <a:solidFill>
+                  <a:srgbClr val="003B4F"/>
+                </a:solidFill>
+                <a:latin typeface="Courier"/>
+              </a:rPr>
+              <a:t>slope_model &lt;- </a:t>
+            </a:r>
+            <a:r>
+              <a:rPr>
+                <a:solidFill>
+                  <a:srgbClr val="4758AB"/>
+                </a:solidFill>
+                <a:latin typeface="Courier"/>
+              </a:rPr>
+              <a:t>lm</a:t>
+            </a:r>
+            <a:r>
+              <a:rPr>
+                <a:solidFill>
+                  <a:srgbClr val="003B4F"/>
+                </a:solidFill>
+                <a:latin typeface="Courier"/>
+              </a:rPr>
+              <a:t>(temp </a:t>
+            </a:r>
+            <a:r>
+              <a:rPr>
+                <a:solidFill>
+                  <a:srgbClr val="5E5E5E"/>
+                </a:solidFill>
+                <a:latin typeface="Courier"/>
+              </a:rPr>
+              <a:t>~</a:t>
+            </a:r>
+            <a:r>
+              <a:rPr>
+                <a:solidFill>
+                  <a:srgbClr val="003B4F"/>
+                </a:solidFill>
+                <a:latin typeface="Courier"/>
+              </a:rPr>
+              <a:t> year </a:t>
+            </a:r>
+            <a:r>
+              <a:rPr>
+                <a:solidFill>
+                  <a:srgbClr val="5E5E5E"/>
+                </a:solidFill>
+                <a:latin typeface="Courier"/>
+              </a:rPr>
+              <a:t>*</a:t>
+            </a:r>
+            <a:r>
+              <a:rPr>
+                <a:solidFill>
+                  <a:srgbClr val="003B4F"/>
+                </a:solidFill>
+                <a:latin typeface="Courier"/>
+              </a:rPr>
+              <a:t> station,</a:t>
+            </a:r>
+            <a:br/>
+            <a:r>
+              <a:rPr>
+                <a:solidFill>
+                  <a:srgbClr val="003B4F"/>
+                </a:solidFill>
+                <a:latin typeface="Courier"/>
+              </a:rPr>
+              <a:t>                  </a:t>
+            </a:r>
+            <a:r>
+              <a:rPr>
+                <a:solidFill>
+                  <a:srgbClr val="657422"/>
+                </a:solidFill>
+                <a:latin typeface="Courier"/>
+              </a:rPr>
+              <a:t>data =</a:t>
+            </a:r>
+            <a:r>
+              <a:rPr>
+                <a:solidFill>
+                  <a:srgbClr val="003B4F"/>
+                </a:solidFill>
+                <a:latin typeface="Courier"/>
+              </a:rPr>
+              <a:t> both_df)</a:t>
+            </a:r>
+            <a:br/>
+            <a:r>
+              <a:rPr>
+                <a:solidFill>
+                  <a:srgbClr val="4758AB"/>
+                </a:solidFill>
+                <a:latin typeface="Courier"/>
+              </a:rPr>
+              <a:t>summary</a:t>
+            </a:r>
+            <a:r>
+              <a:rPr>
+                <a:solidFill>
+                  <a:srgbClr val="003B4F"/>
+                </a:solidFill>
+                <a:latin typeface="Courier"/>
+              </a:rPr>
+              <a:t>(slope_model)</a:t>
+            </a:r>
+          </a:p>
+          <a:p>
             <a:pPr lvl="0" indent="0" marL="0">
               <a:buNone/>
             </a:pPr>
             <a:r>
+              <a:rPr/>
+              <a:t>Your city and Duluth gave different numbers. </a:t>
+            </a:r>
+            <a:r>
               <a:rPr b="1"/>
-              <a:t>🛑 Do Activity Parts 6–10 now</a:t>
-            </a:r>
-          </a:p>
-          <a:p>
-            <a:pPr lvl="0"/>
-            <a:r>
-              <a:rPr/>
-              <a:t>Label the seasons with </a:t>
-            </a:r>
-            <a:r>
-              <a:rPr>
-                <a:latin typeface="Courier"/>
-              </a:rPr>
-              <a:t>case_when()</a:t>
-            </a:r>
-            <a:r>
-              <a:rPr/>
-              <a:t> and summarize by year and season</a:t>
-            </a:r>
-          </a:p>
-          <a:p>
-            <a:pPr lvl="0"/>
-            <a:r>
-              <a:rPr/>
-              <a:t>Plot both seasons, then fit a model for each</a:t>
-            </a:r>
-          </a:p>
-          <a:p>
-            <a:pPr lvl="0"/>
-            <a:r>
-              <a:rPr/>
-              <a:t>Write the warming rates in °C per decade</a:t>
-            </a:r>
-          </a:p>
-          <a:p>
-            <a:pPr lvl="0"/>
-            <a:r>
-              <a:rPr/>
-              <a:t>Find the station for a city you choose — that is your Extension</a:t>
+              <a:t>Different-looking slopes are not always different slopes.</a:t>
+            </a:r>
+          </a:p>
+        </p:txBody>
+      </p:sp>
+      <p:sp>
+        <p:nvSpPr>
+          <p:cNvPr id="4" name="Content Placeholder 3"/>
+          <p:cNvSpPr>
+            <a:spLocks noGrp="1"/>
+          </p:cNvSpPr>
+          <p:nvPr>
+            <p:ph idx="2" sz="half"/>
+          </p:nvPr>
+        </p:nvSpPr>
+        <p:spPr/>
+        <p:txBody>
+          <a:bodyPr/>
+          <a:lstStyle/>
+          <a:p>
+            <a:pPr lvl="0"/>
+            <a:r>
+              <a:rPr>
+                <a:latin typeface="Courier"/>
+              </a:rPr>
+              <a:t>year * station</a:t>
+            </a:r>
+            <a:r>
+              <a:rPr/>
+              <a:t> fits a </a:t>
+            </a:r>
+            <a:r>
+              <a:rPr b="1"/>
+              <a:t>separate slope</a:t>
+            </a:r>
+            <a:r>
+              <a:rPr/>
+              <a:t> for each place</a:t>
+            </a:r>
+          </a:p>
+          <a:p>
+            <a:pPr lvl="0"/>
+            <a:r>
+              <a:rPr/>
+              <a:t>Read the </a:t>
+            </a:r>
+            <a:r>
+              <a:rPr b="1">
+                <a:latin typeface="Courier"/>
+              </a:rPr>
+              <a:t>year:stationmy_city</a:t>
+            </a:r>
+            <a:r>
+              <a:rPr/>
+              <a:t> row</a:t>
+            </a:r>
+          </a:p>
+          <a:p>
+            <a:pPr lvl="1"/>
+            <a:r>
+              <a:rPr>
+                <a:latin typeface="Courier"/>
+              </a:rPr>
+              <a:t>Estimate</a:t>
+            </a:r>
+            <a:r>
+              <a:rPr/>
+              <a:t> — how much your slope </a:t>
+            </a:r>
+            <a:r>
+              <a:rPr b="1"/>
+              <a:t>differs</a:t>
+            </a:r>
+          </a:p>
+          <a:p>
+            <a:pPr lvl="1"/>
+            <a:r>
+              <a:rPr>
+                <a:latin typeface="Courier"/>
+              </a:rPr>
+              <a:t>Pr(&gt;|t|)</a:t>
+            </a:r>
+            <a:r>
+              <a:rPr/>
+              <a:t> — is that difference real?</a:t>
+            </a:r>
+          </a:p>
+          <a:p>
+            <a:pPr lvl="0"/>
+            <a:r>
+              <a:rPr/>
+              <a:t>This is a </a:t>
+            </a:r>
+            <a:r>
+              <a:rPr b="1"/>
+              <a:t>t-test on two slopes</a:t>
+            </a:r>
+            <a:r>
+              <a:rPr/>
+              <a:t>, in the same two columns you have read all class</a:t>
+            </a:r>
+          </a:p>
+          <a:p>
+            <a:pPr lvl="1"/>
+            <a:r>
+              <a:rPr i="1"/>
+              <a:t>p</a:t>
+            </a:r>
+            <a:r>
+              <a:rPr/>
+              <a:t> &lt; 0.05 → rates </a:t>
+            </a:r>
+            <a:r>
+              <a:rPr b="1"/>
+              <a:t>really differ</a:t>
+            </a:r>
+          </a:p>
+          <a:p>
+            <a:pPr lvl="1"/>
+            <a:r>
+              <a:rPr i="1"/>
+              <a:t>p</a:t>
+            </a:r>
+            <a:r>
+              <a:rPr/>
+              <a:t> &gt; 0.05 → </a:t>
+            </a:r>
+            <a:r>
+              <a:rPr b="1"/>
+              <a:t>cannot tell them apart</a:t>
+            </a:r>
+          </a:p>
+          <a:p>
+            <a:pPr lvl="0" indent="0" marL="1270000">
+              <a:buNone/>
+            </a:pPr>
+            <a:r>
+              <a:rPr sz="2000" b="1"/>
+              <a:t>Important</a:t>
+            </a:r>
+          </a:p>
+          <a:p>
+            <a:pPr lvl="0" indent="0" marL="1270000">
+              <a:buNone/>
+            </a:pPr>
+            <a:r>
+              <a:rPr sz="2000"/>
+              <a:t>Pull Duluth from the </a:t>
+            </a:r>
+            <a:r>
+              <a:rPr sz="2000" b="1"/>
+              <a:t>same source and years</a:t>
+            </a:r>
+            <a:r>
+              <a:rPr sz="2000"/>
+              <a:t> as your city — or you are comparing place </a:t>
+            </a:r>
+            <a:r>
+              <a:rPr sz="2000" i="1"/>
+              <a:t>plus</a:t>
+            </a:r>
+            <a:r>
+              <a:rPr sz="2000"/>
+              <a:t> source </a:t>
+            </a:r>
+            <a:r>
+              <a:rPr sz="2000" i="1"/>
+              <a:t>plus</a:t>
+            </a:r>
+            <a:r>
+              <a:rPr sz="2000"/>
+              <a:t> years.</a:t>
             </a:r>
           </a:p>
         </p:txBody>
@@ -10838,11 +11202,8 @@
         <p:spPr>
           <a:xfrm>
             <a:off x="0" y="0"/>
-            <a:ext cx="9144000" cy="602780"/>
+            <a:ext cx="9144000" cy="582780"/>
           </a:xfrm>
-          <a:solidFill>
-            <a:srgbClr val="1A1A2E"/>
-          </a:solidFill>
         </p:spPr>
         <p:txBody>
           <a:bodyPr/>
@@ -10853,7 +11214,7 @@
             </a:pPr>
             <a:r>
               <a:rPr/>
-              <a:t>What We Learned Today</a:t>
+              <a:t>→ ACTIVITY 12 Parts 6–10 now</a:t>
             </a:r>
           </a:p>
         </p:txBody>
@@ -10865,7 +11226,7 @@
             <a:spLocks noGrp="1"/>
           </p:cNvSpPr>
           <p:nvPr>
-            <p:ph idx="1" sz="half"/>
+            <p:ph idx="1"/>
           </p:nvPr>
         </p:nvSpPr>
         <p:spPr/>
@@ -10878,172 +11239,15 @@
             </a:pPr>
             <a:r>
               <a:rPr b="1"/>
-              <a:t>The ideas:</a:t>
-            </a:r>
-          </a:p>
-          <a:p>
-            <a:pPr lvl="0"/>
-            <a:r>
-              <a:rPr/>
-              <a:t>A regression </a:t>
-            </a:r>
-            <a:r>
-              <a:rPr b="1"/>
-              <a:t>on time</a:t>
-            </a:r>
-            <a:r>
-              <a:rPr/>
-              <a:t> turns a slope into a </a:t>
-            </a:r>
-            <a:r>
-              <a:rPr b="1"/>
-              <a:t>rate of change</a:t>
-            </a:r>
-            <a:r>
-              <a:rPr/>
-              <a:t> — ×10 for per decade</a:t>
-            </a:r>
-          </a:p>
-          <a:p>
-            <a:pPr lvl="0"/>
-            <a:r>
-              <a:rPr/>
-              <a:t>Raw daily data </a:t>
-            </a:r>
-            <a:r>
-              <a:rPr b="1"/>
-              <a:t>hides</a:t>
-            </a:r>
-            <a:r>
-              <a:rPr/>
-              <a:t> the trend; </a:t>
-            </a:r>
-            <a:r>
-              <a:rPr>
-                <a:latin typeface="Courier"/>
-              </a:rPr>
-              <a:t>group_by(year) %&gt;% summarize()</a:t>
-            </a:r>
-            <a:r>
-              <a:rPr/>
-              <a:t> is the fix</a:t>
-            </a:r>
-          </a:p>
-          <a:p>
-            <a:pPr lvl="0"/>
-            <a:r>
-              <a:rPr/>
-              <a:t>An </a:t>
-            </a:r>
-            <a:r>
-              <a:rPr b="1"/>
-              <a:t>annual mean hides which season moved</a:t>
-            </a:r>
-            <a:r>
-              <a:rPr/>
-              <a:t> — Duluth’s winter warms ~1.6× faster</a:t>
-            </a:r>
-          </a:p>
-          <a:p>
-            <a:pPr lvl="0"/>
-            <a:r>
-              <a:rPr/>
-              <a:t>Seasons are set by </a:t>
-            </a:r>
-            <a:r>
-              <a:rPr b="1"/>
-              <a:t>hemisphere</a:t>
-            </a:r>
-            <a:r>
-              <a:rPr/>
-              <a:t>, not by month number</a:t>
-            </a:r>
-          </a:p>
-          <a:p>
-            <a:pPr lvl="0"/>
-            <a:r>
-              <a:rPr/>
-              <a:t>A modest </a:t>
-            </a:r>
-            <a:r>
-              <a:rPr b="1"/>
-              <a:t>R² with a tiny </a:t>
-            </a:r>
-            <a:r>
-              <a:rPr b="1" i="1"/>
-              <a:t>p</a:t>
-            </a:r>
-            <a:r>
-              <a:rPr/>
-              <a:t> is normal — real trend, weather scatter</a:t>
-            </a:r>
-          </a:p>
-          <a:p>
-            <a:pPr lvl="0" indent="0" marL="0">
-              <a:buNone/>
-            </a:pPr>
-            <a:r>
-              <a:rPr b="1"/>
-              <a:t>The code:</a:t>
-            </a:r>
-          </a:p>
-          <a:p>
-            <a:pPr lvl="0"/>
-            <a:r>
-              <a:rPr>
-                <a:latin typeface="Courier"/>
-              </a:rPr>
-              <a:t>get_GSOD(years =, station =)</a:t>
-            </a:r>
-            <a:r>
-              <a:rPr/>
-              <a:t> and </a:t>
-            </a:r>
-            <a:r>
-              <a:rPr>
-                <a:latin typeface="Courier"/>
-              </a:rPr>
-              <a:t>nearest_stations()</a:t>
-            </a:r>
-          </a:p>
-          <a:p>
-            <a:pPr lvl="0"/>
-            <a:r>
-              <a:rPr>
-                <a:latin typeface="Courier"/>
-              </a:rPr>
-              <a:t>clean_names()</a:t>
-            </a:r>
-            <a:r>
-              <a:rPr/>
-              <a:t> — lower-case names, once, at the top</a:t>
-            </a:r>
-          </a:p>
-          <a:p>
-            <a:pPr lvl="0"/>
-            <a:r>
-              <a:rPr>
-                <a:latin typeface="Courier"/>
-              </a:rPr>
-              <a:t>group_by()</a:t>
-            </a:r>
-            <a:r>
-              <a:rPr/>
-              <a:t> + </a:t>
-            </a:r>
-            <a:r>
-              <a:rPr>
-                <a:latin typeface="Courier"/>
-              </a:rPr>
-              <a:t>summarize()</a:t>
-            </a:r>
-            <a:r>
-              <a:rPr/>
-              <a:t> — to the right level</a:t>
-            </a:r>
-          </a:p>
-          <a:p>
-            <a:pPr lvl="0"/>
+              <a:t>🛑 Do Activity Parts 6–10 now</a:t>
+            </a:r>
+          </a:p>
+          <a:p>
+            <a:pPr lvl="0"/>
+            <a:r>
+              <a:rPr/>
+              <a:t>Label the seasons with </a:t>
+            </a:r>
             <a:r>
               <a:rPr>
                 <a:latin typeface="Courier"/>
@@ -11052,134 +11256,28 @@
             </a:r>
             <a:r>
               <a:rPr/>
-              <a:t> — build the season</a:t>
-            </a:r>
-          </a:p>
-          <a:p>
-            <a:pPr lvl="0"/>
-            <a:r>
-              <a:rPr>
-                <a:latin typeface="Courier"/>
-              </a:rPr>
-              <a:t>lm(temp ~ year)</a:t>
-            </a:r>
-            <a:r>
-              <a:rPr/>
-              <a:t> + </a:t>
-            </a:r>
-            <a:r>
-              <a:rPr>
-                <a:latin typeface="Courier"/>
-              </a:rPr>
-              <a:t>summary()</a:t>
-            </a:r>
-            <a:r>
-              <a:rPr/>
-              <a:t> — the rate</a:t>
-            </a:r>
-          </a:p>
-        </p:txBody>
-      </p:sp>
-      <p:sp>
-        <p:nvSpPr>
-          <p:cNvPr id="4" name="Content Placeholder 3"/>
-          <p:cNvSpPr>
-            <a:spLocks noGrp="1"/>
-          </p:cNvSpPr>
-          <p:nvPr>
-            <p:ph idx="2" sz="half"/>
-          </p:nvPr>
-        </p:nvSpPr>
-        <p:spPr/>
-        <p:txBody>
-          <a:bodyPr/>
-          <a:lstStyle/>
-          <a:p>
-            <a:pPr lvl="0" indent="0" marL="0">
-              <a:buNone/>
-            </a:pPr>
-            <a:r>
-              <a:rPr b="1"/>
-              <a:t>Hand in:</a:t>
-            </a:r>
-            <a:r>
-              <a:rPr/>
-              <a:t> your finished activity script, plus the warming rate you found for </a:t>
-            </a:r>
-            <a:r>
-              <a:rPr b="1"/>
-              <a:t>your own city</a:t>
-            </a:r>
-            <a:r>
-              <a:rPr/>
-              <a:t>.</a:t>
-            </a:r>
-          </a:p>
-          <a:p>
-            <a:pPr lvl="0" indent="0" marL="0">
-              <a:buNone/>
-            </a:pPr>
-            <a:r>
-              <a:rPr b="1"/>
-              <a:t>References:</a:t>
-            </a:r>
-          </a:p>
-          <a:p>
-            <a:pPr lvl="0"/>
-            <a:r>
-              <a:rPr/>
-              <a:t>📖 R4DS Ch. 3 — Data transformation</a:t>
-            </a:r>
-          </a:p>
-          <a:p>
-            <a:pPr lvl="0"/>
-            <a:r>
-              <a:rPr/>
-              <a:t>📖 W&amp;S Ch. 17 — Regression</a:t>
-            </a:r>
-          </a:p>
-          <a:p>
-            <a:pPr lvl="0"/>
-            <a:r>
-              <a:rPr/>
-              <a:t>NOAA GSOD — </a:t>
-            </a:r>
-            <a:r>
-              <a:rPr>
-                <a:latin typeface="Courier"/>
-              </a:rPr>
-              <a:t>ncei.noaa.gov</a:t>
-            </a:r>
-          </a:p>
-          <a:p>
-            <a:pPr lvl="0" indent="0" marL="0">
-              <a:buNone/>
-            </a:pPr>
-            <a:r>
-              <a:rPr b="1"/>
-              <a:t>Up next:</a:t>
-            </a:r>
-          </a:p>
-          <a:p>
-            <a:pPr lvl="0"/>
-            <a:r>
-              <a:rPr/>
-              <a:t>The </a:t>
-            </a:r>
-            <a:r>
-              <a:rPr b="1"/>
-              <a:t>final project</a:t>
-            </a:r>
-            <a:r>
-              <a:rPr/>
-              <a:t> — the same pipeline, on data you choose</a:t>
-            </a:r>
-          </a:p>
-          <a:p>
-            <a:pPr lvl="0"/>
-            <a:r>
-              <a:rPr/>
-              <a:t>Download → clean → summarize → plot → model → report</a:t>
+              <a:t> and summarize by year and season</a:t>
+            </a:r>
+          </a:p>
+          <a:p>
+            <a:pPr lvl="0"/>
+            <a:r>
+              <a:rPr/>
+              <a:t>Plot both seasons, then fit a model for each</a:t>
+            </a:r>
+          </a:p>
+          <a:p>
+            <a:pPr lvl="0"/>
+            <a:r>
+              <a:rPr/>
+              <a:t>Write the warming rates in °C per decade</a:t>
+            </a:r>
+          </a:p>
+          <a:p>
+            <a:pPr lvl="0"/>
+            <a:r>
+              <a:rPr/>
+              <a:t>Get the coordinates for a city you choose — the analysis is your homework</a:t>
             </a:r>
           </a:p>
         </p:txBody>
@@ -11293,7 +11391,7 @@
             </a:r>
             <a:r>
               <a:rPr/>
-              <a:t> ~28,000 daily records into one mean per year</a:t>
+              <a:t> ~25,000 daily records into one mean per year</a:t>
             </a:r>
           </a:p>
           <a:p>
@@ -11419,7 +11517,20 @@
             </a:r>
             <a:r>
               <a:rPr/>
-              <a:t> — download NOAA station data</a:t>
+              <a:t> — NOAA station data (Duluth)</a:t>
+            </a:r>
+          </a:p>
+          <a:p>
+            <a:pPr lvl="0"/>
+            <a:r>
+              <a:rPr>
+                <a:latin typeface="Courier"/>
+              </a:rPr>
+              <a:t>nasapower</a:t>
+            </a:r>
+            <a:r>
+              <a:rPr/>
+              <a:t> — data by lat/long (your city)</a:t>
             </a:r>
           </a:p>
           <a:p>
@@ -11545,6 +11656,395 @@
                 <a:latin typeface="Courier"/>
               </a:rPr>
               <a:t>_model</a:t>
+            </a:r>
+          </a:p>
+        </p:txBody>
+      </p:sp>
+    </p:spTree>
+  </p:cSld>
+</p:sld>
+</file>
+
+<file path=ppt/slides/slide30.xml><?xml version="1.0" encoding="utf-8"?>
+<p:sld xmlns:a="http://schemas.openxmlformats.org/drawingml/2006/main" xmlns:r="http://schemas.openxmlformats.org/officeDocument/2006/relationships" xmlns:p="http://schemas.openxmlformats.org/presentationml/2006/main">
+  <p:cSld>
+    <p:spTree>
+      <p:nvGrpSpPr>
+        <p:cNvPr id="1" name=""/>
+        <p:cNvGrpSpPr/>
+        <p:nvPr/>
+      </p:nvGrpSpPr>
+      <p:grpSpPr>
+        <a:xfrm>
+          <a:off x="0" y="0"/>
+          <a:ext cx="0" cy="0"/>
+          <a:chOff x="0" y="0"/>
+          <a:chExt cx="0" cy="0"/>
+        </a:xfrm>
+      </p:grpSpPr>
+      <p:sp>
+        <p:nvSpPr>
+          <p:cNvPr id="2" name="Title 1"/>
+          <p:cNvSpPr>
+            <a:spLocks noGrp="1"/>
+          </p:cNvSpPr>
+          <p:nvPr>
+            <p:ph type="title"/>
+          </p:nvPr>
+        </p:nvSpPr>
+        <p:spPr>
+          <a:xfrm>
+            <a:off x="0" y="0"/>
+            <a:ext cx="9144000" cy="602780"/>
+          </a:xfrm>
+          <a:solidFill>
+            <a:srgbClr val="1A1A2E"/>
+          </a:solidFill>
+        </p:spPr>
+        <p:txBody>
+          <a:bodyPr/>
+          <a:lstStyle/>
+          <a:p>
+            <a:pPr lvl="0" indent="0" marL="0">
+              <a:buNone/>
+            </a:pPr>
+            <a:r>
+              <a:rPr/>
+              <a:t>What We Learned Today</a:t>
+            </a:r>
+          </a:p>
+        </p:txBody>
+      </p:sp>
+      <p:sp>
+        <p:nvSpPr>
+          <p:cNvPr id="3" name="Content Placeholder 2"/>
+          <p:cNvSpPr>
+            <a:spLocks noGrp="1"/>
+          </p:cNvSpPr>
+          <p:nvPr>
+            <p:ph idx="1" sz="half"/>
+          </p:nvPr>
+        </p:nvSpPr>
+        <p:spPr/>
+        <p:txBody>
+          <a:bodyPr/>
+          <a:lstStyle/>
+          <a:p>
+            <a:pPr lvl="0" indent="0" marL="0">
+              <a:buNone/>
+            </a:pPr>
+            <a:r>
+              <a:rPr b="1"/>
+              <a:t>The ideas:</a:t>
+            </a:r>
+          </a:p>
+          <a:p>
+            <a:pPr lvl="0"/>
+            <a:r>
+              <a:rPr/>
+              <a:t>A regression </a:t>
+            </a:r>
+            <a:r>
+              <a:rPr b="1"/>
+              <a:t>on time</a:t>
+            </a:r>
+            <a:r>
+              <a:rPr/>
+              <a:t> makes the slope a </a:t>
+            </a:r>
+            <a:r>
+              <a:rPr b="1"/>
+              <a:t>rate of change</a:t>
+            </a:r>
+            <a:r>
+              <a:rPr/>
+              <a:t> — ×10 per decade</a:t>
+            </a:r>
+          </a:p>
+          <a:p>
+            <a:pPr lvl="0"/>
+            <a:r>
+              <a:rPr/>
+              <a:t>Raw daily data </a:t>
+            </a:r>
+            <a:r>
+              <a:rPr b="1"/>
+              <a:t>hides</a:t>
+            </a:r>
+            <a:r>
+              <a:rPr/>
+              <a:t> the trend; </a:t>
+            </a:r>
+            <a:r>
+              <a:rPr>
+                <a:latin typeface="Courier"/>
+              </a:rPr>
+              <a:t>group_by(year) %&gt;% summarize()</a:t>
+            </a:r>
+            <a:r>
+              <a:rPr/>
+              <a:t> is the fix</a:t>
+            </a:r>
+          </a:p>
+          <a:p>
+            <a:pPr lvl="0"/>
+            <a:r>
+              <a:rPr/>
+              <a:t>An </a:t>
+            </a:r>
+            <a:r>
+              <a:rPr b="1"/>
+              <a:t>annual mean hides which season moved</a:t>
+            </a:r>
+            <a:r>
+              <a:rPr/>
+              <a:t> — Duluth’s winter warms ~1.7× faster</a:t>
+            </a:r>
+          </a:p>
+          <a:p>
+            <a:pPr lvl="0"/>
+            <a:r>
+              <a:rPr/>
+              <a:t>Seasons are set by </a:t>
+            </a:r>
+            <a:r>
+              <a:rPr b="1"/>
+              <a:t>hemisphere</a:t>
+            </a:r>
+            <a:r>
+              <a:rPr/>
+              <a:t>, not by month number</a:t>
+            </a:r>
+          </a:p>
+          <a:p>
+            <a:pPr lvl="0"/>
+            <a:r>
+              <a:rPr/>
+              <a:t>A modest </a:t>
+            </a:r>
+            <a:r>
+              <a:rPr b="1"/>
+              <a:t>R² with a tiny </a:t>
+            </a:r>
+            <a:r>
+              <a:rPr b="1" i="1"/>
+              <a:t>p</a:t>
+            </a:r>
+            <a:r>
+              <a:rPr/>
+              <a:t> is normal — real trend, weather scatter</a:t>
+            </a:r>
+          </a:p>
+          <a:p>
+            <a:pPr lvl="0" indent="0" marL="0">
+              <a:buNone/>
+            </a:pPr>
+            <a:r>
+              <a:rPr b="1"/>
+              <a:t>The code:</a:t>
+            </a:r>
+          </a:p>
+          <a:p>
+            <a:pPr lvl="0"/>
+            <a:r>
+              <a:rPr>
+                <a:latin typeface="Courier"/>
+              </a:rPr>
+              <a:t>get_GSOD()</a:t>
+            </a:r>
+            <a:r>
+              <a:rPr/>
+              <a:t> — Duluth, by station ID</a:t>
+            </a:r>
+          </a:p>
+          <a:p>
+            <a:pPr lvl="0"/>
+            <a:r>
+              <a:rPr>
+                <a:latin typeface="Courier"/>
+              </a:rPr>
+              <a:t>get_power()</a:t>
+            </a:r>
+            <a:r>
+              <a:rPr/>
+              <a:t> — anywhere, by coordinates</a:t>
+            </a:r>
+          </a:p>
+          <a:p>
+            <a:pPr lvl="0"/>
+            <a:r>
+              <a:rPr>
+                <a:latin typeface="Courier"/>
+              </a:rPr>
+              <a:t>clean_names()</a:t>
+            </a:r>
+            <a:r>
+              <a:rPr/>
+              <a:t> — lower-case names, once</a:t>
+            </a:r>
+          </a:p>
+          <a:p>
+            <a:pPr lvl="0"/>
+            <a:r>
+              <a:rPr>
+                <a:latin typeface="Courier"/>
+              </a:rPr>
+              <a:t>group_by()</a:t>
+            </a:r>
+            <a:r>
+              <a:rPr/>
+              <a:t> + </a:t>
+            </a:r>
+            <a:r>
+              <a:rPr>
+                <a:latin typeface="Courier"/>
+              </a:rPr>
+              <a:t>summarize()</a:t>
+            </a:r>
+            <a:r>
+              <a:rPr/>
+              <a:t> — the right level</a:t>
+            </a:r>
+          </a:p>
+          <a:p>
+            <a:pPr lvl="0"/>
+            <a:r>
+              <a:rPr>
+                <a:latin typeface="Courier"/>
+              </a:rPr>
+              <a:t>case_when()</a:t>
+            </a:r>
+            <a:r>
+              <a:rPr/>
+              <a:t> — build the season</a:t>
+            </a:r>
+          </a:p>
+          <a:p>
+            <a:pPr lvl="0"/>
+            <a:r>
+              <a:rPr>
+                <a:latin typeface="Courier"/>
+              </a:rPr>
+              <a:t>lm(temp ~ year)</a:t>
+            </a:r>
+            <a:r>
+              <a:rPr/>
+              <a:t>, </a:t>
+            </a:r>
+            <a:r>
+              <a:rPr>
+                <a:latin typeface="Courier"/>
+              </a:rPr>
+              <a:t>lm(temp ~ year * station)</a:t>
+            </a:r>
+          </a:p>
+        </p:txBody>
+      </p:sp>
+      <p:sp>
+        <p:nvSpPr>
+          <p:cNvPr id="4" name="Content Placeholder 3"/>
+          <p:cNvSpPr>
+            <a:spLocks noGrp="1"/>
+          </p:cNvSpPr>
+          <p:nvPr>
+            <p:ph idx="2" sz="half"/>
+          </p:nvPr>
+        </p:nvSpPr>
+        <p:spPr/>
+        <p:txBody>
+          <a:bodyPr/>
+          <a:lstStyle/>
+          <a:p>
+            <a:pPr lvl="0" indent="0" marL="0">
+              <a:buNone/>
+            </a:pPr>
+            <a:r>
+              <a:rPr b="1"/>
+              <a:t>Hand in:</a:t>
+            </a:r>
+            <a:r>
+              <a:rPr/>
+              <a:t> your finished activity script, plus the homework — your own city’s warming rate and how it compares with Duluth’s.</a:t>
+            </a:r>
+          </a:p>
+          <a:p>
+            <a:pPr lvl="0" indent="0" marL="0">
+              <a:buNone/>
+            </a:pPr>
+            <a:r>
+              <a:rPr b="1"/>
+              <a:t>References:</a:t>
+            </a:r>
+          </a:p>
+          <a:p>
+            <a:pPr lvl="0"/>
+            <a:r>
+              <a:rPr/>
+              <a:t>📖 R4DS Ch. 3 — Data transformation</a:t>
+            </a:r>
+          </a:p>
+          <a:p>
+            <a:pPr lvl="0"/>
+            <a:r>
+              <a:rPr/>
+              <a:t>📖 W&amp;S Ch. 17 — Regression</a:t>
+            </a:r>
+          </a:p>
+          <a:p>
+            <a:pPr lvl="0"/>
+            <a:r>
+              <a:rPr/>
+              <a:t>NOAA GSOD — </a:t>
+            </a:r>
+            <a:r>
+              <a:rPr>
+                <a:latin typeface="Courier"/>
+              </a:rPr>
+              <a:t>ncei.noaa.gov</a:t>
+            </a:r>
+          </a:p>
+          <a:p>
+            <a:pPr lvl="0"/>
+            <a:r>
+              <a:rPr/>
+              <a:t>NASA POWER — </a:t>
+            </a:r>
+            <a:r>
+              <a:rPr>
+                <a:latin typeface="Courier"/>
+              </a:rPr>
+              <a:t>power.larc.nasa.gov</a:t>
+            </a:r>
+          </a:p>
+          <a:p>
+            <a:pPr lvl="0" indent="0" marL="0">
+              <a:buNone/>
+            </a:pPr>
+            <a:r>
+              <a:rPr b="1"/>
+              <a:t>Up next:</a:t>
+            </a:r>
+          </a:p>
+          <a:p>
+            <a:pPr lvl="0"/>
+            <a:r>
+              <a:rPr/>
+              <a:t>The </a:t>
+            </a:r>
+            <a:r>
+              <a:rPr b="1"/>
+              <a:t>final project</a:t>
+            </a:r>
+            <a:r>
+              <a:rPr/>
+              <a:t> — the same pipeline, on data you choose</a:t>
+            </a:r>
+          </a:p>
+          <a:p>
+            <a:pPr lvl="0"/>
+            <a:r>
+              <a:rPr/>
+              <a:t>Download → clean → summarize → plot → model → report</a:t>
             </a:r>
           </a:p>
         </p:txBody>
@@ -11791,6 +12291,21 @@
             </a:r>
           </a:p>
           <a:p>
+            <a:pPr lvl="1"/>
+            <a:r>
+              <a:rPr/>
+              <a:t>it warns GSOD </a:t>
+            </a:r>
+            <a:r>
+              <a:rPr b="1"/>
+              <a:t>retired in Aug 2025</a:t>
+            </a:r>
+            <a:r>
+              <a:rPr/>
+              <a:t> — expected; the archive still works</a:t>
+            </a:r>
+          </a:p>
+          <a:p>
             <a:pPr lvl="0" indent="0" marL="0">
               <a:buNone/>
             </a:pPr>
@@ -11823,11 +12338,22 @@
             <a:pPr lvl="0"/>
             <a:r>
               <a:rPr/>
-              <a:t>Daily records since </a:t>
+              <a:t>Daily records </a:t>
             </a:r>
             <a:r>
               <a:rPr b="1"/>
-              <a:t>1948</a:t>
+              <a:t>1948–2024</a:t>
+            </a:r>
+          </a:p>
+          <a:p>
+            <a:pPr lvl="1"/>
+            <a:r>
+              <a:rPr b="1"/>
+              <a:t>1965–1972 missing</a:t>
+            </a:r>
+            <a:r>
+              <a:rPr/>
+              <a:t> — a different station ID back then</a:t>
             </a:r>
           </a:p>
         </p:txBody>
@@ -12391,11 +12917,11 @@
             <a:pPr lvl="1"/>
             <a:r>
               <a:rPr/>
-              <a:t>78 years × 365 days ≈ </a:t>
+              <a:t>69 years × 365 days ≈ </a:t>
             </a:r>
             <a:r>
               <a:rPr b="1"/>
-              <a:t>28,000 rows</a:t>
+              <a:t>25,000 rows</a:t>
             </a:r>
           </a:p>
           <a:p>
@@ -12558,7 +13084,7 @@
                       </a:pPr>
                       <a:r>
                         <a:rPr/>
-                        <a:t>~28,000</a:t>
+                        <a:t>~25,000</a:t>
                       </a:r>
                     </a:p>
                   </a:txBody>
@@ -12607,7 +13133,7 @@
                       </a:pPr>
                       <a:r>
                         <a:rPr b="1"/>
-                        <a:t>78</a:t>
+                        <a:t>69</a:t>
                       </a:r>
                     </a:p>
                   </a:txBody>
@@ -12915,7 +13441,7 @@
                 </a:solidFill>
                 <a:latin typeface="Courier"/>
               </a:rPr>
-              <a:t>(tidyverse) </a:t>
+              <a:t>(tidyverse)  </a:t>
             </a:r>
             <a:r>
               <a:rPr>
@@ -12943,7 +13469,7 @@
                 </a:solidFill>
                 <a:latin typeface="Courier"/>
               </a:rPr>
-              <a:t>(janitor)   </a:t>
+              <a:t>(janitor)    </a:t>
             </a:r>
             <a:r>
               <a:rPr>
@@ -12971,7 +13497,7 @@
                 </a:solidFill>
                 <a:latin typeface="Courier"/>
               </a:rPr>
-              <a:t>(GSODR)     </a:t>
+              <a:t>(GSODR)      </a:t>
             </a:r>
             <a:r>
               <a:rPr>
@@ -12980,7 +13506,35 @@
                 </a:solidFill>
                 <a:latin typeface="Courier"/>
               </a:rPr>
-              <a:t># NOAA weather station data</a:t>
+              <a:t># NOAA station data - Duluth</a:t>
+            </a:r>
+            <a:br/>
+            <a:r>
+              <a:rPr>
+                <a:solidFill>
+                  <a:srgbClr val="4758AB"/>
+                </a:solidFill>
+                <a:latin typeface="Courier"/>
+              </a:rPr>
+              <a:t>library</a:t>
+            </a:r>
+            <a:r>
+              <a:rPr>
+                <a:solidFill>
+                  <a:srgbClr val="003B4F"/>
+                </a:solidFill>
+                <a:latin typeface="Courier"/>
+              </a:rPr>
+              <a:t>(nasapower)  </a:t>
+            </a:r>
+            <a:r>
+              <a:rPr>
+                <a:solidFill>
+                  <a:srgbClr val="5E5E5E"/>
+                </a:solidFill>
+                <a:latin typeface="Courier"/>
+              </a:rPr>
+              <a:t># NASA data by lat/long - your city</a:t>
             </a:r>
           </a:p>
           <a:p>
@@ -12994,7 +13548,7 @@
                 </a:solidFill>
                 <a:latin typeface="Courier"/>
               </a:rPr>
-              <a:t># Download daily Duluth weather, 1948-2025 -------------</a:t>
+              <a:t># Download daily Duluth weather, 1948-2024 -------------</a:t>
             </a:r>
             <a:br/>
             <a:r>
@@ -13004,7 +13558,7 @@
                 </a:solidFill>
                 <a:latin typeface="Courier"/>
               </a:rPr>
-              <a:t># clean_names() makes every column lower case</a:t>
+              <a:t># 1965-1972 are missing for this station, so skip them</a:t>
             </a:r>
             <a:br/>
             <a:r>
@@ -13014,6 +13568,44 @@
                 </a:solidFill>
                 <a:latin typeface="Courier"/>
               </a:rPr>
+              <a:t>gap_years &lt;- </a:t>
+            </a:r>
+            <a:r>
+              <a:rPr>
+                <a:solidFill>
+                  <a:srgbClr val="AD0000"/>
+                </a:solidFill>
+                <a:latin typeface="Courier"/>
+              </a:rPr>
+              <a:t>1965</a:t>
+            </a:r>
+            <a:r>
+              <a:rPr>
+                <a:solidFill>
+                  <a:srgbClr val="5E5E5E"/>
+                </a:solidFill>
+                <a:latin typeface="Courier"/>
+              </a:rPr>
+              <a:t>:</a:t>
+            </a:r>
+            <a:r>
+              <a:rPr>
+                <a:solidFill>
+                  <a:srgbClr val="AD0000"/>
+                </a:solidFill>
+                <a:latin typeface="Courier"/>
+              </a:rPr>
+              <a:t>1972</a:t>
+            </a:r>
+            <a:br/>
+            <a:br/>
+            <a:r>
+              <a:rPr>
+                <a:solidFill>
+                  <a:srgbClr val="003B4F"/>
+                </a:solidFill>
+                <a:latin typeface="Courier"/>
+              </a:rPr>
               <a:t>duluth_df &lt;- </a:t>
             </a:r>
             <a:r>
@@ -13055,6 +13647,24 @@
             <a:r>
               <a:rPr>
                 <a:solidFill>
+                  <a:srgbClr val="4758AB"/>
+                </a:solidFill>
+                <a:latin typeface="Courier"/>
+              </a:rPr>
+              <a:t>setdiff</a:t>
+            </a:r>
+            <a:r>
+              <a:rPr>
+                <a:solidFill>
+                  <a:srgbClr val="003B4F"/>
+                </a:solidFill>
+                <a:latin typeface="Courier"/>
+              </a:rPr>
+              <a:t>(</a:t>
+            </a:r>
+            <a:r>
+              <a:rPr>
+                <a:solidFill>
                   <a:srgbClr val="AD0000"/>
                 </a:solidFill>
                 <a:latin typeface="Courier"/>
@@ -13077,16 +13687,16 @@
                 </a:solidFill>
                 <a:latin typeface="Courier"/>
               </a:rPr>
-              <a:t>2025</a:t>
-            </a:r>
-            <a:r>
-              <a:rPr>
-                <a:solidFill>
-                  <a:srgbClr val="003B4F"/>
-                </a:solidFill>
-                <a:latin typeface="Courier"/>
-              </a:rPr>
-              <a:t>,</a:t>
+              <a:t>2024</a:t>
+            </a:r>
+            <a:r>
+              <a:rPr>
+                <a:solidFill>
+                  <a:srgbClr val="003B4F"/>
+                </a:solidFill>
+                <a:latin typeface="Courier"/>
+              </a:rPr>
+              <a:t>, gap_years),</a:t>
             </a:r>
             <a:br/>
             <a:r>
@@ -13223,7 +13833,7 @@
               <a:rPr>
                 <a:latin typeface="Courier"/>
               </a:rPr>
-              <a:t>1948:2025</a:t>
+              <a:t>1948:2024</a:t>
             </a:r>
             <a:r>
               <a:rPr/>
@@ -13233,8 +13843,32 @@
           <a:p>
             <a:pPr lvl="1"/>
             <a:r>
-              <a:rPr/>
-              <a:t>it takes a minute; 78 years of daily data is a lot</a:t>
+              <a:rPr>
+                <a:latin typeface="Courier"/>
+              </a:rPr>
+              <a:t>setdiff()</a:t>
+            </a:r>
+            <a:r>
+              <a:rPr/>
+              <a:t> removes the 8 missing years from that vector</a:t>
+            </a:r>
+          </a:p>
+          <a:p>
+            <a:pPr lvl="2"/>
+            <a:r>
+              <a:rPr/>
+              <a:t>ask for a year the station does not have and the </a:t>
+            </a:r>
+            <a:r>
+              <a:rPr b="1"/>
+              <a:t>whole download fails</a:t>
+            </a:r>
+          </a:p>
+          <a:p>
+            <a:pPr lvl="1"/>
+            <a:r>
+              <a:rPr/>
+              <a:t>it takes a minute; 69 years of daily data is a lot</a:t>
             </a:r>
           </a:p>
           <a:p>

--- a/docs/content/weather/weather_lecture.pptx
+++ b/docs/content/weather/weather_lecture.pptx
@@ -35,6 +35,9 @@
     <p:sldId id="283" r:id="rId29"/>
     <p:sldId id="284" r:id="rId30"/>
     <p:sldId id="285" r:id="rId31"/>
+    <p:sldId id="286" r:id="rId32"/>
+    <p:sldId id="287" r:id="rId33"/>
+    <p:sldId id="288" r:id="rId34"/>
   </p:sldIdLst>
   <p:sldSz cx="9144000" cy="5143500" type="screen16x9"/>
   <p:notesSz cx="6858000" cy="9144000"/>
@@ -3369,7 +3372,7 @@
             </a:pPr>
             <a:r>
               <a:rPr/>
-              <a:t>2026-10-08</a:t>
+              <a:t>2026-10-09</a:t>
             </a:r>
           </a:p>
         </p:txBody>
@@ -5260,17 +5263,7 @@
                 </a:solidFill>
                 <a:latin typeface="Courier"/>
               </a:rPr>
-              <a:t> year,</a:t>
-            </a:r>
-            <a:br/>
-            <a:r>
-              <a:rPr>
-                <a:solidFill>
-                  <a:srgbClr val="003B4F"/>
-                </a:solidFill>
-                <a:latin typeface="Courier"/>
-              </a:rPr>
-              <a:t>                     </a:t>
+              <a:t> year, </a:t>
             </a:r>
             <a:r>
               <a:rPr>
@@ -5626,7 +5619,7 @@
             <a:pPr lvl="1"/>
             <a:r>
               <a:rPr/>
-              <a:t>over ~77 years → roughly </a:t>
+              <a:t>over ~78 years → roughly </a:t>
             </a:r>
             <a:r>
               <a:rPr b="1"/>
@@ -5691,7 +5684,7 @@
             </a:r>
             <a:r>
               <a:rPr b="1"/>
-              <a:t> ≈ 0.32</a:t>
+              <a:t> ≈ 0.34</a:t>
             </a:r>
           </a:p>
           <a:p>
@@ -6003,7 +5996,7 @@
             </a:r>
             <a:r>
               <a:rPr/>
-              <a:t> labelling each day with a season, fitting a separate model for summer and winter, and finding the station ID for a city you choose.</a:t>
+              <a:t> labelling each day with a season, fitting a separate model for summer and winter, finding the station ID for a city you choose, and testing its warming rate against Duluth’s.</a:t>
             </a:r>
           </a:p>
           <a:p>
@@ -6728,6 +6721,16 @@
               </a:rPr>
               <a:t>(</a:t>
             </a:r>
+            <a:br/>
+            <a:r>
+              <a:rPr>
+                <a:solidFill>
+                  <a:srgbClr val="003B4F"/>
+                </a:solidFill>
+                <a:latin typeface="Courier"/>
+              </a:rPr>
+              <a:t>    </a:t>
+            </a:r>
             <a:r>
               <a:rPr>
                 <a:solidFill>
@@ -6772,7 +6775,7 @@
                 </a:solidFill>
                 <a:latin typeface="Courier"/>
               </a:rPr>
-              <a:t>    month </a:t>
+              <a:t>      month </a:t>
             </a:r>
             <a:r>
               <a:rPr>
@@ -6908,7 +6911,7 @@
                 </a:solidFill>
                 <a:latin typeface="Courier"/>
               </a:rPr>
-              <a:t>    month </a:t>
+              <a:t>      month </a:t>
             </a:r>
             <a:r>
               <a:rPr>
@@ -7044,7 +7047,7 @@
                 </a:solidFill>
                 <a:latin typeface="Courier"/>
               </a:rPr>
-              <a:t>    </a:t>
+              <a:t>      </a:t>
             </a:r>
             <a:r>
               <a:rPr>
@@ -7099,7 +7102,17 @@
                 </a:solidFill>
                 <a:latin typeface="Courier"/>
               </a:rPr>
-              <a:t>  ))</a:t>
+              <a:t>    )</a:t>
+            </a:r>
+            <a:br/>
+            <a:r>
+              <a:rPr>
+                <a:solidFill>
+                  <a:srgbClr val="003B4F"/>
+                </a:solidFill>
+                <a:latin typeface="Courier"/>
+              </a:rPr>
+              <a:t>  )</a:t>
             </a:r>
             <a:br/>
             <a:br/>
@@ -7613,17 +7626,7 @@
                 </a:solidFill>
                 <a:latin typeface="Courier"/>
               </a:rPr>
-              <a:t>),</a:t>
-            </a:r>
-            <a:br/>
-            <a:r>
-              <a:rPr>
-                <a:solidFill>
-                  <a:srgbClr val="003B4F"/>
-                </a:solidFill>
-                <a:latin typeface="Courier"/>
-              </a:rPr>
-              <a:t>            </a:t>
+              <a:t>), </a:t>
             </a:r>
             <a:r>
               <a:rPr>
@@ -7799,7 +7802,7 @@
             <a:pPr lvl="1"/>
             <a:r>
               <a:rPr/>
-              <a:t>69 years × 2 seasons = 138 rows</a:t>
+              <a:t>70 years × 2 seasons = 140 rows</a:t>
             </a:r>
           </a:p>
           <a:p>
@@ -8639,7 +8642,7 @@
             </a:r>
             <a:r>
               <a:rPr b="1"/>
-              <a:t>0.22 °C per decade</a:t>
+              <a:t>0.21 °C per decade</a:t>
             </a:r>
           </a:p>
           <a:p>
@@ -8972,7 +8975,7 @@
             </a:r>
             <a:r>
               <a:rPr b="1"/>
-              <a:t>0.37 °C per decade</a:t>
+              <a:t>0.34 °C per decade</a:t>
             </a:r>
           </a:p>
           <a:p>
@@ -8983,7 +8986,7 @@
             </a:r>
             <a:r>
               <a:rPr/>
-              <a:t> = 0.0006 → real</a:t>
+              <a:t> = 0.001 → real</a:t>
             </a:r>
           </a:p>
           <a:p>
@@ -8992,7 +8995,7 @@
             </a:pPr>
             <a:r>
               <a:rPr b="1"/>
-              <a:t>Winter is warming about 1.7× as fast as summer.</a:t>
+              <a:t>Winter is warming about 1.6× as fast as summer.</a:t>
             </a:r>
           </a:p>
           <a:p>
@@ -9138,8 +9141,8 @@
               <a:tblGrid>
                 <a:gridCol w="1104900"/>
                 <a:gridCol w="1104900"/>
-                <a:gridCol w="1244600"/>
-                <a:gridCol w="977900"/>
+                <a:gridCol w="1104900"/>
+                <a:gridCol w="1104900"/>
               </a:tblGrid>
               <a:tr h="0">
                 <a:tc>
@@ -9295,7 +9298,7 @@
                       </a:pPr>
                       <a:r>
                         <a:rPr/>
-                        <a:t>0.022</a:t>
+                        <a:t>0.021</a:t>
                       </a:r>
                     </a:p>
                   </a:txBody>
@@ -9310,7 +9313,7 @@
                       </a:pPr>
                       <a:r>
                         <a:rPr/>
-                        <a:t>0.22</a:t>
+                        <a:t>0.21</a:t>
                       </a:r>
                     </a:p>
                   </a:txBody>
@@ -9357,7 +9360,7 @@
                       </a:pPr>
                       <a:r>
                         <a:rPr/>
-                        <a:t>0.037</a:t>
+                        <a:t>0.034</a:t>
                       </a:r>
                     </a:p>
                   </a:txBody>
@@ -9372,7 +9375,7 @@
                       </a:pPr>
                       <a:r>
                         <a:rPr/>
-                        <a:t>0.37</a:t>
+                        <a:t>0.34</a:t>
                       </a:r>
                     </a:p>
                   </a:txBody>
@@ -9387,7 +9390,7 @@
                       </a:pPr>
                       <a:r>
                         <a:rPr/>
-                        <a:t>0.0006</a:t>
+                        <a:t>0.0012</a:t>
                       </a:r>
                     </a:p>
                   </a:txBody>
@@ -9472,7 +9475,7 @@
             </a:pPr>
             <a:r>
               <a:rPr sz="2000" i="1"/>
-              <a:t>Mean annual temperature at Duluth rose significantly from 1948 to 2024 (linear regression: slope = 0.027 °C yr⁻¹, equivalent to 0.27 °C per decade; F(1, 67) = 32.1, p &lt; 0.001, R² = 0.32). Winter warmed roughly 1.7 times faster than summer (0.37 vs 0.22 °C per decade).</a:t>
+              <a:t>Mean annual temperature at Duluth rose significantly from 1948 to 2025 (linear regression: slope = 0.027 °C yr⁻¹, equivalent to 0.27 °C per decade; F(1, 68) = 34.3, p &lt; 0.001, R² = 0.34). Winter warmed roughly 1.6 times faster than summer (0.34 vs 0.21 °C per decade).</a:t>
             </a:r>
           </a:p>
           <a:p>
@@ -9568,7 +9571,7 @@
             </a:pPr>
             <a:r>
               <a:rPr/>
-              <a:t>Now Do It for Your City</a:t>
+              <a:t>What GSOD Has — Any Country</a:t>
             </a:r>
           </a:p>
         </p:txBody>
@@ -9598,26 +9601,17 @@
                 </a:solidFill>
                 <a:latin typeface="Courier"/>
               </a:rPr>
-              <a:t># NASA POWER - lon and lat, no station -----------------</a:t>
+              <a:t># Every station, and the years it covers ---------------</a:t>
             </a:r>
             <a:br/>
             <a:r>
               <a:rPr>
                 <a:solidFill>
-                  <a:srgbClr val="003B4F"/>
-                </a:solidFill>
-                <a:latin typeface="Courier"/>
-              </a:rPr>
-              <a:t>city_df &lt;- </a:t>
-            </a:r>
-            <a:r>
-              <a:rPr>
-                <a:solidFill>
                   <a:srgbClr val="4758AB"/>
                 </a:solidFill>
                 <a:latin typeface="Courier"/>
               </a:rPr>
-              <a:t>get_power</a:t>
+              <a:t>load</a:t>
             </a:r>
             <a:r>
               <a:rPr>
@@ -9631,11 +9625,75 @@
             <a:r>
               <a:rPr>
                 <a:solidFill>
+                  <a:srgbClr val="4758AB"/>
+                </a:solidFill>
+                <a:latin typeface="Courier"/>
+              </a:rPr>
+              <a:t>system.file</a:t>
+            </a:r>
+            <a:r>
+              <a:rPr>
+                <a:solidFill>
+                  <a:srgbClr val="003B4F"/>
+                </a:solidFill>
+                <a:latin typeface="Courier"/>
+              </a:rPr>
+              <a:t>(</a:t>
+            </a:r>
+            <a:r>
+              <a:rPr>
+                <a:solidFill>
+                  <a:srgbClr val="20794D"/>
+                </a:solidFill>
+                <a:latin typeface="Courier"/>
+              </a:rPr>
+              <a:t>"extdata"</a:t>
+            </a:r>
+            <a:r>
+              <a:rPr>
+                <a:solidFill>
+                  <a:srgbClr val="003B4F"/>
+                </a:solidFill>
+                <a:latin typeface="Courier"/>
+              </a:rPr>
+              <a:t>, </a:t>
+            </a:r>
+            <a:r>
+              <a:rPr>
+                <a:solidFill>
+                  <a:srgbClr val="20794D"/>
+                </a:solidFill>
+                <a:latin typeface="Courier"/>
+              </a:rPr>
+              <a:t>"isd_history.rda"</a:t>
+            </a:r>
+            <a:r>
+              <a:rPr>
+                <a:solidFill>
+                  <a:srgbClr val="003B4F"/>
+                </a:solidFill>
+                <a:latin typeface="Courier"/>
+              </a:rPr>
+              <a:t>,</a:t>
+            </a:r>
+            <a:br/>
+            <a:r>
+              <a:rPr>
+                <a:solidFill>
+                  <a:srgbClr val="003B4F"/>
+                </a:solidFill>
+                <a:latin typeface="Courier"/>
+              </a:rPr>
+              <a:t>                 </a:t>
+            </a:r>
+            <a:r>
+              <a:rPr>
+                <a:solidFill>
                   <a:srgbClr val="657422"/>
                 </a:solidFill>
                 <a:latin typeface="Courier"/>
               </a:rPr>
-              <a:t>community =</a:t>
+              <a:t>package =</a:t>
             </a:r>
             <a:r>
               <a:rPr>
@@ -9653,421 +9711,548 @@
                 </a:solidFill>
                 <a:latin typeface="Courier"/>
               </a:rPr>
-              <a:t>"ag"</a:t>
-            </a:r>
-            <a:r>
-              <a:rPr>
-                <a:solidFill>
-                  <a:srgbClr val="003B4F"/>
-                </a:solidFill>
-                <a:latin typeface="Courier"/>
-              </a:rPr>
-              <a:t>,</a:t>
-            </a:r>
-            <a:br/>
-            <a:r>
-              <a:rPr>
-                <a:solidFill>
-                  <a:srgbClr val="003B4F"/>
-                </a:solidFill>
-                <a:latin typeface="Courier"/>
-              </a:rPr>
-              <a:t>                     </a:t>
-            </a:r>
-            <a:r>
-              <a:rPr>
-                <a:solidFill>
-                  <a:srgbClr val="657422"/>
-                </a:solidFill>
-                <a:latin typeface="Courier"/>
-              </a:rPr>
-              <a:t>lonlat =</a:t>
-            </a:r>
-            <a:r>
-              <a:rPr>
-                <a:solidFill>
-                  <a:srgbClr val="003B4F"/>
-                </a:solidFill>
-                <a:latin typeface="Courier"/>
-              </a:rPr>
-              <a:t> </a:t>
-            </a:r>
-            <a:r>
-              <a:rPr>
-                <a:solidFill>
-                  <a:srgbClr val="4758AB"/>
-                </a:solidFill>
-                <a:latin typeface="Courier"/>
-              </a:rPr>
-              <a:t>c</a:t>
-            </a:r>
-            <a:r>
-              <a:rPr>
-                <a:solidFill>
-                  <a:srgbClr val="003B4F"/>
-                </a:solidFill>
-                <a:latin typeface="Courier"/>
-              </a:rPr>
-              <a:t>(</a:t>
-            </a:r>
-            <a:r>
-              <a:rPr>
-                <a:solidFill>
-                  <a:srgbClr val="5E5E5E"/>
-                </a:solidFill>
-                <a:latin typeface="Courier"/>
-              </a:rPr>
-              <a:t>-</a:t>
-            </a:r>
-            <a:r>
-              <a:rPr>
-                <a:solidFill>
-                  <a:srgbClr val="AD0000"/>
-                </a:solidFill>
-                <a:latin typeface="Courier"/>
-              </a:rPr>
-              <a:t>0.13</a:t>
-            </a:r>
-            <a:r>
-              <a:rPr>
-                <a:solidFill>
-                  <a:srgbClr val="003B4F"/>
-                </a:solidFill>
-                <a:latin typeface="Courier"/>
-              </a:rPr>
-              <a:t>, </a:t>
-            </a:r>
-            <a:r>
-              <a:rPr>
-                <a:solidFill>
-                  <a:srgbClr val="AD0000"/>
-                </a:solidFill>
-                <a:latin typeface="Courier"/>
-              </a:rPr>
-              <a:t>51.51</a:t>
-            </a:r>
-            <a:r>
-              <a:rPr>
-                <a:solidFill>
-                  <a:srgbClr val="003B4F"/>
-                </a:solidFill>
-                <a:latin typeface="Courier"/>
-              </a:rPr>
-              <a:t>),</a:t>
-            </a:r>
-            <a:br/>
-            <a:r>
-              <a:rPr>
-                <a:solidFill>
-                  <a:srgbClr val="003B4F"/>
-                </a:solidFill>
-                <a:latin typeface="Courier"/>
-              </a:rPr>
-              <a:t>                     </a:t>
-            </a:r>
-            <a:r>
-              <a:rPr>
-                <a:solidFill>
-                  <a:srgbClr val="657422"/>
-                </a:solidFill>
-                <a:latin typeface="Courier"/>
-              </a:rPr>
-              <a:t>pars =</a:t>
-            </a:r>
-            <a:r>
-              <a:rPr>
-                <a:solidFill>
-                  <a:srgbClr val="003B4F"/>
-                </a:solidFill>
-                <a:latin typeface="Courier"/>
-              </a:rPr>
-              <a:t> </a:t>
-            </a:r>
-            <a:r>
-              <a:rPr>
-                <a:solidFill>
-                  <a:srgbClr val="20794D"/>
-                </a:solidFill>
-                <a:latin typeface="Courier"/>
-              </a:rPr>
-              <a:t>"T2M"</a:t>
-            </a:r>
-            <a:r>
-              <a:rPr>
-                <a:solidFill>
-                  <a:srgbClr val="003B4F"/>
-                </a:solidFill>
-                <a:latin typeface="Courier"/>
-              </a:rPr>
-              <a:t>,</a:t>
-            </a:r>
-            <a:br/>
-            <a:r>
-              <a:rPr>
-                <a:solidFill>
-                  <a:srgbClr val="003B4F"/>
-                </a:solidFill>
-                <a:latin typeface="Courier"/>
-              </a:rPr>
-              <a:t>                     </a:t>
-            </a:r>
-            <a:r>
-              <a:rPr>
-                <a:solidFill>
-                  <a:srgbClr val="657422"/>
-                </a:solidFill>
-                <a:latin typeface="Courier"/>
-              </a:rPr>
-              <a:t>dates =</a:t>
-            </a:r>
-            <a:r>
-              <a:rPr>
-                <a:solidFill>
-                  <a:srgbClr val="003B4F"/>
-                </a:solidFill>
-                <a:latin typeface="Courier"/>
-              </a:rPr>
-              <a:t> </a:t>
-            </a:r>
-            <a:r>
-              <a:rPr>
-                <a:solidFill>
-                  <a:srgbClr val="4758AB"/>
-                </a:solidFill>
-                <a:latin typeface="Courier"/>
-              </a:rPr>
-              <a:t>c</a:t>
-            </a:r>
-            <a:r>
-              <a:rPr>
-                <a:solidFill>
-                  <a:srgbClr val="003B4F"/>
-                </a:solidFill>
-                <a:latin typeface="Courier"/>
-              </a:rPr>
-              <a:t>(</a:t>
-            </a:r>
-            <a:r>
-              <a:rPr>
-                <a:solidFill>
-                  <a:srgbClr val="20794D"/>
-                </a:solidFill>
-                <a:latin typeface="Courier"/>
-              </a:rPr>
-              <a:t>"1981-01-01"</a:t>
-            </a:r>
-            <a:r>
-              <a:rPr>
-                <a:solidFill>
-                  <a:srgbClr val="003B4F"/>
-                </a:solidFill>
-                <a:latin typeface="Courier"/>
-              </a:rPr>
-              <a:t>,</a:t>
-            </a:r>
-            <a:br/>
-            <a:r>
-              <a:rPr>
-                <a:solidFill>
-                  <a:srgbClr val="003B4F"/>
-                </a:solidFill>
-                <a:latin typeface="Courier"/>
-              </a:rPr>
-              <a:t>                               </a:t>
-            </a:r>
-            <a:r>
-              <a:rPr>
-                <a:solidFill>
-                  <a:srgbClr val="20794D"/>
-                </a:solidFill>
-                <a:latin typeface="Courier"/>
-              </a:rPr>
-              <a:t>"2024-12-31"</a:t>
-            </a:r>
-            <a:r>
-              <a:rPr>
-                <a:solidFill>
-                  <a:srgbClr val="003B4F"/>
-                </a:solidFill>
-                <a:latin typeface="Courier"/>
-              </a:rPr>
-              <a:t>),</a:t>
-            </a:r>
-            <a:br/>
-            <a:r>
-              <a:rPr>
-                <a:solidFill>
-                  <a:srgbClr val="003B4F"/>
-                </a:solidFill>
-                <a:latin typeface="Courier"/>
-              </a:rPr>
-              <a:t>                     </a:t>
-            </a:r>
-            <a:r>
-              <a:rPr>
-                <a:solidFill>
-                  <a:srgbClr val="657422"/>
-                </a:solidFill>
-                <a:latin typeface="Courier"/>
-              </a:rPr>
-              <a:t>temporal_api =</a:t>
-            </a:r>
-            <a:r>
-              <a:rPr>
-                <a:solidFill>
-                  <a:srgbClr val="003B4F"/>
-                </a:solidFill>
-                <a:latin typeface="Courier"/>
-              </a:rPr>
-              <a:t> </a:t>
-            </a:r>
-            <a:r>
-              <a:rPr>
-                <a:solidFill>
-                  <a:srgbClr val="20794D"/>
-                </a:solidFill>
-                <a:latin typeface="Courier"/>
-              </a:rPr>
-              <a:t>"daily"</a:t>
-            </a:r>
-            <a:r>
-              <a:rPr>
-                <a:solidFill>
-                  <a:srgbClr val="003B4F"/>
-                </a:solidFill>
-                <a:latin typeface="Courier"/>
-              </a:rPr>
-              <a:t>) </a:t>
-            </a:r>
-            <a:r>
-              <a:rPr>
-                <a:solidFill>
-                  <a:srgbClr val="5E5E5E"/>
-                </a:solidFill>
-                <a:latin typeface="Courier"/>
-              </a:rPr>
-              <a:t>%&gt;%</a:t>
-            </a:r>
-            <a:br/>
-            <a:r>
-              <a:rPr>
-                <a:solidFill>
-                  <a:srgbClr val="003B4F"/>
-                </a:solidFill>
-                <a:latin typeface="Courier"/>
-              </a:rPr>
-              <a:t>  </a:t>
-            </a:r>
-            <a:r>
-              <a:rPr>
-                <a:solidFill>
-                  <a:srgbClr val="4758AB"/>
-                </a:solidFill>
-                <a:latin typeface="Courier"/>
-              </a:rPr>
-              <a:t>clean_names</a:t>
-            </a:r>
-            <a:r>
-              <a:rPr>
-                <a:solidFill>
-                  <a:srgbClr val="003B4F"/>
-                </a:solidFill>
-                <a:latin typeface="Courier"/>
-              </a:rPr>
-              <a:t>() </a:t>
-            </a:r>
-            <a:r>
-              <a:rPr>
-                <a:solidFill>
-                  <a:srgbClr val="5E5E5E"/>
-                </a:solidFill>
-                <a:latin typeface="Courier"/>
-              </a:rPr>
-              <a:t>%&gt;%</a:t>
-            </a:r>
-            <a:br/>
-            <a:r>
-              <a:rPr>
-                <a:solidFill>
-                  <a:srgbClr val="003B4F"/>
-                </a:solidFill>
-                <a:latin typeface="Courier"/>
-              </a:rPr>
-              <a:t>  </a:t>
-            </a:r>
-            <a:r>
-              <a:rPr>
-                <a:solidFill>
-                  <a:srgbClr val="4758AB"/>
-                </a:solidFill>
-                <a:latin typeface="Courier"/>
-              </a:rPr>
-              <a:t>rename</a:t>
-            </a:r>
-            <a:r>
-              <a:rPr>
-                <a:solidFill>
-                  <a:srgbClr val="003B4F"/>
-                </a:solidFill>
-                <a:latin typeface="Courier"/>
-              </a:rPr>
-              <a:t>(</a:t>
-            </a:r>
-            <a:r>
-              <a:rPr>
-                <a:solidFill>
-                  <a:srgbClr val="657422"/>
-                </a:solidFill>
-                <a:latin typeface="Courier"/>
-              </a:rPr>
-              <a:t>month =</a:t>
-            </a:r>
-            <a:r>
-              <a:rPr>
-                <a:solidFill>
-                  <a:srgbClr val="003B4F"/>
-                </a:solidFill>
-                <a:latin typeface="Courier"/>
-              </a:rPr>
-              <a:t> mm, </a:t>
-            </a:r>
-            <a:r>
-              <a:rPr>
-                <a:solidFill>
-                  <a:srgbClr val="657422"/>
-                </a:solidFill>
-                <a:latin typeface="Courier"/>
-              </a:rPr>
-              <a:t>temp =</a:t>
-            </a:r>
-            <a:r>
-              <a:rPr>
-                <a:solidFill>
-                  <a:srgbClr val="003B4F"/>
-                </a:solidFill>
-                <a:latin typeface="Courier"/>
-              </a:rPr>
-              <a:t> t2m)</a:t>
+              <a:t>"GSODR"</a:t>
+            </a:r>
+            <a:r>
+              <a:rPr>
+                <a:solidFill>
+                  <a:srgbClr val="003B4F"/>
+                </a:solidFill>
+                <a:latin typeface="Courier"/>
+              </a:rPr>
+              <a:t>))</a:t>
             </a:r>
             <a:br/>
             <a:br/>
             <a:r>
               <a:rPr>
                 <a:solidFill>
+                  <a:srgbClr val="003B4F"/>
+                </a:solidFill>
+                <a:latin typeface="Courier"/>
+              </a:rPr>
+              <a:t>stations_df &lt;- isd_history </a:t>
+            </a:r>
+            <a:r>
+              <a:rPr>
+                <a:solidFill>
+                  <a:srgbClr val="5E5E5E"/>
+                </a:solidFill>
+                <a:latin typeface="Courier"/>
+              </a:rPr>
+              <a:t>%&gt;%</a:t>
+            </a:r>
+            <a:br/>
+            <a:r>
+              <a:rPr>
+                <a:solidFill>
+                  <a:srgbClr val="003B4F"/>
+                </a:solidFill>
+                <a:latin typeface="Courier"/>
+              </a:rPr>
+              <a:t>  </a:t>
+            </a:r>
+            <a:r>
+              <a:rPr>
+                <a:solidFill>
                   <a:srgbClr val="4758AB"/>
                 </a:solidFill>
                 <a:latin typeface="Courier"/>
               </a:rPr>
-              <a:t>dim</a:t>
-            </a:r>
-            <a:r>
-              <a:rPr>
-                <a:solidFill>
-                  <a:srgbClr val="003B4F"/>
-                </a:solidFill>
-                <a:latin typeface="Courier"/>
-              </a:rPr>
-              <a:t>(city_df)</a:t>
+              <a:t>clean_names</a:t>
+            </a:r>
+            <a:r>
+              <a:rPr>
+                <a:solidFill>
+                  <a:srgbClr val="003B4F"/>
+                </a:solidFill>
+                <a:latin typeface="Courier"/>
+              </a:rPr>
+              <a:t>() </a:t>
+            </a:r>
+            <a:r>
+              <a:rPr>
+                <a:solidFill>
+                  <a:srgbClr val="5E5E5E"/>
+                </a:solidFill>
+                <a:latin typeface="Courier"/>
+              </a:rPr>
+              <a:t>%&gt;%</a:t>
+            </a:r>
+            <a:br/>
+            <a:r>
+              <a:rPr>
+                <a:solidFill>
+                  <a:srgbClr val="003B4F"/>
+                </a:solidFill>
+                <a:latin typeface="Courier"/>
+              </a:rPr>
+              <a:t>  </a:t>
+            </a:r>
+            <a:r>
+              <a:rPr>
+                <a:solidFill>
+                  <a:srgbClr val="4758AB"/>
+                </a:solidFill>
+                <a:latin typeface="Courier"/>
+              </a:rPr>
+              <a:t>filter</a:t>
+            </a:r>
+            <a:r>
+              <a:rPr>
+                <a:solidFill>
+                  <a:srgbClr val="003B4F"/>
+                </a:solidFill>
+                <a:latin typeface="Courier"/>
+              </a:rPr>
+              <a:t>(country_name </a:t>
+            </a:r>
+            <a:r>
+              <a:rPr>
+                <a:solidFill>
+                  <a:srgbClr val="5E5E5E"/>
+                </a:solidFill>
+                <a:latin typeface="Courier"/>
+              </a:rPr>
+              <a:t>==</a:t>
+            </a:r>
+            <a:r>
+              <a:rPr>
+                <a:solidFill>
+                  <a:srgbClr val="003B4F"/>
+                </a:solidFill>
+                <a:latin typeface="Courier"/>
+              </a:rPr>
+              <a:t> </a:t>
+            </a:r>
+            <a:r>
+              <a:rPr>
+                <a:solidFill>
+                  <a:srgbClr val="20794D"/>
+                </a:solidFill>
+                <a:latin typeface="Courier"/>
+              </a:rPr>
+              <a:t>"ICELAND"</a:t>
+            </a:r>
+            <a:r>
+              <a:rPr>
+                <a:solidFill>
+                  <a:srgbClr val="003B4F"/>
+                </a:solidFill>
+                <a:latin typeface="Courier"/>
+              </a:rPr>
+              <a:t>) </a:t>
+            </a:r>
+            <a:r>
+              <a:rPr>
+                <a:solidFill>
+                  <a:srgbClr val="5E5E5E"/>
+                </a:solidFill>
+                <a:latin typeface="Courier"/>
+              </a:rPr>
+              <a:t>%&gt;%</a:t>
+            </a:r>
+            <a:br/>
+            <a:r>
+              <a:rPr>
+                <a:solidFill>
+                  <a:srgbClr val="003B4F"/>
+                </a:solidFill>
+                <a:latin typeface="Courier"/>
+              </a:rPr>
+              <a:t>  </a:t>
+            </a:r>
+            <a:r>
+              <a:rPr>
+                <a:solidFill>
+                  <a:srgbClr val="4758AB"/>
+                </a:solidFill>
+                <a:latin typeface="Courier"/>
+              </a:rPr>
+              <a:t>mutate</a:t>
+            </a:r>
+            <a:r>
+              <a:rPr>
+                <a:solidFill>
+                  <a:srgbClr val="003B4F"/>
+                </a:solidFill>
+                <a:latin typeface="Courier"/>
+              </a:rPr>
+              <a:t>(</a:t>
+            </a:r>
+            <a:r>
+              <a:rPr>
+                <a:solidFill>
+                  <a:srgbClr val="657422"/>
+                </a:solidFill>
+                <a:latin typeface="Courier"/>
+              </a:rPr>
+              <a:t>begin_year =</a:t>
+            </a:r>
+            <a:r>
+              <a:rPr>
+                <a:solidFill>
+                  <a:srgbClr val="003B4F"/>
+                </a:solidFill>
+                <a:latin typeface="Courier"/>
+              </a:rPr>
+              <a:t> </a:t>
+            </a:r>
+            <a:r>
+              <a:rPr>
+                <a:solidFill>
+                  <a:srgbClr val="4758AB"/>
+                </a:solidFill>
+                <a:latin typeface="Courier"/>
+              </a:rPr>
+              <a:t>as.integer</a:t>
+            </a:r>
+            <a:r>
+              <a:rPr>
+                <a:solidFill>
+                  <a:srgbClr val="003B4F"/>
+                </a:solidFill>
+                <a:latin typeface="Courier"/>
+              </a:rPr>
+              <a:t>(</a:t>
+            </a:r>
+            <a:r>
+              <a:rPr>
+                <a:solidFill>
+                  <a:srgbClr val="4758AB"/>
+                </a:solidFill>
+                <a:latin typeface="Courier"/>
+              </a:rPr>
+              <a:t>str_sub</a:t>
+            </a:r>
+            <a:r>
+              <a:rPr>
+                <a:solidFill>
+                  <a:srgbClr val="003B4F"/>
+                </a:solidFill>
+                <a:latin typeface="Courier"/>
+              </a:rPr>
+              <a:t>(begin, </a:t>
+            </a:r>
+            <a:r>
+              <a:rPr>
+                <a:solidFill>
+                  <a:srgbClr val="AD0000"/>
+                </a:solidFill>
+                <a:latin typeface="Courier"/>
+              </a:rPr>
+              <a:t>1</a:t>
+            </a:r>
+            <a:r>
+              <a:rPr>
+                <a:solidFill>
+                  <a:srgbClr val="003B4F"/>
+                </a:solidFill>
+                <a:latin typeface="Courier"/>
+              </a:rPr>
+              <a:t>, </a:t>
+            </a:r>
+            <a:r>
+              <a:rPr>
+                <a:solidFill>
+                  <a:srgbClr val="AD0000"/>
+                </a:solidFill>
+                <a:latin typeface="Courier"/>
+              </a:rPr>
+              <a:t>4</a:t>
+            </a:r>
+            <a:r>
+              <a:rPr>
+                <a:solidFill>
+                  <a:srgbClr val="003B4F"/>
+                </a:solidFill>
+                <a:latin typeface="Courier"/>
+              </a:rPr>
+              <a:t>)),</a:t>
+            </a:r>
+            <a:br/>
+            <a:r>
+              <a:rPr>
+                <a:solidFill>
+                  <a:srgbClr val="003B4F"/>
+                </a:solidFill>
+                <a:latin typeface="Courier"/>
+              </a:rPr>
+              <a:t>         </a:t>
+            </a:r>
+            <a:r>
+              <a:rPr>
+                <a:solidFill>
+                  <a:srgbClr val="657422"/>
+                </a:solidFill>
+                <a:latin typeface="Courier"/>
+              </a:rPr>
+              <a:t>end_year   =</a:t>
+            </a:r>
+            <a:r>
+              <a:rPr>
+                <a:solidFill>
+                  <a:srgbClr val="003B4F"/>
+                </a:solidFill>
+                <a:latin typeface="Courier"/>
+              </a:rPr>
+              <a:t> </a:t>
+            </a:r>
+            <a:r>
+              <a:rPr>
+                <a:solidFill>
+                  <a:srgbClr val="4758AB"/>
+                </a:solidFill>
+                <a:latin typeface="Courier"/>
+              </a:rPr>
+              <a:t>as.integer</a:t>
+            </a:r>
+            <a:r>
+              <a:rPr>
+                <a:solidFill>
+                  <a:srgbClr val="003B4F"/>
+                </a:solidFill>
+                <a:latin typeface="Courier"/>
+              </a:rPr>
+              <a:t>(</a:t>
+            </a:r>
+            <a:r>
+              <a:rPr>
+                <a:solidFill>
+                  <a:srgbClr val="4758AB"/>
+                </a:solidFill>
+                <a:latin typeface="Courier"/>
+              </a:rPr>
+              <a:t>str_sub</a:t>
+            </a:r>
+            <a:r>
+              <a:rPr>
+                <a:solidFill>
+                  <a:srgbClr val="003B4F"/>
+                </a:solidFill>
+                <a:latin typeface="Courier"/>
+              </a:rPr>
+              <a:t>(end, </a:t>
+            </a:r>
+            <a:r>
+              <a:rPr>
+                <a:solidFill>
+                  <a:srgbClr val="AD0000"/>
+                </a:solidFill>
+                <a:latin typeface="Courier"/>
+              </a:rPr>
+              <a:t>1</a:t>
+            </a:r>
+            <a:r>
+              <a:rPr>
+                <a:solidFill>
+                  <a:srgbClr val="003B4F"/>
+                </a:solidFill>
+                <a:latin typeface="Courier"/>
+              </a:rPr>
+              <a:t>, </a:t>
+            </a:r>
+            <a:r>
+              <a:rPr>
+                <a:solidFill>
+                  <a:srgbClr val="AD0000"/>
+                </a:solidFill>
+                <a:latin typeface="Courier"/>
+              </a:rPr>
+              <a:t>4</a:t>
+            </a:r>
+            <a:r>
+              <a:rPr>
+                <a:solidFill>
+                  <a:srgbClr val="003B4F"/>
+                </a:solidFill>
+                <a:latin typeface="Courier"/>
+              </a:rPr>
+              <a:t>))) </a:t>
+            </a:r>
+            <a:r>
+              <a:rPr>
+                <a:solidFill>
+                  <a:srgbClr val="5E5E5E"/>
+                </a:solidFill>
+                <a:latin typeface="Courier"/>
+              </a:rPr>
+              <a:t>%&gt;%</a:t>
+            </a:r>
+            <a:br/>
+            <a:r>
+              <a:rPr>
+                <a:solidFill>
+                  <a:srgbClr val="003B4F"/>
+                </a:solidFill>
+                <a:latin typeface="Courier"/>
+              </a:rPr>
+              <a:t>  </a:t>
+            </a:r>
+            <a:r>
+              <a:rPr>
+                <a:solidFill>
+                  <a:srgbClr val="4758AB"/>
+                </a:solidFill>
+                <a:latin typeface="Courier"/>
+              </a:rPr>
+              <a:t>filter</a:t>
+            </a:r>
+            <a:r>
+              <a:rPr>
+                <a:solidFill>
+                  <a:srgbClr val="003B4F"/>
+                </a:solidFill>
+                <a:latin typeface="Courier"/>
+              </a:rPr>
+              <a:t>(begin_year </a:t>
+            </a:r>
+            <a:r>
+              <a:rPr>
+                <a:solidFill>
+                  <a:srgbClr val="5E5E5E"/>
+                </a:solidFill>
+                <a:latin typeface="Courier"/>
+              </a:rPr>
+              <a:t>&lt;=</a:t>
+            </a:r>
+            <a:r>
+              <a:rPr>
+                <a:solidFill>
+                  <a:srgbClr val="003B4F"/>
+                </a:solidFill>
+                <a:latin typeface="Courier"/>
+              </a:rPr>
+              <a:t> </a:t>
+            </a:r>
+            <a:r>
+              <a:rPr>
+                <a:solidFill>
+                  <a:srgbClr val="AD0000"/>
+                </a:solidFill>
+                <a:latin typeface="Courier"/>
+              </a:rPr>
+              <a:t>1970</a:t>
+            </a:r>
+            <a:r>
+              <a:rPr>
+                <a:solidFill>
+                  <a:srgbClr val="003B4F"/>
+                </a:solidFill>
+                <a:latin typeface="Courier"/>
+              </a:rPr>
+              <a:t>, end_year </a:t>
+            </a:r>
+            <a:r>
+              <a:rPr>
+                <a:solidFill>
+                  <a:srgbClr val="5E5E5E"/>
+                </a:solidFill>
+                <a:latin typeface="Courier"/>
+              </a:rPr>
+              <a:t>&gt;=</a:t>
+            </a:r>
+            <a:r>
+              <a:rPr>
+                <a:solidFill>
+                  <a:srgbClr val="003B4F"/>
+                </a:solidFill>
+                <a:latin typeface="Courier"/>
+              </a:rPr>
+              <a:t> </a:t>
+            </a:r>
+            <a:r>
+              <a:rPr>
+                <a:solidFill>
+                  <a:srgbClr val="AD0000"/>
+                </a:solidFill>
+                <a:latin typeface="Courier"/>
+              </a:rPr>
+              <a:t>2025</a:t>
+            </a:r>
+            <a:r>
+              <a:rPr>
+                <a:solidFill>
+                  <a:srgbClr val="003B4F"/>
+                </a:solidFill>
+                <a:latin typeface="Courier"/>
+              </a:rPr>
+              <a:t>) </a:t>
+            </a:r>
+            <a:r>
+              <a:rPr>
+                <a:solidFill>
+                  <a:srgbClr val="5E5E5E"/>
+                </a:solidFill>
+                <a:latin typeface="Courier"/>
+              </a:rPr>
+              <a:t>%&gt;%</a:t>
+            </a:r>
+            <a:br/>
+            <a:r>
+              <a:rPr>
+                <a:solidFill>
+                  <a:srgbClr val="003B4F"/>
+                </a:solidFill>
+                <a:latin typeface="Courier"/>
+              </a:rPr>
+              <a:t>  </a:t>
+            </a:r>
+            <a:r>
+              <a:rPr>
+                <a:solidFill>
+                  <a:srgbClr val="4758AB"/>
+                </a:solidFill>
+                <a:latin typeface="Courier"/>
+              </a:rPr>
+              <a:t>select</a:t>
+            </a:r>
+            <a:r>
+              <a:rPr>
+                <a:solidFill>
+                  <a:srgbClr val="003B4F"/>
+                </a:solidFill>
+                <a:latin typeface="Courier"/>
+              </a:rPr>
+              <a:t>(stnid, name, begin_year, end_year)</a:t>
+            </a:r>
+            <a:br/>
+            <a:br/>
+            <a:r>
+              <a:rPr>
+                <a:solidFill>
+                  <a:srgbClr val="4758AB"/>
+                </a:solidFill>
+                <a:latin typeface="Courier"/>
+              </a:rPr>
+              <a:t>head</a:t>
+            </a:r>
+            <a:r>
+              <a:rPr>
+                <a:solidFill>
+                  <a:srgbClr val="003B4F"/>
+                </a:solidFill>
+                <a:latin typeface="Courier"/>
+              </a:rPr>
+              <a:t>(stations_df, </a:t>
+            </a:r>
+            <a:r>
+              <a:rPr>
+                <a:solidFill>
+                  <a:srgbClr val="AD0000"/>
+                </a:solidFill>
+                <a:latin typeface="Courier"/>
+              </a:rPr>
+              <a:t>3</a:t>
+            </a:r>
+            <a:r>
+              <a:rPr>
+                <a:solidFill>
+                  <a:srgbClr val="003B4F"/>
+                </a:solidFill>
+                <a:latin typeface="Courier"/>
+              </a:rPr>
+              <a:t>)</a:t>
             </a:r>
           </a:p>
           <a:p>
@@ -10078,7 +10263,12 @@
               <a:rPr>
                 <a:latin typeface="Courier"/>
               </a:rPr>
-              <a:t>[1] 16071     8</a:t>
+              <a:t>Key: &lt;stnid&gt;
+          stnid                       name begin_year end_year
+         &lt;char&gt;                     &lt;char&gt;      &lt;int&gt;    &lt;int&gt;
+1: 040050-99999                 BOLUNGAVIK       1952     2025
+2: 040180-16201 KEFLAVIK NAVAL AIR STATION       1942     2025
+3: 040340-99999                STAFHOLTSEY       1949     2025</a:t>
             </a:r>
           </a:p>
         </p:txBody>
@@ -10100,47 +10290,48 @@
           <a:p>
             <a:pPr lvl="0"/>
             <a:r>
+              <a:rPr>
+                <a:latin typeface="Courier"/>
+              </a:rPr>
+              <a:t>GSODR</a:t>
+            </a:r>
+            <a:r>
+              <a:rPr/>
+              <a:t> ships a table of </a:t>
+            </a:r>
+            <a:r>
               <a:rPr b="1"/>
-              <a:t>Why switch packages?</a:t>
+              <a:t>every station on Earth</a:t>
+            </a:r>
+            <a:r>
+              <a:rPr/>
+              <a:t> with the years each covers</a:t>
+            </a:r>
+          </a:p>
+          <a:p>
+            <a:pPr lvl="0"/>
+            <a:r>
+              <a:rPr/>
+              <a:t>Put your country in the filter, </a:t>
+            </a:r>
+            <a:r>
+              <a:rPr b="1"/>
+              <a:t>in CAPITALS</a:t>
             </a:r>
           </a:p>
           <a:p>
             <a:pPr lvl="1"/>
             <a:r>
-              <a:rPr>
-                <a:latin typeface="Courier"/>
-              </a:rPr>
-              <a:t>GSODR</a:t>
-            </a:r>
-            <a:r>
-              <a:rPr/>
-              <a:t> needs a </a:t>
+              <a:rPr/>
+              <a:t>Australia </a:t>
             </a:r>
             <a:r>
               <a:rPr b="1"/>
-              <a:t>station ID</a:t>
-            </a:r>
-          </a:p>
-          <a:p>
-            <a:pPr lvl="1"/>
-            <a:r>
-              <a:rPr/>
-              <a:t>most stations outside the US have </a:t>
-            </a:r>
-            <a:r>
-              <a:rPr b="1"/>
-              <a:t>missing years</a:t>
-            </a:r>
-          </a:p>
-          <a:p>
-            <a:pPr lvl="1"/>
-            <a:r>
-              <a:rPr/>
-              <a:t>Melbourne’s nearest long station is missing </a:t>
-            </a:r>
-            <a:r>
-              <a:rPr b="1"/>
-              <a:t>48 of 59</a:t>
+              <a:t>151</a:t>
+            </a:r>
+            <a:r>
+              <a:rPr/>
+              <a:t> long-record stations, India 138, Brazil 49, Kenya 19</a:t>
             </a:r>
           </a:p>
           <a:p>
@@ -10149,46 +10340,65 @@
               <a:rPr b="1">
                 <a:latin typeface="Courier"/>
               </a:rPr>
-              <a:t>nasapower</a:t>
-            </a:r>
-            <a:r>
-              <a:rPr b="1"/>
-              <a:t> needs only coordinates</a:t>
-            </a:r>
-          </a:p>
-          <a:p>
-            <a:pPr lvl="1"/>
-            <a:r>
-              <a:rPr/>
-              <a:t>anywhere on Earth, </a:t>
-            </a:r>
-            <a:r>
-              <a:rPr b="1"/>
-              <a:t>1981 to now, no gaps</a:t>
-            </a:r>
-          </a:p>
-          <a:p>
-            <a:pPr lvl="1"/>
-            <a:r>
-              <a:rPr/>
-              <a:t>watch the order: </a:t>
-            </a:r>
-            <a:r>
-              <a:rPr b="1"/>
-              <a:t>longitude first</a:t>
-            </a:r>
-          </a:p>
-          <a:p>
-            <a:pPr lvl="0"/>
-            <a:r>
-              <a:rPr>
-                <a:latin typeface="Courier"/>
-              </a:rPr>
-              <a:t>rename()</a:t>
-            </a:r>
-            <a:r>
-              <a:rPr/>
-              <a:t> makes the columns match Duluth’s</a:t>
+              <a:t>stnid</a:t>
+            </a:r>
+            <a:r>
+              <a:rPr/>
+              <a:t> goes into </a:t>
+            </a:r>
+            <a:r>
+              <a:rPr>
+                <a:latin typeface="Courier"/>
+              </a:rPr>
+              <a:t>get_GSOD()</a:t>
+            </a:r>
+            <a:r>
+              <a:rPr/>
+              <a:t>; </a:t>
+            </a:r>
+            <a:r>
+              <a:rPr>
+                <a:latin typeface="Courier"/>
+              </a:rPr>
+              <a:t>begin_year</a:t>
+            </a:r>
+            <a:r>
+              <a:rPr/>
+              <a:t> tells you where to start</a:t>
+            </a:r>
+          </a:p>
+          <a:p>
+            <a:pPr lvl="0" indent="0" marL="1270000">
+              <a:buNone/>
+            </a:pPr>
+            <a:r>
+              <a:rPr sz="2000" b="1"/>
+              <a:t>Note</a:t>
+            </a:r>
+          </a:p>
+          <a:p>
+            <a:pPr lvl="0" indent="0" marL="1270000">
+              <a:buNone/>
+            </a:pPr>
+            <a:r>
+              <a:rPr sz="2000"/>
+              <a:t>This is the route with the </a:t>
+            </a:r>
+            <a:r>
+              <a:rPr sz="2000" b="1"/>
+              <a:t>longest records</a:t>
+            </a:r>
+            <a:r>
+              <a:rPr sz="2000"/>
+              <a:t> — some reach back to the </a:t>
+            </a:r>
+            <a:r>
+              <a:rPr sz="2000" b="1"/>
+              <a:t>1930s</a:t>
+            </a:r>
+            <a:r>
+              <a:rPr sz="2000"/>
+              <a:t>. The cost is gaps, like Duluth’s.</a:t>
             </a:r>
           </a:p>
         </p:txBody>
@@ -10243,7 +10453,7 @@
             </a:pPr>
             <a:r>
               <a:rPr/>
-              <a:t>Swap Two Numbers, Get a New City</a:t>
+              <a:t>Now Do It for Your City</a:t>
             </a:r>
           </a:p>
         </p:txBody>
@@ -10273,7 +10483,7 @@
                 </a:solidFill>
                 <a:latin typeface="Courier"/>
               </a:rPr>
-              <a:t># The ONLY numbers that change ------------------</a:t>
+              <a:t># Your city, from the SAME package -------------</a:t>
             </a:r>
             <a:br/>
             <a:r>
@@ -10283,7 +10493,7 @@
                 </a:solidFill>
                 <a:latin typeface="Courier"/>
               </a:rPr>
-              <a:t>lonlat = </a:t>
+              <a:t>city_df &lt;- </a:t>
             </a:r>
             <a:r>
               <a:rPr>
@@ -10292,7 +10502,7 @@
                 </a:solidFill>
                 <a:latin typeface="Courier"/>
               </a:rPr>
-              <a:t>c</a:t>
+              <a:t>get_GSOD</a:t>
             </a:r>
             <a:r>
               <a:rPr>
@@ -10306,11 +10516,38 @@
             <a:r>
               <a:rPr>
                 <a:solidFill>
+                  <a:srgbClr val="657422"/>
+                </a:solidFill>
+                <a:latin typeface="Courier"/>
+              </a:rPr>
+              <a:t>years =</a:t>
+            </a:r>
+            <a:r>
+              <a:rPr>
+                <a:solidFill>
+                  <a:srgbClr val="003B4F"/>
+                </a:solidFill>
+                <a:latin typeface="Courier"/>
+              </a:rPr>
+              <a:t> </a:t>
+            </a:r>
+            <a:r>
+              <a:rPr>
+                <a:solidFill>
+                  <a:srgbClr val="AD0000"/>
+                </a:solidFill>
+                <a:latin typeface="Courier"/>
+              </a:rPr>
+              <a:t>1966</a:t>
+            </a:r>
+            <a:r>
+              <a:rPr>
+                <a:solidFill>
                   <a:srgbClr val="5E5E5E"/>
                 </a:solidFill>
                 <a:latin typeface="Courier"/>
               </a:rPr>
-              <a:t>-</a:t>
+              <a:t>:</a:t>
             </a:r>
             <a:r>
               <a:rPr>
@@ -10319,285 +10556,119 @@
                 </a:solidFill>
                 <a:latin typeface="Courier"/>
               </a:rPr>
-              <a:t>0.13</a:t>
-            </a:r>
-            <a:r>
-              <a:rPr>
-                <a:solidFill>
-                  <a:srgbClr val="003B4F"/>
-                </a:solidFill>
-                <a:latin typeface="Courier"/>
-              </a:rPr>
-              <a:t>, </a:t>
-            </a:r>
-            <a:r>
-              <a:rPr>
-                <a:solidFill>
-                  <a:srgbClr val="AD0000"/>
-                </a:solidFill>
-                <a:latin typeface="Courier"/>
-              </a:rPr>
-              <a:t>51.51</a:t>
-            </a:r>
-            <a:r>
-              <a:rPr>
-                <a:solidFill>
-                  <a:srgbClr val="003B4F"/>
-                </a:solidFill>
-                <a:latin typeface="Courier"/>
-              </a:rPr>
-              <a:t>)</a:t>
+              <a:t>2025</a:t>
+            </a:r>
+            <a:r>
+              <a:rPr>
+                <a:solidFill>
+                  <a:srgbClr val="003B4F"/>
+                </a:solidFill>
+                <a:latin typeface="Courier"/>
+              </a:rPr>
+              <a:t>,</a:t>
+            </a:r>
+            <a:br/>
+            <a:r>
+              <a:rPr>
+                <a:solidFill>
+                  <a:srgbClr val="003B4F"/>
+                </a:solidFill>
+                <a:latin typeface="Courier"/>
+              </a:rPr>
+              <a:t>                    </a:t>
+            </a:r>
+            <a:r>
+              <a:rPr>
+                <a:solidFill>
+                  <a:srgbClr val="657422"/>
+                </a:solidFill>
+                <a:latin typeface="Courier"/>
+              </a:rPr>
+              <a:t>station =</a:t>
+            </a:r>
+            <a:r>
+              <a:rPr>
+                <a:solidFill>
+                  <a:srgbClr val="003B4F"/>
+                </a:solidFill>
+                <a:latin typeface="Courier"/>
+              </a:rPr>
+              <a:t> </a:t>
+            </a:r>
+            <a:r>
+              <a:rPr>
+                <a:solidFill>
+                  <a:srgbClr val="20794D"/>
+                </a:solidFill>
+                <a:latin typeface="Courier"/>
+              </a:rPr>
+              <a:t>"959360-99999"</a:t>
+            </a:r>
+            <a:r>
+              <a:rPr>
+                <a:solidFill>
+                  <a:srgbClr val="003B4F"/>
+                </a:solidFill>
+                <a:latin typeface="Courier"/>
+              </a:rPr>
+              <a:t>) </a:t>
+            </a:r>
+            <a:r>
+              <a:rPr>
+                <a:solidFill>
+                  <a:srgbClr val="5E5E5E"/>
+                </a:solidFill>
+                <a:latin typeface="Courier"/>
+              </a:rPr>
+              <a:t>%&gt;%</a:t>
+            </a:r>
+            <a:br/>
+            <a:r>
+              <a:rPr>
+                <a:solidFill>
+                  <a:srgbClr val="003B4F"/>
+                </a:solidFill>
+                <a:latin typeface="Courier"/>
+              </a:rPr>
+              <a:t>  </a:t>
+            </a:r>
+            <a:r>
+              <a:rPr>
+                <a:solidFill>
+                  <a:srgbClr val="4758AB"/>
+                </a:solidFill>
+                <a:latin typeface="Courier"/>
+              </a:rPr>
+              <a:t>clean_names</a:t>
+            </a:r>
+            <a:r>
+              <a:rPr>
+                <a:solidFill>
+                  <a:srgbClr val="003B4F"/>
+                </a:solidFill>
+                <a:latin typeface="Courier"/>
+              </a:rPr>
+              <a:t>()</a:t>
             </a:r>
             <a:br/>
             <a:br/>
             <a:r>
               <a:rPr>
                 <a:solidFill>
-                  <a:srgbClr val="5E5E5E"/>
-                </a:solidFill>
-                <a:latin typeface="Courier"/>
-              </a:rPr>
-              <a:t># Everything below is identical -----------------</a:t>
-            </a:r>
-            <a:br/>
-            <a:r>
-              <a:rPr>
-                <a:solidFill>
-                  <a:srgbClr val="003B4F"/>
-                </a:solidFill>
-                <a:latin typeface="Courier"/>
-              </a:rPr>
-              <a:t>city_year_df &lt;- city_df </a:t>
-            </a:r>
-            <a:r>
-              <a:rPr>
-                <a:solidFill>
-                  <a:srgbClr val="5E5E5E"/>
-                </a:solidFill>
-                <a:latin typeface="Courier"/>
-              </a:rPr>
-              <a:t>%&gt;%</a:t>
-            </a:r>
-            <a:br/>
-            <a:r>
-              <a:rPr>
-                <a:solidFill>
-                  <a:srgbClr val="003B4F"/>
-                </a:solidFill>
-                <a:latin typeface="Courier"/>
-              </a:rPr>
-              <a:t>  </a:t>
-            </a:r>
-            <a:r>
-              <a:rPr>
-                <a:solidFill>
                   <a:srgbClr val="4758AB"/>
                 </a:solidFill>
                 <a:latin typeface="Courier"/>
               </a:rPr>
-              <a:t>group_by</a:t>
-            </a:r>
-            <a:r>
-              <a:rPr>
-                <a:solidFill>
-                  <a:srgbClr val="003B4F"/>
-                </a:solidFill>
-                <a:latin typeface="Courier"/>
-              </a:rPr>
-              <a:t>(year) </a:t>
-            </a:r>
-            <a:r>
-              <a:rPr>
-                <a:solidFill>
-                  <a:srgbClr val="5E5E5E"/>
-                </a:solidFill>
-                <a:latin typeface="Courier"/>
-              </a:rPr>
-              <a:t>%&gt;%</a:t>
-            </a:r>
-            <a:br/>
-            <a:r>
-              <a:rPr>
-                <a:solidFill>
-                  <a:srgbClr val="003B4F"/>
-                </a:solidFill>
-                <a:latin typeface="Courier"/>
-              </a:rPr>
-              <a:t>  </a:t>
-            </a:r>
-            <a:r>
-              <a:rPr>
-                <a:solidFill>
-                  <a:srgbClr val="4758AB"/>
-                </a:solidFill>
-                <a:latin typeface="Courier"/>
-              </a:rPr>
-              <a:t>summarize</a:t>
-            </a:r>
-            <a:r>
-              <a:rPr>
-                <a:solidFill>
-                  <a:srgbClr val="003B4F"/>
-                </a:solidFill>
-                <a:latin typeface="Courier"/>
-              </a:rPr>
-              <a:t>(</a:t>
-            </a:r>
-            <a:r>
-              <a:rPr>
-                <a:solidFill>
-                  <a:srgbClr val="657422"/>
-                </a:solidFill>
-                <a:latin typeface="Courier"/>
-              </a:rPr>
-              <a:t>temp =</a:t>
-            </a:r>
-            <a:r>
-              <a:rPr>
-                <a:solidFill>
-                  <a:srgbClr val="003B4F"/>
-                </a:solidFill>
-                <a:latin typeface="Courier"/>
-              </a:rPr>
-              <a:t> </a:t>
-            </a:r>
-            <a:r>
-              <a:rPr>
-                <a:solidFill>
-                  <a:srgbClr val="4758AB"/>
-                </a:solidFill>
-                <a:latin typeface="Courier"/>
-              </a:rPr>
-              <a:t>mean</a:t>
-            </a:r>
-            <a:r>
-              <a:rPr>
-                <a:solidFill>
-                  <a:srgbClr val="003B4F"/>
-                </a:solidFill>
-                <a:latin typeface="Courier"/>
-              </a:rPr>
-              <a:t>(temp, </a:t>
-            </a:r>
-            <a:r>
-              <a:rPr>
-                <a:solidFill>
-                  <a:srgbClr val="657422"/>
-                </a:solidFill>
-                <a:latin typeface="Courier"/>
-              </a:rPr>
-              <a:t>na.rm =</a:t>
-            </a:r>
-            <a:r>
-              <a:rPr>
-                <a:solidFill>
-                  <a:srgbClr val="003B4F"/>
-                </a:solidFill>
-                <a:latin typeface="Courier"/>
-              </a:rPr>
-              <a:t> </a:t>
-            </a:r>
-            <a:r>
-              <a:rPr>
-                <a:solidFill>
-                  <a:srgbClr val="8F5902"/>
-                </a:solidFill>
-                <a:latin typeface="Courier"/>
-              </a:rPr>
-              <a:t>TRUE</a:t>
-            </a:r>
-            <a:r>
-              <a:rPr>
-                <a:solidFill>
-                  <a:srgbClr val="003B4F"/>
-                </a:solidFill>
-                <a:latin typeface="Courier"/>
-              </a:rPr>
-              <a:t>))</a:t>
-            </a:r>
-            <a:br/>
-            <a:br/>
-            <a:r>
-              <a:rPr>
-                <a:solidFill>
-                  <a:srgbClr val="003B4F"/>
-                </a:solidFill>
-                <a:latin typeface="Courier"/>
-              </a:rPr>
-              <a:t>city_model &lt;- </a:t>
-            </a:r>
-            <a:r>
-              <a:rPr>
-                <a:solidFill>
-                  <a:srgbClr val="4758AB"/>
-                </a:solidFill>
-                <a:latin typeface="Courier"/>
-              </a:rPr>
-              <a:t>lm</a:t>
-            </a:r>
-            <a:r>
-              <a:rPr>
-                <a:solidFill>
-                  <a:srgbClr val="003B4F"/>
-                </a:solidFill>
-                <a:latin typeface="Courier"/>
-              </a:rPr>
-              <a:t>(temp </a:t>
-            </a:r>
-            <a:r>
-              <a:rPr>
-                <a:solidFill>
-                  <a:srgbClr val="5E5E5E"/>
-                </a:solidFill>
-                <a:latin typeface="Courier"/>
-              </a:rPr>
-              <a:t>~</a:t>
-            </a:r>
-            <a:r>
-              <a:rPr>
-                <a:solidFill>
-                  <a:srgbClr val="003B4F"/>
-                </a:solidFill>
-                <a:latin typeface="Courier"/>
-              </a:rPr>
-              <a:t> year, </a:t>
-            </a:r>
-            <a:r>
-              <a:rPr>
-                <a:solidFill>
-                  <a:srgbClr val="657422"/>
-                </a:solidFill>
-                <a:latin typeface="Courier"/>
-              </a:rPr>
-              <a:t>data =</a:t>
-            </a:r>
-            <a:r>
-              <a:rPr>
-                <a:solidFill>
-                  <a:srgbClr val="003B4F"/>
-                </a:solidFill>
-                <a:latin typeface="Courier"/>
-              </a:rPr>
-              <a:t> city_year_df)</a:t>
-            </a:r>
-            <a:br/>
-            <a:r>
-              <a:rPr>
-                <a:solidFill>
-                  <a:srgbClr val="4758AB"/>
-                </a:solidFill>
-                <a:latin typeface="Courier"/>
-              </a:rPr>
-              <a:t>summary</a:t>
-            </a:r>
-            <a:r>
-              <a:rPr>
-                <a:solidFill>
-                  <a:srgbClr val="003B4F"/>
-                </a:solidFill>
-                <a:latin typeface="Courier"/>
-              </a:rPr>
-              <a:t>(city_model)</a:t>
+              <a:t>dim</a:t>
+            </a:r>
+            <a:r>
+              <a:rPr>
+                <a:solidFill>
+                  <a:srgbClr val="003B4F"/>
+                </a:solidFill>
+                <a:latin typeface="Courier"/>
+              </a:rPr>
+              <a:t>(city_df)</a:t>
             </a:r>
           </a:p>
         </p:txBody>
@@ -10620,120 +10691,130 @@
             <a:pPr lvl="0"/>
             <a:r>
               <a:rPr/>
-              <a:t>That is the whole point of today</a:t>
+              <a:t>Take two things out of </a:t>
+            </a:r>
+            <a:r>
+              <a:rPr>
+                <a:latin typeface="Courier"/>
+              </a:rPr>
+              <a:t>stations_df</a:t>
             </a:r>
           </a:p>
           <a:p>
             <a:pPr lvl="1"/>
             <a:r>
+              <a:rPr/>
+              <a:t>the </a:t>
+            </a:r>
+            <a:r>
+              <a:rPr b="1">
+                <a:latin typeface="Courier"/>
+              </a:rPr>
+              <a:t>stnid</a:t>
+            </a:r>
+            <a:r>
+              <a:rPr/>
+              <a:t> — that is the station</a:t>
+            </a:r>
+          </a:p>
+          <a:p>
+            <a:pPr lvl="1"/>
+            <a:r>
+              <a:rPr/>
+              <a:t>the </a:t>
+            </a:r>
+            <a:r>
+              <a:rPr b="1">
+                <a:latin typeface="Courier"/>
+              </a:rPr>
+              <a:t>begin_year</a:t>
+            </a:r>
+            <a:r>
+              <a:rPr/>
+              <a:t> — where the range starts</a:t>
+            </a:r>
+          </a:p>
+          <a:p>
+            <a:pPr lvl="0"/>
+            <a:r>
+              <a:rPr/>
+              <a:t>Same package, same call as Duluth</a:t>
+            </a:r>
+          </a:p>
+          <a:p>
+            <a:pPr lvl="1"/>
+            <a:r>
+              <a:rPr/>
+              <a:t>back come the </a:t>
+            </a:r>
+            <a:r>
               <a:rPr b="1"/>
-              <a:t>two numbers</a:t>
-            </a:r>
-            <a:r>
-              <a:rPr/>
-              <a:t> name the place</a:t>
+              <a:t>same columns</a:t>
             </a:r>
           </a:p>
           <a:p>
             <a:pPr lvl="1"/>
             <a:r>
-              <a:rPr/>
-              <a:t>the rest of the analysis never changes</a:t>
+              <a:rPr>
+                <a:latin typeface="Courier"/>
+              </a:rPr>
+              <a:t>year</a:t>
+            </a:r>
+            <a:r>
+              <a:rPr/>
+              <a:t>, </a:t>
+            </a:r>
+            <a:r>
+              <a:rPr>
+                <a:latin typeface="Courier"/>
+              </a:rPr>
+              <a:t>month</a:t>
+            </a:r>
+            <a:r>
+              <a:rPr/>
+              <a:t>, </a:t>
+            </a:r>
+            <a:r>
+              <a:rPr>
+                <a:latin typeface="Courier"/>
+              </a:rPr>
+              <a:t>temp</a:t>
+            </a:r>
+            <a:r>
+              <a:rPr/>
+              <a:t>, already lower case</a:t>
+            </a:r>
+          </a:p>
+          <a:p>
+            <a:pPr lvl="1"/>
+            <a:r>
+              <a:rPr b="1"/>
+              <a:t>nothing to rename</a:t>
             </a:r>
           </a:p>
           <a:p>
             <a:pPr lvl="0"/>
             <a:r>
               <a:rPr/>
-              <a:t>Look up lat/long in any search engine</a:t>
+              <a:t>Stations outside the US are </a:t>
+            </a:r>
+            <a:r>
+              <a:rPr b="1"/>
+              <a:t>gappier</a:t>
             </a:r>
           </a:p>
           <a:p>
             <a:pPr lvl="1"/>
             <a:r>
-              <a:rPr b="1"/>
-              <a:t>south</a:t>
-            </a:r>
-            <a:r>
-              <a:rPr/>
-              <a:t> of the equator → negative latitude</a:t>
+              <a:rPr/>
+              <a:t>far fewer years than you asked for? pick another</a:t>
             </a:r>
           </a:p>
           <a:p>
             <a:pPr lvl="1"/>
             <a:r>
-              <a:rPr b="1"/>
-              <a:t>west</a:t>
-            </a:r>
-            <a:r>
-              <a:rPr/>
-              <a:t> of Greenwich → negative longitude</a:t>
-            </a:r>
-          </a:p>
-          <a:p>
-            <a:pPr lvl="0" indent="0" marL="1270000">
-              <a:buNone/>
-            </a:pPr>
-            <a:r>
-              <a:rPr sz="2000" b="1"/>
-              <a:t>Important</a:t>
-            </a:r>
-          </a:p>
-          <a:p>
-            <a:pPr lvl="0" indent="0" marL="1270000">
-              <a:buNone/>
-            </a:pPr>
-            <a:r>
-              <a:rPr sz="2000" b="1"/>
-              <a:t>Southern hemisphere?</a:t>
-            </a:r>
-            <a:r>
-              <a:rPr sz="2000"/>
-              <a:t> Swap the season labels in </a:t>
-            </a:r>
-            <a:r>
-              <a:rPr sz="2000">
-                <a:latin typeface="Courier"/>
-              </a:rPr>
-              <a:t>case_when()</a:t>
-            </a:r>
-            <a:r>
-              <a:rPr sz="2000"/>
-              <a:t>:</a:t>
-            </a:r>
-          </a:p>
-          <a:p>
-            <a:pPr lvl="0"/>
-            <a:r>
-              <a:rPr sz="2000">
-                <a:latin typeface="Courier"/>
-              </a:rPr>
-              <a:t>month %in% c(12, 1, 2)</a:t>
-            </a:r>
-            <a:r>
-              <a:rPr sz="2000"/>
-              <a:t> → </a:t>
-            </a:r>
-            <a:r>
-              <a:rPr sz="2000" b="1"/>
-              <a:t>summer</a:t>
-            </a:r>
-          </a:p>
-          <a:p>
-            <a:pPr lvl="0"/>
-            <a:r>
-              <a:rPr sz="2000">
-                <a:latin typeface="Courier"/>
-              </a:rPr>
-              <a:t>month %in% c(6, 7, 8)</a:t>
-            </a:r>
-            <a:r>
-              <a:rPr sz="2000"/>
-              <a:t> → </a:t>
-            </a:r>
-            <a:r>
-              <a:rPr sz="2000" b="1"/>
-              <a:t>winter</a:t>
+              <a:rPr/>
+              <a:t>a capital or major airport is safest</a:t>
             </a:r>
           </a:p>
         </p:txBody>
@@ -10788,7 +10869,7 @@
             </a:pPr>
             <a:r>
               <a:rPr/>
-              <a:t>Are the Two Slopes Different?</a:t>
+              <a:t>Swap the Station, Get a New City</a:t>
             </a:r>
           </a:p>
         </p:txBody>
@@ -10818,7 +10899,7 @@
                 </a:solidFill>
                 <a:latin typeface="Courier"/>
               </a:rPr>
-              <a:t># Stack the two yearly summaries ----------------</a:t>
+              <a:t># The ONLY thing that changes ------------------</a:t>
             </a:r>
             <a:br/>
             <a:r>
@@ -10828,35 +10909,16 @@
                 </a:solidFill>
                 <a:latin typeface="Courier"/>
               </a:rPr>
-              <a:t>both_df &lt;- </a:t>
-            </a:r>
-            <a:r>
-              <a:rPr>
-                <a:solidFill>
-                  <a:srgbClr val="4758AB"/>
-                </a:solidFill>
-                <a:latin typeface="Courier"/>
-              </a:rPr>
-              <a:t>bind_rows</a:t>
-            </a:r>
-            <a:r>
-              <a:rPr>
-                <a:solidFill>
-                  <a:srgbClr val="003B4F"/>
-                </a:solidFill>
-                <a:latin typeface="Courier"/>
-              </a:rPr>
-              <a:t>(duluth_year_df,</a:t>
-            </a:r>
-            <a:br/>
-            <a:r>
-              <a:rPr>
-                <a:solidFill>
-                  <a:srgbClr val="003B4F"/>
-                </a:solidFill>
-                <a:latin typeface="Courier"/>
-              </a:rPr>
-              <a:t>                     city_labeled_df)</a:t>
+              <a:t>station = </a:t>
+            </a:r>
+            <a:r>
+              <a:rPr>
+                <a:solidFill>
+                  <a:srgbClr val="20794D"/>
+                </a:solidFill>
+                <a:latin typeface="Courier"/>
+              </a:rPr>
+              <a:t>"959360-99999"</a:t>
             </a:r>
             <a:br/>
             <a:br/>
@@ -10867,7 +10929,7 @@
                 </a:solidFill>
                 <a:latin typeface="Courier"/>
               </a:rPr>
-              <a:t># One slope per station -------------------------</a:t>
+              <a:t># Everything below is identical ----------------</a:t>
             </a:r>
             <a:br/>
             <a:r>
@@ -10877,7 +10939,26 @@
                 </a:solidFill>
                 <a:latin typeface="Courier"/>
               </a:rPr>
-              <a:t>slope_model &lt;- </a:t>
+              <a:t>city_year_df &lt;- city_df </a:t>
+            </a:r>
+            <a:r>
+              <a:rPr>
+                <a:solidFill>
+                  <a:srgbClr val="5E5E5E"/>
+                </a:solidFill>
+                <a:latin typeface="Courier"/>
+              </a:rPr>
+              <a:t>%&gt;%</a:t>
+            </a:r>
+            <a:br/>
+            <a:r>
+              <a:rPr>
+                <a:solidFill>
+                  <a:srgbClr val="003B4F"/>
+                </a:solidFill>
+                <a:latin typeface="Courier"/>
+              </a:rPr>
+              <a:t>  </a:t>
             </a:r>
             <a:r>
               <a:rPr>
@@ -10886,6 +10967,144 @@
                 </a:solidFill>
                 <a:latin typeface="Courier"/>
               </a:rPr>
+              <a:t>group_by</a:t>
+            </a:r>
+            <a:r>
+              <a:rPr>
+                <a:solidFill>
+                  <a:srgbClr val="003B4F"/>
+                </a:solidFill>
+                <a:latin typeface="Courier"/>
+              </a:rPr>
+              <a:t>(year) </a:t>
+            </a:r>
+            <a:r>
+              <a:rPr>
+                <a:solidFill>
+                  <a:srgbClr val="5E5E5E"/>
+                </a:solidFill>
+                <a:latin typeface="Courier"/>
+              </a:rPr>
+              <a:t>%&gt;%</a:t>
+            </a:r>
+            <a:br/>
+            <a:r>
+              <a:rPr>
+                <a:solidFill>
+                  <a:srgbClr val="003B4F"/>
+                </a:solidFill>
+                <a:latin typeface="Courier"/>
+              </a:rPr>
+              <a:t>  </a:t>
+            </a:r>
+            <a:r>
+              <a:rPr>
+                <a:solidFill>
+                  <a:srgbClr val="4758AB"/>
+                </a:solidFill>
+                <a:latin typeface="Courier"/>
+              </a:rPr>
+              <a:t>summarize</a:t>
+            </a:r>
+            <a:r>
+              <a:rPr>
+                <a:solidFill>
+                  <a:srgbClr val="003B4F"/>
+                </a:solidFill>
+                <a:latin typeface="Courier"/>
+              </a:rPr>
+              <a:t>(</a:t>
+            </a:r>
+            <a:r>
+              <a:rPr>
+                <a:solidFill>
+                  <a:srgbClr val="657422"/>
+                </a:solidFill>
+                <a:latin typeface="Courier"/>
+              </a:rPr>
+              <a:t>temp =</a:t>
+            </a:r>
+            <a:r>
+              <a:rPr>
+                <a:solidFill>
+                  <a:srgbClr val="003B4F"/>
+                </a:solidFill>
+                <a:latin typeface="Courier"/>
+              </a:rPr>
+              <a:t> </a:t>
+            </a:r>
+            <a:r>
+              <a:rPr>
+                <a:solidFill>
+                  <a:srgbClr val="4758AB"/>
+                </a:solidFill>
+                <a:latin typeface="Courier"/>
+              </a:rPr>
+              <a:t>mean</a:t>
+            </a:r>
+            <a:r>
+              <a:rPr>
+                <a:solidFill>
+                  <a:srgbClr val="003B4F"/>
+                </a:solidFill>
+                <a:latin typeface="Courier"/>
+              </a:rPr>
+              <a:t>(temp, </a:t>
+            </a:r>
+            <a:r>
+              <a:rPr>
+                <a:solidFill>
+                  <a:srgbClr val="657422"/>
+                </a:solidFill>
+                <a:latin typeface="Courier"/>
+              </a:rPr>
+              <a:t>na.rm =</a:t>
+            </a:r>
+            <a:r>
+              <a:rPr>
+                <a:solidFill>
+                  <a:srgbClr val="003B4F"/>
+                </a:solidFill>
+                <a:latin typeface="Courier"/>
+              </a:rPr>
+              <a:t> </a:t>
+            </a:r>
+            <a:r>
+              <a:rPr>
+                <a:solidFill>
+                  <a:srgbClr val="8F5902"/>
+                </a:solidFill>
+                <a:latin typeface="Courier"/>
+              </a:rPr>
+              <a:t>TRUE</a:t>
+            </a:r>
+            <a:r>
+              <a:rPr>
+                <a:solidFill>
+                  <a:srgbClr val="003B4F"/>
+                </a:solidFill>
+                <a:latin typeface="Courier"/>
+              </a:rPr>
+              <a:t>))</a:t>
+            </a:r>
+            <a:br/>
+            <a:br/>
+            <a:r>
+              <a:rPr>
+                <a:solidFill>
+                  <a:srgbClr val="003B4F"/>
+                </a:solidFill>
+                <a:latin typeface="Courier"/>
+              </a:rPr>
+              <a:t>city_model &lt;- </a:t>
+            </a:r>
+            <a:r>
+              <a:rPr>
+                <a:solidFill>
+                  <a:srgbClr val="4758AB"/>
+                </a:solidFill>
+                <a:latin typeface="Courier"/>
+              </a:rPr>
               <a:t>lm</a:t>
             </a:r>
             <a:r>
@@ -10913,58 +11132,30 @@
                 </a:solidFill>
                 <a:latin typeface="Courier"/>
               </a:rPr>
-              <a:t> year </a:t>
-            </a:r>
-            <a:r>
-              <a:rPr>
-                <a:solidFill>
-                  <a:srgbClr val="5E5E5E"/>
-                </a:solidFill>
-                <a:latin typeface="Courier"/>
-              </a:rPr>
-              <a:t>*</a:t>
-            </a:r>
-            <a:r>
-              <a:rPr>
-                <a:solidFill>
-                  <a:srgbClr val="003B4F"/>
-                </a:solidFill>
-                <a:latin typeface="Courier"/>
-              </a:rPr>
-              <a:t> station,</a:t>
+              <a:t> year, </a:t>
+            </a:r>
+            <a:r>
+              <a:rPr>
+                <a:solidFill>
+                  <a:srgbClr val="657422"/>
+                </a:solidFill>
+                <a:latin typeface="Courier"/>
+              </a:rPr>
+              <a:t>data =</a:t>
+            </a:r>
+            <a:r>
+              <a:rPr>
+                <a:solidFill>
+                  <a:srgbClr val="003B4F"/>
+                </a:solidFill>
+                <a:latin typeface="Courier"/>
+              </a:rPr>
+              <a:t> city_year_df)</a:t>
             </a:r>
             <a:br/>
             <a:r>
               <a:rPr>
                 <a:solidFill>
-                  <a:srgbClr val="003B4F"/>
-                </a:solidFill>
-                <a:latin typeface="Courier"/>
-              </a:rPr>
-              <a:t>                  </a:t>
-            </a:r>
-            <a:r>
-              <a:rPr>
-                <a:solidFill>
-                  <a:srgbClr val="657422"/>
-                </a:solidFill>
-                <a:latin typeface="Courier"/>
-              </a:rPr>
-              <a:t>data =</a:t>
-            </a:r>
-            <a:r>
-              <a:rPr>
-                <a:solidFill>
-                  <a:srgbClr val="003B4F"/>
-                </a:solidFill>
-                <a:latin typeface="Courier"/>
-              </a:rPr>
-              <a:t> both_df)</a:t>
-            </a:r>
-            <a:br/>
-            <a:r>
-              <a:rPr>
-                <a:solidFill>
                   <a:srgbClr val="4758AB"/>
                 </a:solidFill>
                 <a:latin typeface="Courier"/>
@@ -10978,20 +11169,7 @@
                 </a:solidFill>
                 <a:latin typeface="Courier"/>
               </a:rPr>
-              <a:t>(slope_model)</a:t>
-            </a:r>
-          </a:p>
-          <a:p>
-            <a:pPr lvl="0" indent="0" marL="0">
-              <a:buNone/>
-            </a:pPr>
-            <a:r>
-              <a:rPr/>
-              <a:t>Your city and Duluth gave different numbers. </a:t>
-            </a:r>
-            <a:r>
-              <a:rPr b="1"/>
-              <a:t>Different-looking slopes are not always different slopes.</a:t>
+              <a:t>(city_model)</a:t>
             </a:r>
           </a:p>
         </p:txBody>
@@ -11013,114 +11191,26 @@
           <a:p>
             <a:pPr lvl="0"/>
             <a:r>
-              <a:rPr>
-                <a:latin typeface="Courier"/>
-              </a:rPr>
-              <a:t>year * station</a:t>
-            </a:r>
-            <a:r>
-              <a:rPr/>
-              <a:t> fits a </a:t>
-            </a:r>
+              <a:rPr/>
+              <a:t>That is the whole point of today</a:t>
+            </a:r>
+          </a:p>
+          <a:p>
+            <a:pPr lvl="1"/>
             <a:r>
               <a:rPr b="1"/>
-              <a:t>separate slope</a:t>
-            </a:r>
-            <a:r>
-              <a:rPr/>
-              <a:t> for each place</a:t>
-            </a:r>
-          </a:p>
-          <a:p>
-            <a:pPr lvl="0"/>
-            <a:r>
-              <a:rPr/>
-              <a:t>Read the </a:t>
-            </a:r>
-            <a:r>
-              <a:rPr b="1">
-                <a:latin typeface="Courier"/>
-              </a:rPr>
-              <a:t>year:stationmy_city</a:t>
-            </a:r>
-            <a:r>
-              <a:rPr/>
-              <a:t> row</a:t>
+              <a:t>one station ID</a:t>
+            </a:r>
+            <a:r>
+              <a:rPr/>
+              <a:t> names the place</a:t>
             </a:r>
           </a:p>
           <a:p>
             <a:pPr lvl="1"/>
             <a:r>
-              <a:rPr>
-                <a:latin typeface="Courier"/>
-              </a:rPr>
-              <a:t>Estimate</a:t>
-            </a:r>
-            <a:r>
-              <a:rPr/>
-              <a:t> — how much your slope </a:t>
-            </a:r>
-            <a:r>
-              <a:rPr b="1"/>
-              <a:t>differs</a:t>
-            </a:r>
-          </a:p>
-          <a:p>
-            <a:pPr lvl="1"/>
-            <a:r>
-              <a:rPr>
-                <a:latin typeface="Courier"/>
-              </a:rPr>
-              <a:t>Pr(&gt;|t|)</a:t>
-            </a:r>
-            <a:r>
-              <a:rPr/>
-              <a:t> — is that difference real?</a:t>
-            </a:r>
-          </a:p>
-          <a:p>
-            <a:pPr lvl="0"/>
-            <a:r>
-              <a:rPr/>
-              <a:t>This is a </a:t>
-            </a:r>
-            <a:r>
-              <a:rPr b="1"/>
-              <a:t>t-test on two slopes</a:t>
-            </a:r>
-            <a:r>
-              <a:rPr/>
-              <a:t>, in the same two columns you have read all class</a:t>
-            </a:r>
-          </a:p>
-          <a:p>
-            <a:pPr lvl="1"/>
-            <a:r>
-              <a:rPr i="1"/>
-              <a:t>p</a:t>
-            </a:r>
-            <a:r>
-              <a:rPr/>
-              <a:t> &lt; 0.05 → rates </a:t>
-            </a:r>
-            <a:r>
-              <a:rPr b="1"/>
-              <a:t>really differ</a:t>
-            </a:r>
-          </a:p>
-          <a:p>
-            <a:pPr lvl="1"/>
-            <a:r>
-              <a:rPr i="1"/>
-              <a:t>p</a:t>
-            </a:r>
-            <a:r>
-              <a:rPr/>
-              <a:t> &gt; 0.05 → </a:t>
-            </a:r>
-            <a:r>
-              <a:rPr b="1"/>
-              <a:t>cannot tell them apart</a:t>
+              <a:rPr/>
+              <a:t>the rest of the analysis never changes</a:t>
             </a:r>
           </a:p>
           <a:p>
@@ -11137,32 +11227,56 @@
               <a:buNone/>
             </a:pPr>
             <a:r>
+              <a:rPr sz="2000" b="1"/>
+              <a:t>Southern hemisphere?</a:t>
+            </a:r>
+            <a:r>
               <a:rPr sz="2000"/>
-              <a:t>Pull Duluth from the </a:t>
+              <a:t> Swap the season labels in </a:t>
+            </a:r>
+            <a:r>
+              <a:rPr sz="2000">
+                <a:latin typeface="Courier"/>
+              </a:rPr>
+              <a:t>case_when()</a:t>
+            </a:r>
+            <a:r>
+              <a:rPr sz="2000"/>
+              <a:t>:</a:t>
+            </a:r>
+          </a:p>
+          <a:p>
+            <a:pPr lvl="0"/>
+            <a:r>
+              <a:rPr sz="2000">
+                <a:latin typeface="Courier"/>
+              </a:rPr>
+              <a:t>month %in% c(12, 1, 2)</a:t>
+            </a:r>
+            <a:r>
+              <a:rPr sz="2000"/>
+              <a:t> → </a:t>
             </a:r>
             <a:r>
               <a:rPr sz="2000" b="1"/>
-              <a:t>same source and years</a:t>
+              <a:t>summer</a:t>
+            </a:r>
+          </a:p>
+          <a:p>
+            <a:pPr lvl="0"/>
+            <a:r>
+              <a:rPr sz="2000">
+                <a:latin typeface="Courier"/>
+              </a:rPr>
+              <a:t>month %in% c(6, 7, 8)</a:t>
             </a:r>
             <a:r>
               <a:rPr sz="2000"/>
-              <a:t> as your city — or you are comparing place </a:t>
-            </a:r>
-            <a:r>
-              <a:rPr sz="2000" i="1"/>
-              <a:t>plus</a:t>
-            </a:r>
-            <a:r>
-              <a:rPr sz="2000"/>
-              <a:t> source </a:t>
-            </a:r>
-            <a:r>
-              <a:rPr sz="2000" i="1"/>
-              <a:t>plus</a:t>
-            </a:r>
-            <a:r>
-              <a:rPr sz="2000"/>
-              <a:t> years.</a:t>
+              <a:t> → </a:t>
+            </a:r>
+            <a:r>
+              <a:rPr sz="2000" b="1"/>
+              <a:t>winter</a:t>
             </a:r>
           </a:p>
         </p:txBody>
@@ -11202,8 +11316,11 @@
         <p:spPr>
           <a:xfrm>
             <a:off x="0" y="0"/>
-            <a:ext cx="9144000" cy="582780"/>
+            <a:ext cx="9144000" cy="602780"/>
           </a:xfrm>
+          <a:solidFill>
+            <a:srgbClr val="1A1A2E"/>
+          </a:solidFill>
         </p:spPr>
         <p:txBody>
           <a:bodyPr/>
@@ -11214,7 +11331,7 @@
             </a:pPr>
             <a:r>
               <a:rPr/>
-              <a:t>→ ACTIVITY 12 Parts 6–10 now</a:t>
+              <a:t>Another Source Worth Knowing — NASA POWER</a:t>
             </a:r>
           </a:p>
         </p:txBody>
@@ -11226,7 +11343,7 @@
             <a:spLocks noGrp="1"/>
           </p:cNvSpPr>
           <p:nvPr>
-            <p:ph idx="1"/>
+            <p:ph idx="1" sz="half"/>
           </p:nvPr>
         </p:nvSpPr>
         <p:spPr/>
@@ -11234,50 +11351,629 @@
           <a:bodyPr/>
           <a:lstStyle/>
           <a:p>
-            <a:pPr lvl="0" indent="0" marL="0">
+            <a:pPr lvl="0" indent="0">
               <a:buNone/>
             </a:pPr>
             <a:r>
+              <a:rPr>
+                <a:solidFill>
+                  <a:srgbClr val="5E5E5E"/>
+                </a:solidFill>
+                <a:latin typeface="Courier"/>
+              </a:rPr>
+              <a:t># No station - just lon and lat ----------------</a:t>
+            </a:r>
+            <a:br/>
+            <a:r>
+              <a:rPr>
+                <a:solidFill>
+                  <a:srgbClr val="003B4F"/>
+                </a:solidFill>
+                <a:latin typeface="Courier"/>
+              </a:rPr>
+              <a:t>power_df &lt;- </a:t>
+            </a:r>
+            <a:r>
+              <a:rPr>
+                <a:solidFill>
+                  <a:srgbClr val="4758AB"/>
+                </a:solidFill>
+                <a:latin typeface="Courier"/>
+              </a:rPr>
+              <a:t>get_power</a:t>
+            </a:r>
+            <a:r>
+              <a:rPr>
+                <a:solidFill>
+                  <a:srgbClr val="003B4F"/>
+                </a:solidFill>
+                <a:latin typeface="Courier"/>
+              </a:rPr>
+              <a:t>(</a:t>
+            </a:r>
+            <a:br/>
+            <a:r>
+              <a:rPr>
+                <a:solidFill>
+                  <a:srgbClr val="003B4F"/>
+                </a:solidFill>
+                <a:latin typeface="Courier"/>
+              </a:rPr>
+              <a:t>  </a:t>
+            </a:r>
+            <a:r>
+              <a:rPr>
+                <a:solidFill>
+                  <a:srgbClr val="657422"/>
+                </a:solidFill>
+                <a:latin typeface="Courier"/>
+              </a:rPr>
+              <a:t>community =</a:t>
+            </a:r>
+            <a:r>
+              <a:rPr>
+                <a:solidFill>
+                  <a:srgbClr val="003B4F"/>
+                </a:solidFill>
+                <a:latin typeface="Courier"/>
+              </a:rPr>
+              <a:t> </a:t>
+            </a:r>
+            <a:r>
+              <a:rPr>
+                <a:solidFill>
+                  <a:srgbClr val="20794D"/>
+                </a:solidFill>
+                <a:latin typeface="Courier"/>
+              </a:rPr>
+              <a:t>"ag"</a:t>
+            </a:r>
+            <a:r>
+              <a:rPr>
+                <a:solidFill>
+                  <a:srgbClr val="003B4F"/>
+                </a:solidFill>
+                <a:latin typeface="Courier"/>
+              </a:rPr>
+              <a:t>,</a:t>
+            </a:r>
+            <a:br/>
+            <a:r>
+              <a:rPr>
+                <a:solidFill>
+                  <a:srgbClr val="003B4F"/>
+                </a:solidFill>
+                <a:latin typeface="Courier"/>
+              </a:rPr>
+              <a:t>  </a:t>
+            </a:r>
+            <a:r>
+              <a:rPr>
+                <a:solidFill>
+                  <a:srgbClr val="657422"/>
+                </a:solidFill>
+                <a:latin typeface="Courier"/>
+              </a:rPr>
+              <a:t>lonlat =</a:t>
+            </a:r>
+            <a:r>
+              <a:rPr>
+                <a:solidFill>
+                  <a:srgbClr val="003B4F"/>
+                </a:solidFill>
+                <a:latin typeface="Courier"/>
+              </a:rPr>
+              <a:t> </a:t>
+            </a:r>
+            <a:r>
+              <a:rPr>
+                <a:solidFill>
+                  <a:srgbClr val="4758AB"/>
+                </a:solidFill>
+                <a:latin typeface="Courier"/>
+              </a:rPr>
+              <a:t>c</a:t>
+            </a:r>
+            <a:r>
+              <a:rPr>
+                <a:solidFill>
+                  <a:srgbClr val="003B4F"/>
+                </a:solidFill>
+                <a:latin typeface="Courier"/>
+              </a:rPr>
+              <a:t>(</a:t>
+            </a:r>
+            <a:r>
+              <a:rPr>
+                <a:solidFill>
+                  <a:srgbClr val="5E5E5E"/>
+                </a:solidFill>
+                <a:latin typeface="Courier"/>
+              </a:rPr>
+              <a:t>-</a:t>
+            </a:r>
+            <a:r>
+              <a:rPr>
+                <a:solidFill>
+                  <a:srgbClr val="AD0000"/>
+                </a:solidFill>
+                <a:latin typeface="Courier"/>
+              </a:rPr>
+              <a:t>0.13</a:t>
+            </a:r>
+            <a:r>
+              <a:rPr>
+                <a:solidFill>
+                  <a:srgbClr val="003B4F"/>
+                </a:solidFill>
+                <a:latin typeface="Courier"/>
+              </a:rPr>
+              <a:t>, </a:t>
+            </a:r>
+            <a:r>
+              <a:rPr>
+                <a:solidFill>
+                  <a:srgbClr val="AD0000"/>
+                </a:solidFill>
+                <a:latin typeface="Courier"/>
+              </a:rPr>
+              <a:t>51.51</a:t>
+            </a:r>
+            <a:r>
+              <a:rPr>
+                <a:solidFill>
+                  <a:srgbClr val="003B4F"/>
+                </a:solidFill>
+                <a:latin typeface="Courier"/>
+              </a:rPr>
+              <a:t>),</a:t>
+            </a:r>
+            <a:br/>
+            <a:r>
+              <a:rPr>
+                <a:solidFill>
+                  <a:srgbClr val="003B4F"/>
+                </a:solidFill>
+                <a:latin typeface="Courier"/>
+              </a:rPr>
+              <a:t>  </a:t>
+            </a:r>
+            <a:r>
+              <a:rPr>
+                <a:solidFill>
+                  <a:srgbClr val="657422"/>
+                </a:solidFill>
+                <a:latin typeface="Courier"/>
+              </a:rPr>
+              <a:t>pars =</a:t>
+            </a:r>
+            <a:r>
+              <a:rPr>
+                <a:solidFill>
+                  <a:srgbClr val="003B4F"/>
+                </a:solidFill>
+                <a:latin typeface="Courier"/>
+              </a:rPr>
+              <a:t> </a:t>
+            </a:r>
+            <a:r>
+              <a:rPr>
+                <a:solidFill>
+                  <a:srgbClr val="20794D"/>
+                </a:solidFill>
+                <a:latin typeface="Courier"/>
+              </a:rPr>
+              <a:t>"T2M"</a:t>
+            </a:r>
+            <a:r>
+              <a:rPr>
+                <a:solidFill>
+                  <a:srgbClr val="003B4F"/>
+                </a:solidFill>
+                <a:latin typeface="Courier"/>
+              </a:rPr>
+              <a:t>,</a:t>
+            </a:r>
+            <a:br/>
+            <a:r>
+              <a:rPr>
+                <a:solidFill>
+                  <a:srgbClr val="003B4F"/>
+                </a:solidFill>
+                <a:latin typeface="Courier"/>
+              </a:rPr>
+              <a:t>  </a:t>
+            </a:r>
+            <a:r>
+              <a:rPr>
+                <a:solidFill>
+                  <a:srgbClr val="657422"/>
+                </a:solidFill>
+                <a:latin typeface="Courier"/>
+              </a:rPr>
+              <a:t>dates =</a:t>
+            </a:r>
+            <a:r>
+              <a:rPr>
+                <a:solidFill>
+                  <a:srgbClr val="003B4F"/>
+                </a:solidFill>
+                <a:latin typeface="Courier"/>
+              </a:rPr>
+              <a:t> </a:t>
+            </a:r>
+            <a:r>
+              <a:rPr>
+                <a:solidFill>
+                  <a:srgbClr val="4758AB"/>
+                </a:solidFill>
+                <a:latin typeface="Courier"/>
+              </a:rPr>
+              <a:t>c</a:t>
+            </a:r>
+            <a:r>
+              <a:rPr>
+                <a:solidFill>
+                  <a:srgbClr val="003B4F"/>
+                </a:solidFill>
+                <a:latin typeface="Courier"/>
+              </a:rPr>
+              <a:t>(</a:t>
+            </a:r>
+            <a:r>
+              <a:rPr>
+                <a:solidFill>
+                  <a:srgbClr val="20794D"/>
+                </a:solidFill>
+                <a:latin typeface="Courier"/>
+              </a:rPr>
+              <a:t>"1981-01-01"</a:t>
+            </a:r>
+            <a:r>
+              <a:rPr>
+                <a:solidFill>
+                  <a:srgbClr val="003B4F"/>
+                </a:solidFill>
+                <a:latin typeface="Courier"/>
+              </a:rPr>
+              <a:t>, </a:t>
+            </a:r>
+            <a:r>
+              <a:rPr>
+                <a:solidFill>
+                  <a:srgbClr val="20794D"/>
+                </a:solidFill>
+                <a:latin typeface="Courier"/>
+              </a:rPr>
+              <a:t>"2024-12-31"</a:t>
+            </a:r>
+            <a:r>
+              <a:rPr>
+                <a:solidFill>
+                  <a:srgbClr val="003B4F"/>
+                </a:solidFill>
+                <a:latin typeface="Courier"/>
+              </a:rPr>
+              <a:t>),</a:t>
+            </a:r>
+            <a:br/>
+            <a:r>
+              <a:rPr>
+                <a:solidFill>
+                  <a:srgbClr val="003B4F"/>
+                </a:solidFill>
+                <a:latin typeface="Courier"/>
+              </a:rPr>
+              <a:t>  </a:t>
+            </a:r>
+            <a:r>
+              <a:rPr>
+                <a:solidFill>
+                  <a:srgbClr val="657422"/>
+                </a:solidFill>
+                <a:latin typeface="Courier"/>
+              </a:rPr>
+              <a:t>temporal_api =</a:t>
+            </a:r>
+            <a:r>
+              <a:rPr>
+                <a:solidFill>
+                  <a:srgbClr val="003B4F"/>
+                </a:solidFill>
+                <a:latin typeface="Courier"/>
+              </a:rPr>
+              <a:t> </a:t>
+            </a:r>
+            <a:r>
+              <a:rPr>
+                <a:solidFill>
+                  <a:srgbClr val="20794D"/>
+                </a:solidFill>
+                <a:latin typeface="Courier"/>
+              </a:rPr>
+              <a:t>"daily"</a:t>
+            </a:r>
+            <a:br/>
+            <a:r>
+              <a:rPr>
+                <a:solidFill>
+                  <a:srgbClr val="003B4F"/>
+                </a:solidFill>
+                <a:latin typeface="Courier"/>
+              </a:rPr>
+              <a:t>) </a:t>
+            </a:r>
+            <a:r>
+              <a:rPr>
+                <a:solidFill>
+                  <a:srgbClr val="5E5E5E"/>
+                </a:solidFill>
+                <a:latin typeface="Courier"/>
+              </a:rPr>
+              <a:t>%&gt;%</a:t>
+            </a:r>
+            <a:br/>
+            <a:r>
+              <a:rPr>
+                <a:solidFill>
+                  <a:srgbClr val="003B4F"/>
+                </a:solidFill>
+                <a:latin typeface="Courier"/>
+              </a:rPr>
+              <a:t>  </a:t>
+            </a:r>
+            <a:r>
+              <a:rPr>
+                <a:solidFill>
+                  <a:srgbClr val="4758AB"/>
+                </a:solidFill>
+                <a:latin typeface="Courier"/>
+              </a:rPr>
+              <a:t>clean_names</a:t>
+            </a:r>
+            <a:r>
+              <a:rPr>
+                <a:solidFill>
+                  <a:srgbClr val="003B4F"/>
+                </a:solidFill>
+                <a:latin typeface="Courier"/>
+              </a:rPr>
+              <a:t>() </a:t>
+            </a:r>
+            <a:r>
+              <a:rPr>
+                <a:solidFill>
+                  <a:srgbClr val="5E5E5E"/>
+                </a:solidFill>
+                <a:latin typeface="Courier"/>
+              </a:rPr>
+              <a:t>%&gt;%</a:t>
+            </a:r>
+            <a:br/>
+            <a:r>
+              <a:rPr>
+                <a:solidFill>
+                  <a:srgbClr val="003B4F"/>
+                </a:solidFill>
+                <a:latin typeface="Courier"/>
+              </a:rPr>
+              <a:t>  </a:t>
+            </a:r>
+            <a:r>
+              <a:rPr>
+                <a:solidFill>
+                  <a:srgbClr val="4758AB"/>
+                </a:solidFill>
+                <a:latin typeface="Courier"/>
+              </a:rPr>
+              <a:t>rename</a:t>
+            </a:r>
+            <a:r>
+              <a:rPr>
+                <a:solidFill>
+                  <a:srgbClr val="003B4F"/>
+                </a:solidFill>
+                <a:latin typeface="Courier"/>
+              </a:rPr>
+              <a:t>(</a:t>
+            </a:r>
+            <a:r>
+              <a:rPr>
+                <a:solidFill>
+                  <a:srgbClr val="657422"/>
+                </a:solidFill>
+                <a:latin typeface="Courier"/>
+              </a:rPr>
+              <a:t>month =</a:t>
+            </a:r>
+            <a:r>
+              <a:rPr>
+                <a:solidFill>
+                  <a:srgbClr val="003B4F"/>
+                </a:solidFill>
+                <a:latin typeface="Courier"/>
+              </a:rPr>
+              <a:t> mm, </a:t>
+            </a:r>
+            <a:r>
+              <a:rPr>
+                <a:solidFill>
+                  <a:srgbClr val="657422"/>
+                </a:solidFill>
+                <a:latin typeface="Courier"/>
+              </a:rPr>
+              <a:t>temp =</a:t>
+            </a:r>
+            <a:r>
+              <a:rPr>
+                <a:solidFill>
+                  <a:srgbClr val="003B4F"/>
+                </a:solidFill>
+                <a:latin typeface="Courier"/>
+              </a:rPr>
+              <a:t> t2m)</a:t>
+            </a:r>
+            <a:br/>
+            <a:br/>
+            <a:r>
+              <a:rPr>
+                <a:solidFill>
+                  <a:srgbClr val="4758AB"/>
+                </a:solidFill>
+                <a:latin typeface="Courier"/>
+              </a:rPr>
+              <a:t>dim</a:t>
+            </a:r>
+            <a:r>
+              <a:rPr>
+                <a:solidFill>
+                  <a:srgbClr val="003B4F"/>
+                </a:solidFill>
+                <a:latin typeface="Courier"/>
+              </a:rPr>
+              <a:t>(power_df)</a:t>
+            </a:r>
+          </a:p>
+          <a:p>
+            <a:pPr lvl="0" indent="0">
+              <a:buNone/>
+            </a:pPr>
+            <a:r>
+              <a:rPr>
+                <a:latin typeface="Courier"/>
+              </a:rPr>
+              <a:t>[1] 16071     8</a:t>
+            </a:r>
+          </a:p>
+        </p:txBody>
+      </p:sp>
+      <p:sp>
+        <p:nvSpPr>
+          <p:cNvPr id="4" name="Content Placeholder 3"/>
+          <p:cNvSpPr>
+            <a:spLocks noGrp="1"/>
+          </p:cNvSpPr>
+          <p:nvPr>
+            <p:ph idx="2" sz="half"/>
+          </p:nvPr>
+        </p:nvSpPr>
+        <p:spPr/>
+        <p:txBody>
+          <a:bodyPr/>
+          <a:lstStyle/>
+          <a:p>
+            <a:pPr lvl="0"/>
+            <a:r>
               <a:rPr b="1"/>
-              <a:t>🛑 Do Activity Parts 6–10 now</a:t>
+              <a:t>Not</a:t>
+            </a:r>
+            <a:r>
+              <a:rPr/>
+              <a:t> what you use for the homework — but a station is not the only way</a:t>
             </a:r>
           </a:p>
           <a:p>
             <a:pPr lvl="0"/>
             <a:r>
-              <a:rPr/>
-              <a:t>Label the seasons with </a:t>
-            </a:r>
-            <a:r>
-              <a:rPr>
-                <a:latin typeface="Courier"/>
-              </a:rPr>
-              <a:t>case_when()</a:t>
-            </a:r>
-            <a:r>
-              <a:rPr/>
-              <a:t> and summarize by year and season</a:t>
+              <a:rPr b="1">
+                <a:latin typeface="Courier"/>
+              </a:rPr>
+              <a:t>nasapower</a:t>
+            </a:r>
+            <a:r>
+              <a:rPr b="1"/>
+              <a:t> needs only coordinates</a:t>
+            </a:r>
+          </a:p>
+          <a:p>
+            <a:pPr lvl="1"/>
+            <a:r>
+              <a:rPr/>
+              <a:t>anywhere on Earth, </a:t>
+            </a:r>
+            <a:r>
+              <a:rPr b="1"/>
+              <a:t>1981 to now, no gaps</a:t>
+            </a:r>
+          </a:p>
+          <a:p>
+            <a:pPr lvl="1"/>
+            <a:r>
+              <a:rPr/>
+              <a:t>watch the order: </a:t>
+            </a:r>
+            <a:r>
+              <a:rPr b="1"/>
+              <a:t>longitude first</a:t>
+            </a:r>
+          </a:p>
+          <a:p>
+            <a:pPr lvl="1"/>
+            <a:r>
+              <a:rPr/>
+              <a:t>a modelled </a:t>
+            </a:r>
+            <a:r>
+              <a:rPr b="1"/>
+              <a:t>~50 km grid cell</a:t>
+            </a:r>
+            <a:r>
+              <a:rPr/>
+              <a:t>, not a station</a:t>
             </a:r>
           </a:p>
           <a:p>
             <a:pPr lvl="0"/>
             <a:r>
               <a:rPr/>
-              <a:t>Plot both seasons, then fit a model for each</a:t>
+              <a:t>Columns come back </a:t>
+            </a:r>
+            <a:r>
+              <a:rPr>
+                <a:latin typeface="Courier"/>
+              </a:rPr>
+              <a:t>MM</a:t>
+            </a:r>
+            <a:r>
+              <a:rPr/>
+              <a:t> and </a:t>
+            </a:r>
+            <a:r>
+              <a:rPr>
+                <a:latin typeface="Courier"/>
+              </a:rPr>
+              <a:t>T2M</a:t>
+            </a:r>
+          </a:p>
+          <a:p>
+            <a:pPr lvl="1"/>
+            <a:r>
+              <a:rPr>
+                <a:latin typeface="Courier"/>
+              </a:rPr>
+              <a:t>rename()</a:t>
+            </a:r>
+            <a:r>
+              <a:rPr/>
+              <a:t> is needed here</a:t>
+            </a:r>
+          </a:p>
+          <a:p>
+            <a:pPr lvl="1"/>
+            <a:r>
+              <a:rPr/>
+              <a:t>the small translation every new source needs</a:t>
             </a:r>
           </a:p>
           <a:p>
             <a:pPr lvl="0"/>
             <a:r>
-              <a:rPr/>
-              <a:t>Write the warming rates in °C per decade</a:t>
-            </a:r>
-          </a:p>
-          <a:p>
-            <a:pPr lvl="0"/>
-            <a:r>
-              <a:rPr/>
-              <a:t>Get the coordinates for a city you choose — the analysis is your homework</a:t>
+              <a:rPr b="1"/>
+              <a:t>GSOD for the homework</a:t>
+            </a:r>
+            <a:r>
+              <a:rPr/>
+              <a:t> — the longer record is the point</a:t>
             </a:r>
           </a:p>
         </p:txBody>
@@ -11472,7 +12168,7 @@
             <a:pPr lvl="0"/>
             <a:r>
               <a:rPr sz="2000"/>
-              <a:t>Change the station, and it is a new city</a:t>
+              <a:t>Change the station ID, and it is a new city</a:t>
             </a:r>
           </a:p>
           <a:p>
@@ -11530,7 +12226,7 @@
             </a:r>
             <a:r>
               <a:rPr/>
-              <a:t> — data by lat/long (your city)</a:t>
+              <a:t> — data by lat/long (another source)</a:t>
             </a:r>
           </a:p>
           <a:p>
@@ -11710,7 +12406,7 @@
             </a:pPr>
             <a:r>
               <a:rPr/>
-              <a:t>What We Learned Today</a:t>
+              <a:t>Stack the Two Places</a:t>
             </a:r>
           </a:p>
         </p:txBody>
@@ -11730,6 +12426,1180 @@
           <a:bodyPr/>
           <a:lstStyle/>
           <a:p>
+            <a:pPr lvl="0" indent="0">
+              <a:buNone/>
+            </a:pPr>
+            <a:r>
+              <a:rPr>
+                <a:solidFill>
+                  <a:srgbClr val="5E5E5E"/>
+                </a:solidFill>
+                <a:latin typeface="Courier"/>
+              </a:rPr>
+              <a:t># The later of the two start years -------------</a:t>
+            </a:r>
+            <a:br/>
+            <a:r>
+              <a:rPr>
+                <a:solidFill>
+                  <a:srgbClr val="003B4F"/>
+                </a:solidFill>
+                <a:latin typeface="Courier"/>
+              </a:rPr>
+              <a:t>start_year &lt;- </a:t>
+            </a:r>
+            <a:r>
+              <a:rPr>
+                <a:solidFill>
+                  <a:srgbClr val="4758AB"/>
+                </a:solidFill>
+                <a:latin typeface="Courier"/>
+              </a:rPr>
+              <a:t>max</a:t>
+            </a:r>
+            <a:r>
+              <a:rPr>
+                <a:solidFill>
+                  <a:srgbClr val="003B4F"/>
+                </a:solidFill>
+                <a:latin typeface="Courier"/>
+              </a:rPr>
+              <a:t>(</a:t>
+            </a:r>
+            <a:r>
+              <a:rPr>
+                <a:solidFill>
+                  <a:srgbClr val="4758AB"/>
+                </a:solidFill>
+                <a:latin typeface="Courier"/>
+              </a:rPr>
+              <a:t>min</a:t>
+            </a:r>
+            <a:r>
+              <a:rPr>
+                <a:solidFill>
+                  <a:srgbClr val="003B4F"/>
+                </a:solidFill>
+                <a:latin typeface="Courier"/>
+              </a:rPr>
+              <a:t>(dlh_year_df</a:t>
+            </a:r>
+            <a:r>
+              <a:rPr>
+                <a:solidFill>
+                  <a:srgbClr val="5E5E5E"/>
+                </a:solidFill>
+                <a:latin typeface="Courier"/>
+              </a:rPr>
+              <a:t>$</a:t>
+            </a:r>
+            <a:r>
+              <a:rPr>
+                <a:solidFill>
+                  <a:srgbClr val="003B4F"/>
+                </a:solidFill>
+                <a:latin typeface="Courier"/>
+              </a:rPr>
+              <a:t>year),</a:t>
+            </a:r>
+            <a:br/>
+            <a:r>
+              <a:rPr>
+                <a:solidFill>
+                  <a:srgbClr val="003B4F"/>
+                </a:solidFill>
+                <a:latin typeface="Courier"/>
+              </a:rPr>
+              <a:t>                  </a:t>
+            </a:r>
+            <a:r>
+              <a:rPr>
+                <a:solidFill>
+                  <a:srgbClr val="4758AB"/>
+                </a:solidFill>
+                <a:latin typeface="Courier"/>
+              </a:rPr>
+              <a:t>min</a:t>
+            </a:r>
+            <a:r>
+              <a:rPr>
+                <a:solidFill>
+                  <a:srgbClr val="003B4F"/>
+                </a:solidFill>
+                <a:latin typeface="Courier"/>
+              </a:rPr>
+              <a:t>(city_year_df</a:t>
+            </a:r>
+            <a:r>
+              <a:rPr>
+                <a:solidFill>
+                  <a:srgbClr val="5E5E5E"/>
+                </a:solidFill>
+                <a:latin typeface="Courier"/>
+              </a:rPr>
+              <a:t>$</a:t>
+            </a:r>
+            <a:r>
+              <a:rPr>
+                <a:solidFill>
+                  <a:srgbClr val="003B4F"/>
+                </a:solidFill>
+                <a:latin typeface="Courier"/>
+              </a:rPr>
+              <a:t>year))</a:t>
+            </a:r>
+            <a:br/>
+            <a:br/>
+            <a:r>
+              <a:rPr>
+                <a:solidFill>
+                  <a:srgbClr val="5E5E5E"/>
+                </a:solidFill>
+                <a:latin typeface="Courier"/>
+              </a:rPr>
+              <a:t># Label each one BEFORE you stack --------------</a:t>
+            </a:r>
+            <a:br/>
+            <a:r>
+              <a:rPr>
+                <a:solidFill>
+                  <a:srgbClr val="003B4F"/>
+                </a:solidFill>
+                <a:latin typeface="Courier"/>
+              </a:rPr>
+              <a:t>duluth_labeled_df &lt;- dlh_year_df </a:t>
+            </a:r>
+            <a:r>
+              <a:rPr>
+                <a:solidFill>
+                  <a:srgbClr val="5E5E5E"/>
+                </a:solidFill>
+                <a:latin typeface="Courier"/>
+              </a:rPr>
+              <a:t>%&gt;%</a:t>
+            </a:r>
+            <a:br/>
+            <a:r>
+              <a:rPr>
+                <a:solidFill>
+                  <a:srgbClr val="003B4F"/>
+                </a:solidFill>
+                <a:latin typeface="Courier"/>
+              </a:rPr>
+              <a:t>  </a:t>
+            </a:r>
+            <a:r>
+              <a:rPr>
+                <a:solidFill>
+                  <a:srgbClr val="4758AB"/>
+                </a:solidFill>
+                <a:latin typeface="Courier"/>
+              </a:rPr>
+              <a:t>filter</a:t>
+            </a:r>
+            <a:r>
+              <a:rPr>
+                <a:solidFill>
+                  <a:srgbClr val="003B4F"/>
+                </a:solidFill>
+                <a:latin typeface="Courier"/>
+              </a:rPr>
+              <a:t>(year </a:t>
+            </a:r>
+            <a:r>
+              <a:rPr>
+                <a:solidFill>
+                  <a:srgbClr val="5E5E5E"/>
+                </a:solidFill>
+                <a:latin typeface="Courier"/>
+              </a:rPr>
+              <a:t>&gt;=</a:t>
+            </a:r>
+            <a:r>
+              <a:rPr>
+                <a:solidFill>
+                  <a:srgbClr val="003B4F"/>
+                </a:solidFill>
+                <a:latin typeface="Courier"/>
+              </a:rPr>
+              <a:t> start_year) </a:t>
+            </a:r>
+            <a:r>
+              <a:rPr>
+                <a:solidFill>
+                  <a:srgbClr val="5E5E5E"/>
+                </a:solidFill>
+                <a:latin typeface="Courier"/>
+              </a:rPr>
+              <a:t>%&gt;%</a:t>
+            </a:r>
+            <a:br/>
+            <a:r>
+              <a:rPr>
+                <a:solidFill>
+                  <a:srgbClr val="003B4F"/>
+                </a:solidFill>
+                <a:latin typeface="Courier"/>
+              </a:rPr>
+              <a:t>  </a:t>
+            </a:r>
+            <a:r>
+              <a:rPr>
+                <a:solidFill>
+                  <a:srgbClr val="4758AB"/>
+                </a:solidFill>
+                <a:latin typeface="Courier"/>
+              </a:rPr>
+              <a:t>mutate</a:t>
+            </a:r>
+            <a:r>
+              <a:rPr>
+                <a:solidFill>
+                  <a:srgbClr val="003B4F"/>
+                </a:solidFill>
+                <a:latin typeface="Courier"/>
+              </a:rPr>
+              <a:t>(</a:t>
+            </a:r>
+            <a:r>
+              <a:rPr>
+                <a:solidFill>
+                  <a:srgbClr val="657422"/>
+                </a:solidFill>
+                <a:latin typeface="Courier"/>
+              </a:rPr>
+              <a:t>station =</a:t>
+            </a:r>
+            <a:r>
+              <a:rPr>
+                <a:solidFill>
+                  <a:srgbClr val="003B4F"/>
+                </a:solidFill>
+                <a:latin typeface="Courier"/>
+              </a:rPr>
+              <a:t> </a:t>
+            </a:r>
+            <a:r>
+              <a:rPr>
+                <a:solidFill>
+                  <a:srgbClr val="20794D"/>
+                </a:solidFill>
+                <a:latin typeface="Courier"/>
+              </a:rPr>
+              <a:t>"duluth"</a:t>
+            </a:r>
+            <a:r>
+              <a:rPr>
+                <a:solidFill>
+                  <a:srgbClr val="003B4F"/>
+                </a:solidFill>
+                <a:latin typeface="Courier"/>
+              </a:rPr>
+              <a:t>)</a:t>
+            </a:r>
+            <a:br/>
+            <a:br/>
+            <a:r>
+              <a:rPr>
+                <a:solidFill>
+                  <a:srgbClr val="003B4F"/>
+                </a:solidFill>
+                <a:latin typeface="Courier"/>
+              </a:rPr>
+              <a:t>city_labeled_df &lt;- city_year_df </a:t>
+            </a:r>
+            <a:r>
+              <a:rPr>
+                <a:solidFill>
+                  <a:srgbClr val="5E5E5E"/>
+                </a:solidFill>
+                <a:latin typeface="Courier"/>
+              </a:rPr>
+              <a:t>%&gt;%</a:t>
+            </a:r>
+            <a:br/>
+            <a:r>
+              <a:rPr>
+                <a:solidFill>
+                  <a:srgbClr val="003B4F"/>
+                </a:solidFill>
+                <a:latin typeface="Courier"/>
+              </a:rPr>
+              <a:t>  </a:t>
+            </a:r>
+            <a:r>
+              <a:rPr>
+                <a:solidFill>
+                  <a:srgbClr val="4758AB"/>
+                </a:solidFill>
+                <a:latin typeface="Courier"/>
+              </a:rPr>
+              <a:t>filter</a:t>
+            </a:r>
+            <a:r>
+              <a:rPr>
+                <a:solidFill>
+                  <a:srgbClr val="003B4F"/>
+                </a:solidFill>
+                <a:latin typeface="Courier"/>
+              </a:rPr>
+              <a:t>(year </a:t>
+            </a:r>
+            <a:r>
+              <a:rPr>
+                <a:solidFill>
+                  <a:srgbClr val="5E5E5E"/>
+                </a:solidFill>
+                <a:latin typeface="Courier"/>
+              </a:rPr>
+              <a:t>&gt;=</a:t>
+            </a:r>
+            <a:r>
+              <a:rPr>
+                <a:solidFill>
+                  <a:srgbClr val="003B4F"/>
+                </a:solidFill>
+                <a:latin typeface="Courier"/>
+              </a:rPr>
+              <a:t> start_year) </a:t>
+            </a:r>
+            <a:r>
+              <a:rPr>
+                <a:solidFill>
+                  <a:srgbClr val="5E5E5E"/>
+                </a:solidFill>
+                <a:latin typeface="Courier"/>
+              </a:rPr>
+              <a:t>%&gt;%</a:t>
+            </a:r>
+            <a:br/>
+            <a:r>
+              <a:rPr>
+                <a:solidFill>
+                  <a:srgbClr val="003B4F"/>
+                </a:solidFill>
+                <a:latin typeface="Courier"/>
+              </a:rPr>
+              <a:t>  </a:t>
+            </a:r>
+            <a:r>
+              <a:rPr>
+                <a:solidFill>
+                  <a:srgbClr val="4758AB"/>
+                </a:solidFill>
+                <a:latin typeface="Courier"/>
+              </a:rPr>
+              <a:t>mutate</a:t>
+            </a:r>
+            <a:r>
+              <a:rPr>
+                <a:solidFill>
+                  <a:srgbClr val="003B4F"/>
+                </a:solidFill>
+                <a:latin typeface="Courier"/>
+              </a:rPr>
+              <a:t>(</a:t>
+            </a:r>
+            <a:r>
+              <a:rPr>
+                <a:solidFill>
+                  <a:srgbClr val="657422"/>
+                </a:solidFill>
+                <a:latin typeface="Courier"/>
+              </a:rPr>
+              <a:t>station =</a:t>
+            </a:r>
+            <a:r>
+              <a:rPr>
+                <a:solidFill>
+                  <a:srgbClr val="003B4F"/>
+                </a:solidFill>
+                <a:latin typeface="Courier"/>
+              </a:rPr>
+              <a:t> </a:t>
+            </a:r>
+            <a:r>
+              <a:rPr>
+                <a:solidFill>
+                  <a:srgbClr val="20794D"/>
+                </a:solidFill>
+                <a:latin typeface="Courier"/>
+              </a:rPr>
+              <a:t>"my_city"</a:t>
+            </a:r>
+            <a:r>
+              <a:rPr>
+                <a:solidFill>
+                  <a:srgbClr val="003B4F"/>
+                </a:solidFill>
+                <a:latin typeface="Courier"/>
+              </a:rPr>
+              <a:t>)</a:t>
+            </a:r>
+            <a:br/>
+            <a:br/>
+            <a:r>
+              <a:rPr>
+                <a:solidFill>
+                  <a:srgbClr val="003B4F"/>
+                </a:solidFill>
+                <a:latin typeface="Courier"/>
+              </a:rPr>
+              <a:t>both_df &lt;- </a:t>
+            </a:r>
+            <a:r>
+              <a:rPr>
+                <a:solidFill>
+                  <a:srgbClr val="4758AB"/>
+                </a:solidFill>
+                <a:latin typeface="Courier"/>
+              </a:rPr>
+              <a:t>bind_rows</a:t>
+            </a:r>
+            <a:r>
+              <a:rPr>
+                <a:solidFill>
+                  <a:srgbClr val="003B4F"/>
+                </a:solidFill>
+                <a:latin typeface="Courier"/>
+              </a:rPr>
+              <a:t>(duluth_labeled_df,</a:t>
+            </a:r>
+            <a:br/>
+            <a:r>
+              <a:rPr>
+                <a:solidFill>
+                  <a:srgbClr val="003B4F"/>
+                </a:solidFill>
+                <a:latin typeface="Courier"/>
+              </a:rPr>
+              <a:t>                     city_labeled_df)</a:t>
+            </a:r>
+          </a:p>
+        </p:txBody>
+      </p:sp>
+      <p:sp>
+        <p:nvSpPr>
+          <p:cNvPr id="4" name="Content Placeholder 3"/>
+          <p:cNvSpPr>
+            <a:spLocks noGrp="1"/>
+          </p:cNvSpPr>
+          <p:nvPr>
+            <p:ph idx="2" sz="half"/>
+          </p:nvPr>
+        </p:nvSpPr>
+        <p:spPr/>
+        <p:txBody>
+          <a:bodyPr/>
+          <a:lstStyle/>
+          <a:p>
+            <a:pPr lvl="0"/>
+            <a:r>
+              <a:rPr/>
+              <a:t>Both places came from </a:t>
+            </a:r>
+            <a:r>
+              <a:rPr b="1">
+                <a:latin typeface="Courier"/>
+              </a:rPr>
+              <a:t>GSODR</a:t>
+            </a:r>
+            <a:r>
+              <a:rPr/>
+              <a:t>, so the columns already match</a:t>
+            </a:r>
+          </a:p>
+          <a:p>
+            <a:pPr lvl="0"/>
+            <a:r>
+              <a:rPr>
+                <a:latin typeface="Courier"/>
+              </a:rPr>
+              <a:t>bind_rows()</a:t>
+            </a:r>
+            <a:r>
+              <a:rPr/>
+              <a:t> puts one frame </a:t>
+            </a:r>
+            <a:r>
+              <a:rPr b="1"/>
+              <a:t>underneath</a:t>
+            </a:r>
+            <a:r>
+              <a:rPr/>
+              <a:t> the other</a:t>
+            </a:r>
+          </a:p>
+          <a:p>
+            <a:pPr lvl="1"/>
+            <a:r>
+              <a:rPr/>
+              <a:t>it matches columns by </a:t>
+            </a:r>
+            <a:r>
+              <a:rPr b="1"/>
+              <a:t>name</a:t>
+            </a:r>
+          </a:p>
+          <a:p>
+            <a:pPr lvl="1"/>
+            <a:r>
+              <a:rPr/>
+              <a:t>same names in both → no renaming</a:t>
+            </a:r>
+          </a:p>
+          <a:p>
+            <a:pPr lvl="0"/>
+            <a:r>
+              <a:rPr/>
+              <a:t>The </a:t>
+            </a:r>
+            <a:r>
+              <a:rPr b="1">
+                <a:latin typeface="Courier"/>
+              </a:rPr>
+              <a:t>station</a:t>
+            </a:r>
+            <a:r>
+              <a:rPr/>
+              <a:t> column is the trick</a:t>
+            </a:r>
+          </a:p>
+          <a:p>
+            <a:pPr lvl="1"/>
+            <a:r>
+              <a:rPr/>
+              <a:t>stacking alone loses </a:t>
+            </a:r>
+            <a:r>
+              <a:rPr b="1"/>
+              <a:t>where each row came from</a:t>
+            </a:r>
+          </a:p>
+          <a:p>
+            <a:pPr lvl="1"/>
+            <a:r>
+              <a:rPr/>
+              <a:t>so you label </a:t>
+            </a:r>
+            <a:r>
+              <a:rPr b="1"/>
+              <a:t>before</a:t>
+            </a:r>
+            <a:r>
+              <a:rPr/>
+              <a:t> you stack</a:t>
+            </a:r>
+          </a:p>
+          <a:p>
+            <a:pPr lvl="0" indent="0" marL="1270000">
+              <a:buNone/>
+            </a:pPr>
+            <a:r>
+              <a:rPr sz="2000" b="1"/>
+              <a:t>Important</a:t>
+            </a:r>
+          </a:p>
+          <a:p>
+            <a:pPr lvl="0" indent="0" marL="1270000">
+              <a:buNone/>
+            </a:pPr>
+            <a:r>
+              <a:rPr sz="2000"/>
+              <a:t>Compare the years they </a:t>
+            </a:r>
+            <a:r>
+              <a:rPr sz="2000" b="1"/>
+              <a:t>share</a:t>
+            </a:r>
+            <a:r>
+              <a:rPr sz="2000"/>
+              <a:t> — or a difference in </a:t>
+            </a:r>
+            <a:r>
+              <a:rPr sz="2000" b="1"/>
+              <a:t>place</a:t>
+            </a:r>
+            <a:r>
+              <a:rPr sz="2000"/>
+              <a:t> is mixed up with a difference in </a:t>
+            </a:r>
+            <a:r>
+              <a:rPr sz="2000" b="1"/>
+              <a:t>years</a:t>
+            </a:r>
+            <a:r>
+              <a:rPr sz="2000"/>
+              <a:t>.</a:t>
+            </a:r>
+          </a:p>
+        </p:txBody>
+      </p:sp>
+    </p:spTree>
+  </p:cSld>
+</p:sld>
+</file>
+
+<file path=ppt/slides/slide31.xml><?xml version="1.0" encoding="utf-8"?>
+<p:sld xmlns:a="http://schemas.openxmlformats.org/drawingml/2006/main" xmlns:r="http://schemas.openxmlformats.org/officeDocument/2006/relationships" xmlns:p="http://schemas.openxmlformats.org/presentationml/2006/main">
+  <p:cSld>
+    <p:spTree>
+      <p:nvGrpSpPr>
+        <p:cNvPr id="1" name=""/>
+        <p:cNvGrpSpPr/>
+        <p:nvPr/>
+      </p:nvGrpSpPr>
+      <p:grpSpPr>
+        <a:xfrm>
+          <a:off x="0" y="0"/>
+          <a:ext cx="0" cy="0"/>
+          <a:chOff x="0" y="0"/>
+          <a:chExt cx="0" cy="0"/>
+        </a:xfrm>
+      </p:grpSpPr>
+      <p:sp>
+        <p:nvSpPr>
+          <p:cNvPr id="2" name="Title 1"/>
+          <p:cNvSpPr>
+            <a:spLocks noGrp="1"/>
+          </p:cNvSpPr>
+          <p:nvPr>
+            <p:ph type="title"/>
+          </p:nvPr>
+        </p:nvSpPr>
+        <p:spPr>
+          <a:xfrm>
+            <a:off x="0" y="0"/>
+            <a:ext cx="9144000" cy="602780"/>
+          </a:xfrm>
+          <a:solidFill>
+            <a:srgbClr val="1A1A2E"/>
+          </a:solidFill>
+        </p:spPr>
+        <p:txBody>
+          <a:bodyPr/>
+          <a:lstStyle/>
+          <a:p>
+            <a:pPr lvl="0" indent="0" marL="0">
+              <a:buNone/>
+            </a:pPr>
+            <a:r>
+              <a:rPr/>
+              <a:t>Are the Two Slopes Different?</a:t>
+            </a:r>
+          </a:p>
+        </p:txBody>
+      </p:sp>
+      <p:sp>
+        <p:nvSpPr>
+          <p:cNvPr id="3" name="Content Placeholder 2"/>
+          <p:cNvSpPr>
+            <a:spLocks noGrp="1"/>
+          </p:cNvSpPr>
+          <p:nvPr>
+            <p:ph idx="1" sz="half"/>
+          </p:nvPr>
+        </p:nvSpPr>
+        <p:spPr/>
+        <p:txBody>
+          <a:bodyPr/>
+          <a:lstStyle/>
+          <a:p>
+            <a:pPr lvl="0" indent="0">
+              <a:buNone/>
+            </a:pPr>
+            <a:r>
+              <a:rPr>
+                <a:solidFill>
+                  <a:srgbClr val="5E5E5E"/>
+                </a:solidFill>
+                <a:latin typeface="Courier"/>
+              </a:rPr>
+              <a:t># One slope per station ------------------------</a:t>
+            </a:r>
+            <a:br/>
+            <a:r>
+              <a:rPr>
+                <a:solidFill>
+                  <a:srgbClr val="003B4F"/>
+                </a:solidFill>
+                <a:latin typeface="Courier"/>
+              </a:rPr>
+              <a:t>slope_model &lt;- </a:t>
+            </a:r>
+            <a:r>
+              <a:rPr>
+                <a:solidFill>
+                  <a:srgbClr val="4758AB"/>
+                </a:solidFill>
+                <a:latin typeface="Courier"/>
+              </a:rPr>
+              <a:t>lm</a:t>
+            </a:r>
+            <a:r>
+              <a:rPr>
+                <a:solidFill>
+                  <a:srgbClr val="003B4F"/>
+                </a:solidFill>
+                <a:latin typeface="Courier"/>
+              </a:rPr>
+              <a:t>(temp </a:t>
+            </a:r>
+            <a:r>
+              <a:rPr>
+                <a:solidFill>
+                  <a:srgbClr val="5E5E5E"/>
+                </a:solidFill>
+                <a:latin typeface="Courier"/>
+              </a:rPr>
+              <a:t>~</a:t>
+            </a:r>
+            <a:r>
+              <a:rPr>
+                <a:solidFill>
+                  <a:srgbClr val="003B4F"/>
+                </a:solidFill>
+                <a:latin typeface="Courier"/>
+              </a:rPr>
+              <a:t> year </a:t>
+            </a:r>
+            <a:r>
+              <a:rPr>
+                <a:solidFill>
+                  <a:srgbClr val="5E5E5E"/>
+                </a:solidFill>
+                <a:latin typeface="Courier"/>
+              </a:rPr>
+              <a:t>*</a:t>
+            </a:r>
+            <a:r>
+              <a:rPr>
+                <a:solidFill>
+                  <a:srgbClr val="003B4F"/>
+                </a:solidFill>
+                <a:latin typeface="Courier"/>
+              </a:rPr>
+              <a:t> station,</a:t>
+            </a:r>
+            <a:br/>
+            <a:r>
+              <a:rPr>
+                <a:solidFill>
+                  <a:srgbClr val="003B4F"/>
+                </a:solidFill>
+                <a:latin typeface="Courier"/>
+              </a:rPr>
+              <a:t>                  </a:t>
+            </a:r>
+            <a:r>
+              <a:rPr>
+                <a:solidFill>
+                  <a:srgbClr val="657422"/>
+                </a:solidFill>
+                <a:latin typeface="Courier"/>
+              </a:rPr>
+              <a:t>data =</a:t>
+            </a:r>
+            <a:r>
+              <a:rPr>
+                <a:solidFill>
+                  <a:srgbClr val="003B4F"/>
+                </a:solidFill>
+                <a:latin typeface="Courier"/>
+              </a:rPr>
+              <a:t> both_df)</a:t>
+            </a:r>
+            <a:br/>
+            <a:r>
+              <a:rPr>
+                <a:solidFill>
+                  <a:srgbClr val="4758AB"/>
+                </a:solidFill>
+                <a:latin typeface="Courier"/>
+              </a:rPr>
+              <a:t>summary</a:t>
+            </a:r>
+            <a:r>
+              <a:rPr>
+                <a:solidFill>
+                  <a:srgbClr val="003B4F"/>
+                </a:solidFill>
+                <a:latin typeface="Courier"/>
+              </a:rPr>
+              <a:t>(slope_model)</a:t>
+            </a:r>
+          </a:p>
+          <a:p>
+            <a:pPr lvl="0" indent="0" marL="0">
+              <a:buNone/>
+            </a:pPr>
+            <a:r>
+              <a:rPr/>
+              <a:t>Your city and Duluth gave different numbers. </a:t>
+            </a:r>
+            <a:r>
+              <a:rPr b="1"/>
+              <a:t>Different-looking slopes are not always different slopes.</a:t>
+            </a:r>
+          </a:p>
+        </p:txBody>
+      </p:sp>
+      <p:sp>
+        <p:nvSpPr>
+          <p:cNvPr id="4" name="Content Placeholder 3"/>
+          <p:cNvSpPr>
+            <a:spLocks noGrp="1"/>
+          </p:cNvSpPr>
+          <p:nvPr>
+            <p:ph idx="2" sz="half"/>
+          </p:nvPr>
+        </p:nvSpPr>
+        <p:spPr/>
+        <p:txBody>
+          <a:bodyPr/>
+          <a:lstStyle/>
+          <a:p>
+            <a:pPr lvl="0"/>
+            <a:r>
+              <a:rPr>
+                <a:latin typeface="Courier"/>
+              </a:rPr>
+              <a:t>year * station</a:t>
+            </a:r>
+            <a:r>
+              <a:rPr/>
+              <a:t> fits a </a:t>
+            </a:r>
+            <a:r>
+              <a:rPr b="1"/>
+              <a:t>separate slope</a:t>
+            </a:r>
+            <a:r>
+              <a:rPr/>
+              <a:t> for each place</a:t>
+            </a:r>
+          </a:p>
+          <a:p>
+            <a:pPr lvl="0"/>
+            <a:r>
+              <a:rPr/>
+              <a:t>Read the </a:t>
+            </a:r>
+            <a:r>
+              <a:rPr b="1">
+                <a:latin typeface="Courier"/>
+              </a:rPr>
+              <a:t>year:stationmy_city</a:t>
+            </a:r>
+            <a:r>
+              <a:rPr/>
+              <a:t> row</a:t>
+            </a:r>
+          </a:p>
+          <a:p>
+            <a:pPr lvl="1"/>
+            <a:r>
+              <a:rPr>
+                <a:latin typeface="Courier"/>
+              </a:rPr>
+              <a:t>Estimate</a:t>
+            </a:r>
+            <a:r>
+              <a:rPr/>
+              <a:t> — how much your slope </a:t>
+            </a:r>
+            <a:r>
+              <a:rPr b="1"/>
+              <a:t>differs</a:t>
+            </a:r>
+          </a:p>
+          <a:p>
+            <a:pPr lvl="1"/>
+            <a:r>
+              <a:rPr>
+                <a:latin typeface="Courier"/>
+              </a:rPr>
+              <a:t>Pr(&gt;|t|)</a:t>
+            </a:r>
+            <a:r>
+              <a:rPr/>
+              <a:t> — is that difference real?</a:t>
+            </a:r>
+          </a:p>
+          <a:p>
+            <a:pPr lvl="0"/>
+            <a:r>
+              <a:rPr/>
+              <a:t>This is a </a:t>
+            </a:r>
+            <a:r>
+              <a:rPr b="1"/>
+              <a:t>t-test on two slopes</a:t>
+            </a:r>
+            <a:r>
+              <a:rPr/>
+              <a:t>, in the same two columns you have read all class</a:t>
+            </a:r>
+          </a:p>
+          <a:p>
+            <a:pPr lvl="1"/>
+            <a:r>
+              <a:rPr i="1"/>
+              <a:t>p</a:t>
+            </a:r>
+            <a:r>
+              <a:rPr/>
+              <a:t> &lt; 0.05 → rates </a:t>
+            </a:r>
+            <a:r>
+              <a:rPr b="1"/>
+              <a:t>really differ</a:t>
+            </a:r>
+          </a:p>
+          <a:p>
+            <a:pPr lvl="1"/>
+            <a:r>
+              <a:rPr i="1"/>
+              <a:t>p</a:t>
+            </a:r>
+            <a:r>
+              <a:rPr/>
+              <a:t> &gt; 0.05 → </a:t>
+            </a:r>
+            <a:r>
+              <a:rPr b="1"/>
+              <a:t>cannot tell them apart</a:t>
+            </a:r>
+          </a:p>
+          <a:p>
+            <a:pPr lvl="0" indent="0" marL="1270000">
+              <a:buNone/>
+            </a:pPr>
+            <a:r>
+              <a:rPr sz="2000" b="1"/>
+              <a:t>Note</a:t>
+            </a:r>
+          </a:p>
+          <a:p>
+            <a:pPr lvl="0" indent="0" marL="1270000">
+              <a:buNone/>
+            </a:pPr>
+            <a:r>
+              <a:rPr sz="2000"/>
+              <a:t>Your city’s slope = </a:t>
+            </a:r>
+            <a:r>
+              <a:rPr sz="2000">
+                <a:latin typeface="Courier"/>
+              </a:rPr>
+              <a:t>year</a:t>
+            </a:r>
+            <a:r>
+              <a:rPr sz="2000"/>
+              <a:t> </a:t>
+            </a:r>
+            <a:r>
+              <a:rPr sz="2000" b="1"/>
+              <a:t>+</a:t>
+            </a:r>
+            <a:r>
+              <a:rPr sz="2000"/>
+              <a:t> </a:t>
+            </a:r>
+            <a:r>
+              <a:rPr sz="2000">
+                <a:latin typeface="Courier"/>
+              </a:rPr>
+              <a:t>year:stationmy_city</a:t>
+            </a:r>
+          </a:p>
+        </p:txBody>
+      </p:sp>
+    </p:spTree>
+  </p:cSld>
+</p:sld>
+</file>
+
+<file path=ppt/slides/slide32.xml><?xml version="1.0" encoding="utf-8"?>
+<p:sld xmlns:a="http://schemas.openxmlformats.org/drawingml/2006/main" xmlns:r="http://schemas.openxmlformats.org/officeDocument/2006/relationships" xmlns:p="http://schemas.openxmlformats.org/presentationml/2006/main">
+  <p:cSld>
+    <p:spTree>
+      <p:nvGrpSpPr>
+        <p:cNvPr id="1" name=""/>
+        <p:cNvGrpSpPr/>
+        <p:nvPr/>
+      </p:nvGrpSpPr>
+      <p:grpSpPr>
+        <a:xfrm>
+          <a:off x="0" y="0"/>
+          <a:ext cx="0" cy="0"/>
+          <a:chOff x="0" y="0"/>
+          <a:chExt cx="0" cy="0"/>
+        </a:xfrm>
+      </p:grpSpPr>
+      <p:sp>
+        <p:nvSpPr>
+          <p:cNvPr id="2" name="Title 1"/>
+          <p:cNvSpPr>
+            <a:spLocks noGrp="1"/>
+          </p:cNvSpPr>
+          <p:nvPr>
+            <p:ph type="title"/>
+          </p:nvPr>
+        </p:nvSpPr>
+        <p:spPr>
+          <a:xfrm>
+            <a:off x="0" y="0"/>
+            <a:ext cx="9144000" cy="582780"/>
+          </a:xfrm>
+        </p:spPr>
+        <p:txBody>
+          <a:bodyPr/>
+          <a:lstStyle/>
+          <a:p>
+            <a:pPr lvl="0" indent="0" marL="0">
+              <a:buNone/>
+            </a:pPr>
+            <a:r>
+              <a:rPr/>
+              <a:t>→ ACTIVITY 12 Parts 6–10 now</a:t>
+            </a:r>
+          </a:p>
+        </p:txBody>
+      </p:sp>
+      <p:sp>
+        <p:nvSpPr>
+          <p:cNvPr id="3" name="Content Placeholder 2"/>
+          <p:cNvSpPr>
+            <a:spLocks noGrp="1"/>
+          </p:cNvSpPr>
+          <p:nvPr>
+            <p:ph idx="1"/>
+          </p:nvPr>
+        </p:nvSpPr>
+        <p:spPr/>
+        <p:txBody>
+          <a:bodyPr/>
+          <a:lstStyle/>
+          <a:p>
+            <a:pPr lvl="0" indent="0" marL="0">
+              <a:buNone/>
+            </a:pPr>
+            <a:r>
+              <a:rPr b="1"/>
+              <a:t>🛑 Do Activity Parts 6–10 now</a:t>
+            </a:r>
+          </a:p>
+          <a:p>
+            <a:pPr lvl="0"/>
+            <a:r>
+              <a:rPr/>
+              <a:t>Label the seasons with </a:t>
+            </a:r>
+            <a:r>
+              <a:rPr>
+                <a:latin typeface="Courier"/>
+              </a:rPr>
+              <a:t>case_when()</a:t>
+            </a:r>
+            <a:r>
+              <a:rPr/>
+              <a:t> and summarize by year and season</a:t>
+            </a:r>
+          </a:p>
+          <a:p>
+            <a:pPr lvl="0"/>
+            <a:r>
+              <a:rPr/>
+              <a:t>Plot both seasons, then fit a model for each</a:t>
+            </a:r>
+          </a:p>
+          <a:p>
+            <a:pPr lvl="0"/>
+            <a:r>
+              <a:rPr/>
+              <a:t>Write the warming rates in °C per decade</a:t>
+            </a:r>
+          </a:p>
+          <a:p>
+            <a:pPr lvl="0"/>
+            <a:r>
+              <a:rPr/>
+              <a:t>Find the GSOD station for a city you choose — the analysis is your homework</a:t>
+            </a:r>
+          </a:p>
+        </p:txBody>
+      </p:sp>
+    </p:spTree>
+  </p:cSld>
+</p:sld>
+</file>
+
+<file path=ppt/slides/slide33.xml><?xml version="1.0" encoding="utf-8"?>
+<p:sld xmlns:a="http://schemas.openxmlformats.org/drawingml/2006/main" xmlns:r="http://schemas.openxmlformats.org/officeDocument/2006/relationships" xmlns:p="http://schemas.openxmlformats.org/presentationml/2006/main">
+  <p:cSld>
+    <p:spTree>
+      <p:nvGrpSpPr>
+        <p:cNvPr id="1" name=""/>
+        <p:cNvGrpSpPr/>
+        <p:nvPr/>
+      </p:nvGrpSpPr>
+      <p:grpSpPr>
+        <a:xfrm>
+          <a:off x="0" y="0"/>
+          <a:ext cx="0" cy="0"/>
+          <a:chOff x="0" y="0"/>
+          <a:chExt cx="0" cy="0"/>
+        </a:xfrm>
+      </p:grpSpPr>
+      <p:sp>
+        <p:nvSpPr>
+          <p:cNvPr id="2" name="Title 1"/>
+          <p:cNvSpPr>
+            <a:spLocks noGrp="1"/>
+          </p:cNvSpPr>
+          <p:nvPr>
+            <p:ph type="title"/>
+          </p:nvPr>
+        </p:nvSpPr>
+        <p:spPr>
+          <a:xfrm>
+            <a:off x="0" y="0"/>
+            <a:ext cx="9144000" cy="602780"/>
+          </a:xfrm>
+          <a:solidFill>
+            <a:srgbClr val="1A1A2E"/>
+          </a:solidFill>
+        </p:spPr>
+        <p:txBody>
+          <a:bodyPr/>
+          <a:lstStyle/>
+          <a:p>
+            <a:pPr lvl="0" indent="0" marL="0">
+              <a:buNone/>
+            </a:pPr>
+            <a:r>
+              <a:rPr/>
+              <a:t>What We Learned Today</a:t>
+            </a:r>
+          </a:p>
+        </p:txBody>
+      </p:sp>
+      <p:sp>
+        <p:nvSpPr>
+          <p:cNvPr id="3" name="Content Placeholder 2"/>
+          <p:cNvSpPr>
+            <a:spLocks noGrp="1"/>
+          </p:cNvSpPr>
+          <p:nvPr>
+            <p:ph idx="1" sz="half"/>
+          </p:nvPr>
+        </p:nvSpPr>
+        <p:spPr/>
+        <p:txBody>
+          <a:bodyPr/>
+          <a:lstStyle/>
+          <a:p>
             <a:pPr lvl="0" indent="0" marL="0">
               <a:buNone/>
             </a:pPr>
@@ -11798,7 +13668,7 @@
             </a:r>
             <a:r>
               <a:rPr/>
-              <a:t> — Duluth’s winter warms ~1.7× faster</a:t>
+              <a:t> — Duluth’s winter warms ~1.6× faster</a:t>
             </a:r>
           </a:p>
           <a:p>
@@ -11854,7 +13724,7 @@
             </a:r>
             <a:r>
               <a:rPr/>
-              <a:t> — Duluth, by station ID</a:t>
+              <a:t> — Duluth and your city, by station ID</a:t>
             </a:r>
           </a:p>
           <a:p>
@@ -11863,11 +13733,24 @@
               <a:rPr>
                 <a:latin typeface="Courier"/>
               </a:rPr>
-              <a:t>get_power()</a:t>
-            </a:r>
-            <a:r>
-              <a:rPr/>
-              <a:t> — anywhere, by coordinates</a:t>
+              <a:t>isd_history</a:t>
+            </a:r>
+            <a:r>
+              <a:rPr/>
+              <a:t> — find a station in any country</a:t>
+            </a:r>
+          </a:p>
+          <a:p>
+            <a:pPr lvl="0"/>
+            <a:r>
+              <a:rPr>
+                <a:latin typeface="Courier"/>
+              </a:rPr>
+              <a:t>bind_rows()</a:t>
+            </a:r>
+            <a:r>
+              <a:rPr/>
+              <a:t> — stack two places into one frame</a:t>
             </a:r>
           </a:p>
           <a:p>
@@ -12342,7 +14225,7 @@
             </a:r>
             <a:r>
               <a:rPr b="1"/>
-              <a:t>1948–2024</a:t>
+              <a:t>1948–2025</a:t>
             </a:r>
           </a:p>
           <a:p>
@@ -12353,7 +14236,22 @@
             </a:r>
             <a:r>
               <a:rPr/>
-              <a:t> — a different station ID back then</a:t>
+              <a:t> — a hole in the GSOD archive due to a data issues</a:t>
+            </a:r>
+          </a:p>
+          <a:p>
+            <a:pPr lvl="1"/>
+            <a:r>
+              <a:rPr/>
+              <a:t>so you get </a:t>
+            </a:r>
+            <a:r>
+              <a:rPr b="1"/>
+              <a:t>70</a:t>
+            </a:r>
+            <a:r>
+              <a:rPr/>
+              <a:t> years, not 78</a:t>
             </a:r>
           </a:p>
         </p:txBody>
@@ -12917,7 +14815,7 @@
             <a:pPr lvl="1"/>
             <a:r>
               <a:rPr/>
-              <a:t>69 years × 365 days ≈ </a:t>
+              <a:t>70 years × 365 days ≈ </a:t>
             </a:r>
             <a:r>
               <a:rPr b="1"/>
@@ -12987,9 +14885,9 @@
                 <a:tableStyleId>{5C22544A-7EE6-4342-B048-85BDC9FD1C3A}</a:tableStyleId>
               </a:tblPr>
               <a:tblGrid>
-                <a:gridCol w="1778000"/>
-                <a:gridCol w="1333500"/>
-                <a:gridCol w="1333500"/>
+                <a:gridCol w="1473200"/>
+                <a:gridCol w="1473200"/>
+                <a:gridCol w="1473200"/>
               </a:tblGrid>
               <a:tr h="0">
                 <a:tc>
@@ -13441,7 +15339,7 @@
                 </a:solidFill>
                 <a:latin typeface="Courier"/>
               </a:rPr>
-              <a:t>(tidyverse)  </a:t>
+              <a:t>(tidyverse) </a:t>
             </a:r>
             <a:r>
               <a:rPr>
@@ -13469,7 +15367,7 @@
                 </a:solidFill>
                 <a:latin typeface="Courier"/>
               </a:rPr>
-              <a:t>(janitor)    </a:t>
+              <a:t>(janitor) </a:t>
             </a:r>
             <a:r>
               <a:rPr>
@@ -13497,7 +15395,7 @@
                 </a:solidFill>
                 <a:latin typeface="Courier"/>
               </a:rPr>
-              <a:t>(GSODR)      </a:t>
+              <a:t>(GSODR) </a:t>
             </a:r>
             <a:r>
               <a:rPr>
@@ -13525,7 +15423,7 @@
                 </a:solidFill>
                 <a:latin typeface="Courier"/>
               </a:rPr>
-              <a:t>(nasapower)  </a:t>
+              <a:t>(nasapower) </a:t>
             </a:r>
             <a:r>
               <a:rPr>
@@ -13534,7 +15432,7 @@
                 </a:solidFill>
                 <a:latin typeface="Courier"/>
               </a:rPr>
-              <a:t># NASA data by lat/long - your city</a:t>
+              <a:t># NASA data by lat/long - another source</a:t>
             </a:r>
           </a:p>
           <a:p>
@@ -13548,27 +15446,71 @@
                 </a:solidFill>
                 <a:latin typeface="Courier"/>
               </a:rPr>
-              <a:t># Download daily Duluth weather, 1948-2024 -------------</a:t>
+              <a:t># Download the whole Duluth record, 1948-2025 ----------</a:t>
             </a:r>
             <a:br/>
             <a:r>
               <a:rPr>
                 <a:solidFill>
+                  <a:srgbClr val="003B4F"/>
+                </a:solidFill>
+                <a:latin typeface="Courier"/>
+              </a:rPr>
+              <a:t>duluth_df &lt;- </a:t>
+            </a:r>
+            <a:r>
+              <a:rPr>
+                <a:solidFill>
+                  <a:srgbClr val="4758AB"/>
+                </a:solidFill>
+                <a:latin typeface="Courier"/>
+              </a:rPr>
+              <a:t>get_GSOD</a:t>
+            </a:r>
+            <a:r>
+              <a:rPr>
+                <a:solidFill>
+                  <a:srgbClr val="003B4F"/>
+                </a:solidFill>
+                <a:latin typeface="Courier"/>
+              </a:rPr>
+              <a:t>(</a:t>
+            </a:r>
+            <a:r>
+              <a:rPr>
+                <a:solidFill>
+                  <a:srgbClr val="657422"/>
+                </a:solidFill>
+                <a:latin typeface="Courier"/>
+              </a:rPr>
+              <a:t>years =</a:t>
+            </a:r>
+            <a:r>
+              <a:rPr>
+                <a:solidFill>
+                  <a:srgbClr val="003B4F"/>
+                </a:solidFill>
+                <a:latin typeface="Courier"/>
+              </a:rPr>
+              <a:t> </a:t>
+            </a:r>
+            <a:r>
+              <a:rPr>
+                <a:solidFill>
+                  <a:srgbClr val="AD0000"/>
+                </a:solidFill>
+                <a:latin typeface="Courier"/>
+              </a:rPr>
+              <a:t>1948</a:t>
+            </a:r>
+            <a:r>
+              <a:rPr>
+                <a:solidFill>
                   <a:srgbClr val="5E5E5E"/>
                 </a:solidFill>
                 <a:latin typeface="Courier"/>
               </a:rPr>
-              <a:t># 1965-1972 are missing for this station, so skip them</a:t>
-            </a:r>
-            <a:br/>
-            <a:r>
-              <a:rPr>
-                <a:solidFill>
-                  <a:srgbClr val="003B4F"/>
-                </a:solidFill>
-                <a:latin typeface="Courier"/>
-              </a:rPr>
-              <a:t>gap_years &lt;- </a:t>
+              <a:t>:</a:t>
             </a:r>
             <a:r>
               <a:rPr>
@@ -13577,126 +15519,16 @@
                 </a:solidFill>
                 <a:latin typeface="Courier"/>
               </a:rPr>
-              <a:t>1965</a:t>
-            </a:r>
-            <a:r>
-              <a:rPr>
-                <a:solidFill>
-                  <a:srgbClr val="5E5E5E"/>
-                </a:solidFill>
-                <a:latin typeface="Courier"/>
-              </a:rPr>
-              <a:t>:</a:t>
-            </a:r>
-            <a:r>
-              <a:rPr>
-                <a:solidFill>
-                  <a:srgbClr val="AD0000"/>
-                </a:solidFill>
-                <a:latin typeface="Courier"/>
-              </a:rPr>
-              <a:t>1972</a:t>
-            </a:r>
-            <a:br/>
-            <a:br/>
-            <a:r>
-              <a:rPr>
-                <a:solidFill>
-                  <a:srgbClr val="003B4F"/>
-                </a:solidFill>
-                <a:latin typeface="Courier"/>
-              </a:rPr>
-              <a:t>duluth_df &lt;- </a:t>
-            </a:r>
-            <a:r>
-              <a:rPr>
-                <a:solidFill>
-                  <a:srgbClr val="4758AB"/>
-                </a:solidFill>
-                <a:latin typeface="Courier"/>
-              </a:rPr>
-              <a:t>get_GSOD</a:t>
-            </a:r>
-            <a:r>
-              <a:rPr>
-                <a:solidFill>
-                  <a:srgbClr val="003B4F"/>
-                </a:solidFill>
-                <a:latin typeface="Courier"/>
-              </a:rPr>
-              <a:t>(</a:t>
-            </a:r>
-            <a:r>
-              <a:rPr>
-                <a:solidFill>
-                  <a:srgbClr val="657422"/>
-                </a:solidFill>
-                <a:latin typeface="Courier"/>
-              </a:rPr>
-              <a:t>years =</a:t>
-            </a:r>
-            <a:r>
-              <a:rPr>
-                <a:solidFill>
-                  <a:srgbClr val="003B4F"/>
-                </a:solidFill>
-                <a:latin typeface="Courier"/>
-              </a:rPr>
-              <a:t> </a:t>
-            </a:r>
-            <a:r>
-              <a:rPr>
-                <a:solidFill>
-                  <a:srgbClr val="4758AB"/>
-                </a:solidFill>
-                <a:latin typeface="Courier"/>
-              </a:rPr>
-              <a:t>setdiff</a:t>
-            </a:r>
-            <a:r>
-              <a:rPr>
-                <a:solidFill>
-                  <a:srgbClr val="003B4F"/>
-                </a:solidFill>
-                <a:latin typeface="Courier"/>
-              </a:rPr>
-              <a:t>(</a:t>
-            </a:r>
-            <a:r>
-              <a:rPr>
-                <a:solidFill>
-                  <a:srgbClr val="AD0000"/>
-                </a:solidFill>
-                <a:latin typeface="Courier"/>
-              </a:rPr>
-              <a:t>1948</a:t>
-            </a:r>
-            <a:r>
-              <a:rPr>
-                <a:solidFill>
-                  <a:srgbClr val="5E5E5E"/>
-                </a:solidFill>
-                <a:latin typeface="Courier"/>
-              </a:rPr>
-              <a:t>:</a:t>
-            </a:r>
-            <a:r>
-              <a:rPr>
-                <a:solidFill>
-                  <a:srgbClr val="AD0000"/>
-                </a:solidFill>
-                <a:latin typeface="Courier"/>
-              </a:rPr>
-              <a:t>2024</a:t>
-            </a:r>
-            <a:r>
-              <a:rPr>
-                <a:solidFill>
-                  <a:srgbClr val="003B4F"/>
-                </a:solidFill>
-                <a:latin typeface="Courier"/>
-              </a:rPr>
-              <a:t>, gap_years),</a:t>
+              <a:t>2025</a:t>
+            </a:r>
+            <a:r>
+              <a:rPr>
+                <a:solidFill>
+                  <a:srgbClr val="003B4F"/>
+                </a:solidFill>
+                <a:latin typeface="Courier"/>
+              </a:rPr>
+              <a:t>,</a:t>
             </a:r>
             <a:br/>
             <a:r>
@@ -13833,7 +15665,32 @@
               <a:rPr>
                 <a:latin typeface="Courier"/>
               </a:rPr>
-              <a:t>1948:2024</a:t>
+              <a:t>get_GSOD()</a:t>
+            </a:r>
+            <a:r>
+              <a:rPr/>
+              <a:t> takes a </a:t>
+            </a:r>
+            <a:r>
+              <a:rPr b="1"/>
+              <a:t>year range</a:t>
+            </a:r>
+            <a:r>
+              <a:rPr/>
+              <a:t> and a </a:t>
+            </a:r>
+            <a:r>
+              <a:rPr b="1"/>
+              <a:t>station</a:t>
+            </a:r>
+          </a:p>
+          <a:p>
+            <a:pPr lvl="1"/>
+            <a:r>
+              <a:rPr>
+                <a:latin typeface="Courier"/>
+              </a:rPr>
+              <a:t>1948:2025</a:t>
             </a:r>
             <a:r>
               <a:rPr/>
@@ -13843,32 +15700,31 @@
           <a:p>
             <a:pPr lvl="1"/>
             <a:r>
-              <a:rPr>
-                <a:latin typeface="Courier"/>
-              </a:rPr>
-              <a:t>setdiff()</a:t>
-            </a:r>
-            <a:r>
-              <a:rPr/>
-              <a:t> removes the 8 missing years from that vector</a:t>
-            </a:r>
-          </a:p>
-          <a:p>
-            <a:pPr lvl="2"/>
-            <a:r>
-              <a:rPr/>
-              <a:t>ask for a year the station does not have and the </a:t>
+              <a:rPr/>
+              <a:t>years NOAA doesn’t have are </a:t>
             </a:r>
             <a:r>
               <a:rPr b="1"/>
-              <a:t>whole download fails</a:t>
+              <a:t>skipped</a:t>
+            </a:r>
+            <a:r>
+              <a:rPr/>
+              <a:t>, so you get </a:t>
+            </a:r>
+            <a:r>
+              <a:rPr b="1"/>
+              <a:t>70</a:t>
+            </a:r>
+            <a:r>
+              <a:rPr/>
+              <a:t>, not 78</a:t>
             </a:r>
           </a:p>
           <a:p>
             <a:pPr lvl="1"/>
             <a:r>
               <a:rPr/>
-              <a:t>it takes a minute; 69 years of daily data is a lot</a:t>
+              <a:t>it takes a minute; 70 years of daily data is a lot</a:t>
             </a:r>
           </a:p>
           <a:p>

--- a/docs/content/weather/weather_lecture.pptx
+++ b/docs/content/weather/weather_lecture.pptx
@@ -3372,7 +3372,7 @@
             </a:pPr>
             <a:r>
               <a:rPr/>
-              <a:t>2026-10-09</a:t>
+              <a:t>2026-10-19</a:t>
             </a:r>
           </a:p>
         </p:txBody>

--- a/docs/content/weather/weather_lecture.pptx
+++ b/docs/content/weather/weather_lecture.pptx
@@ -3372,7 +3372,7 @@
             </a:pPr>
             <a:r>
               <a:rPr/>
-              <a:t>2026-10-19</a:t>
+              <a:t>2026-10-22</a:t>
             </a:r>
           </a:p>
         </p:txBody>
